--- a/03-Python程序设计-项目实战/V2授课PPT/W06-第12次课-搭建多源数据采集中枢.pptx
+++ b/03-Python程序设计-项目实战/V2授课PPT/W06-第12次课-搭建多源数据采集中枢.pptx
@@ -9,6 +9,9 @@
     <p:sldId id="280" r:id="rId32"/>
     <p:sldId id="311" r:id="rId63"/>
     <p:sldId id="319" r:id="rId71"/>
+    <p:sldId id="368" r:id="rId16"/>
+    <p:sldId id="369" r:id="rId17"/>
+    <p:sldId id="370" r:id="rId18"/>
     <p:sldId id="367" r:id="rId119"/>
     <p:sldId id="338" r:id="rId90"/>
     <p:sldId id="365" r:id="rId117"/>
@@ -4310,6 +4313,2188 @@
 </p:sld>
 </file>
 
+<file path=ppt/slides/slide10.xml><?xml version="1.0" encoding="utf-8"?>
+<p:sld xmlns:a="http://schemas.openxmlformats.org/drawingml/2006/main" xmlns:p="http://schemas.openxmlformats.org/presentationml/2006/main" xmlns:r="http://schemas.openxmlformats.org/officeDocument/2006/relationships">
+  <p:cSld>
+    <p:spTree>
+      <p:nvGrpSpPr>
+        <p:cNvPr id="1" name=""/>
+        <p:cNvGrpSpPr/>
+        <p:nvPr/>
+      </p:nvGrpSpPr>
+      <p:grpSpPr/>
+      <p:sp>
+        <p:nvSpPr>
+          <p:cNvPr id="2" name="Rectangle 1"/>
+          <p:cNvSpPr/>
+          <p:nvPr/>
+        </p:nvSpPr>
+        <p:spPr>
+          <a:xfrm>
+            <a:off x="0" y="0"/>
+            <a:ext cx="12192000" cy="1150000"/>
+          </a:xfrm>
+          <a:prstGeom prst="rect">
+            <a:avLst/>
+          </a:prstGeom>
+          <a:solidFill>
+            <a:srgbClr val="010328"/>
+          </a:solidFill>
+          <a:ln>
+            <a:noFill/>
+          </a:ln>
+          <a:effectLst/>
+        </p:spPr>
+        <p:style>
+          <a:lnRef idx="1">
+            <a:schemeClr val="accent1"/>
+          </a:lnRef>
+          <a:fillRef idx="3">
+            <a:schemeClr val="accent1"/>
+          </a:fillRef>
+          <a:effectRef idx="2">
+            <a:schemeClr val="accent1"/>
+          </a:effectRef>
+          <a:fontRef idx="minor">
+            <a:schemeClr val="lt1"/>
+          </a:fontRef>
+        </p:style>
+        <p:txBody>
+          <a:bodyPr rtlCol="0" anchor="ctr"/>
+          <a:lstStyle/>
+          <a:p>
+            <a:pPr algn="ctr"/>
+          </a:p>
+        </p:txBody>
+      </p:sp>
+      <p:sp>
+        <p:nvSpPr>
+          <p:cNvPr id="3" name="Rectangle 2"/>
+          <p:cNvSpPr/>
+          <p:nvPr/>
+        </p:nvSpPr>
+        <p:spPr>
+          <a:xfrm>
+            <a:off x="0" y="1150000"/>
+            <a:ext cx="2600000" cy="70000"/>
+          </a:xfrm>
+          <a:prstGeom prst="rect">
+            <a:avLst/>
+          </a:prstGeom>
+          <a:solidFill>
+            <a:srgbClr val="F5670F"/>
+          </a:solidFill>
+          <a:ln>
+            <a:noFill/>
+          </a:ln>
+          <a:effectLst/>
+        </p:spPr>
+        <p:style>
+          <a:lnRef idx="1">
+            <a:schemeClr val="accent1"/>
+          </a:lnRef>
+          <a:fillRef idx="3">
+            <a:schemeClr val="accent1"/>
+          </a:fillRef>
+          <a:effectRef idx="2">
+            <a:schemeClr val="accent1"/>
+          </a:effectRef>
+          <a:fontRef idx="minor">
+            <a:schemeClr val="lt1"/>
+          </a:fontRef>
+        </p:style>
+        <p:txBody>
+          <a:bodyPr rtlCol="0" anchor="ctr"/>
+          <a:lstStyle/>
+          <a:p>
+            <a:pPr algn="ctr"/>
+          </a:p>
+        </p:txBody>
+      </p:sp>
+      <p:sp>
+        <p:nvSpPr>
+          <p:cNvPr id="4" name="TextBox 3"/>
+          <p:cNvSpPr txBox="1"/>
+          <p:nvPr/>
+        </p:nvSpPr>
+        <p:spPr>
+          <a:xfrm>
+            <a:off x="700000" y="300000"/>
+            <a:ext cx="10792000" cy="700000"/>
+          </a:xfrm>
+          <a:prstGeom prst="rect">
+            <a:avLst/>
+          </a:prstGeom>
+          <a:noFill/>
+        </p:spPr>
+        <p:txBody>
+          <a:bodyPr wrap="square" anchor="t">
+            <a:spAutoFit/>
+          </a:bodyPr>
+          <a:lstStyle/>
+          <a:p>
+            <a:pPr algn="l">
+              <a:lnSpc>
+                <a:spcPct val="110000"/>
+              </a:lnSpc>
+              <a:spcAft>
+                <a:spcPts val="600"/>
+              </a:spcAft>
+            </a:pPr>
+            <a:r>
+              <a:rPr sz="2400" b="1">
+                <a:solidFill>
+                  <a:srgbClr val="FFFFFF"/>
+                </a:solidFill>
+                <a:latin typeface="微软雅黑"/>
+              </a:rPr>
+              <a:t>工程化设计：规则外置 —— 改配置不改代码</a:t>
+            </a:r>
+            <a:endParaRPr sz="2400" b="1">
+              <a:solidFill>
+                <a:srgbClr val="FFFFFF"/>
+              </a:solidFill>
+              <a:latin typeface="微软雅黑" panose="020B0502040204020203" charset="-122"/>
+            </a:endParaRPr>
+          </a:p>
+        </p:txBody>
+      </p:sp>
+      <p:sp>
+        <p:nvSpPr>
+          <p:cNvPr id="5" name="Rectangle 4"/>
+          <p:cNvSpPr/>
+          <p:nvPr/>
+        </p:nvSpPr>
+        <p:spPr>
+          <a:xfrm>
+            <a:off x="760000" y="1750000"/>
+            <a:ext cx="10900000" cy="700000"/>
+          </a:xfrm>
+          <a:prstGeom prst="rect">
+            <a:avLst/>
+          </a:prstGeom>
+          <a:solidFill>
+            <a:srgbClr val="010328"/>
+          </a:solidFill>
+          <a:ln>
+            <a:noFill/>
+          </a:ln>
+          <a:effectLst/>
+        </p:spPr>
+        <p:style>
+          <a:lnRef idx="1">
+            <a:schemeClr val="accent1"/>
+          </a:lnRef>
+          <a:fillRef idx="3">
+            <a:schemeClr val="accent1"/>
+          </a:fillRef>
+          <a:effectRef idx="2">
+            <a:schemeClr val="accent1"/>
+          </a:effectRef>
+          <a:fontRef idx="minor">
+            <a:schemeClr val="lt1"/>
+          </a:fontRef>
+        </p:style>
+        <p:txBody>
+          <a:bodyPr rtlCol="0" anchor="ctr"/>
+          <a:lstStyle/>
+          <a:p>
+            <a:pPr algn="ctr"/>
+          </a:p>
+        </p:txBody>
+      </p:sp>
+      <p:sp>
+        <p:nvSpPr>
+          <p:cNvPr id="6" name="TextBox 5"/>
+          <p:cNvSpPr txBox="1"/>
+          <p:nvPr/>
+        </p:nvSpPr>
+        <p:spPr>
+          <a:xfrm>
+            <a:off x="1000000" y="1830000"/>
+            <a:ext cx="10300000" cy="540000"/>
+          </a:xfrm>
+          <a:prstGeom prst="rect">
+            <a:avLst/>
+          </a:prstGeom>
+          <a:noFill/>
+        </p:spPr>
+        <p:txBody>
+          <a:bodyPr wrap="square" anchor="t">
+            <a:spAutoFit/>
+          </a:bodyPr>
+          <a:lstStyle/>
+          <a:p>
+            <a:pPr algn="l">
+              <a:lnSpc>
+                <a:spcPct val="110000"/>
+              </a:lnSpc>
+              <a:spcAft>
+                <a:spcPts val="600"/>
+              </a:spcAft>
+            </a:pPr>
+            <a:r>
+              <a:rPr sz="2000" b="1">
+                <a:solidFill>
+                  <a:srgbClr val="FFFFFF"/>
+                </a:solidFill>
+                <a:latin typeface="微软雅黑"/>
+              </a:rPr>
+              <a:t>B侧 · 第三种代码形态 · 企业级分层</a:t>
+            </a:r>
+            <a:endParaRPr sz="2000" b="1">
+              <a:solidFill>
+                <a:srgbClr val="FFFFFF"/>
+              </a:solidFill>
+              <a:latin typeface="微软雅黑" panose="020B0502040204020203" charset="-122"/>
+            </a:endParaRPr>
+          </a:p>
+        </p:txBody>
+      </p:sp>
+      <p:sp>
+        <p:nvSpPr>
+          <p:cNvPr id="7" name="Rectangle 6"/>
+          <p:cNvSpPr/>
+          <p:nvPr/>
+        </p:nvSpPr>
+        <p:spPr>
+          <a:xfrm>
+            <a:off x="760000" y="2650000"/>
+            <a:ext cx="5300000" cy="1500000"/>
+          </a:xfrm>
+          <a:prstGeom prst="rect">
+            <a:avLst/>
+          </a:prstGeom>
+          <a:solidFill>
+            <a:srgbClr val="F3F6FD"/>
+          </a:solidFill>
+          <a:ln>
+            <a:solidFill>
+              <a:srgbClr val="0545E8"/>
+            </a:solidFill>
+          </a:ln>
+          <a:effectLst/>
+        </p:spPr>
+        <p:style>
+          <a:lnRef idx="1">
+            <a:schemeClr val="accent1"/>
+          </a:lnRef>
+          <a:fillRef idx="3">
+            <a:schemeClr val="accent1"/>
+          </a:fillRef>
+          <a:effectRef idx="2">
+            <a:schemeClr val="accent1"/>
+          </a:effectRef>
+          <a:fontRef idx="minor">
+            <a:schemeClr val="lt1"/>
+          </a:fontRef>
+        </p:style>
+        <p:txBody>
+          <a:bodyPr rtlCol="0" anchor="ctr"/>
+          <a:lstStyle/>
+          <a:p>
+            <a:pPr algn="ctr"/>
+          </a:p>
+        </p:txBody>
+      </p:sp>
+      <p:sp>
+        <p:nvSpPr>
+          <p:cNvPr id="8" name="Rectangle 7"/>
+          <p:cNvSpPr/>
+          <p:nvPr/>
+        </p:nvSpPr>
+        <p:spPr>
+          <a:xfrm>
+            <a:off x="760000" y="2650000"/>
+            <a:ext cx="120000" cy="1500000"/>
+          </a:xfrm>
+          <a:prstGeom prst="rect">
+            <a:avLst/>
+          </a:prstGeom>
+          <a:solidFill>
+            <a:srgbClr val="0545E8"/>
+          </a:solidFill>
+          <a:ln>
+            <a:noFill/>
+          </a:ln>
+          <a:effectLst/>
+        </p:spPr>
+        <p:style>
+          <a:lnRef idx="1">
+            <a:schemeClr val="accent1"/>
+          </a:lnRef>
+          <a:fillRef idx="3">
+            <a:schemeClr val="accent1"/>
+          </a:fillRef>
+          <a:effectRef idx="2">
+            <a:schemeClr val="accent1"/>
+          </a:effectRef>
+          <a:fontRef idx="minor">
+            <a:schemeClr val="lt1"/>
+          </a:fontRef>
+        </p:style>
+        <p:txBody>
+          <a:bodyPr rtlCol="0" anchor="ctr"/>
+          <a:lstStyle/>
+          <a:p>
+            <a:pPr algn="ctr"/>
+          </a:p>
+        </p:txBody>
+      </p:sp>
+      <p:sp>
+        <p:nvSpPr>
+          <p:cNvPr id="9" name="TextBox 8"/>
+          <p:cNvSpPr txBox="1"/>
+          <p:nvPr/>
+        </p:nvSpPr>
+        <p:spPr>
+          <a:xfrm>
+            <a:off x="1000000" y="2750000"/>
+            <a:ext cx="1600000" cy="360000"/>
+          </a:xfrm>
+          <a:prstGeom prst="rect">
+            <a:avLst/>
+          </a:prstGeom>
+          <a:noFill/>
+        </p:spPr>
+        <p:txBody>
+          <a:bodyPr wrap="square" anchor="ctr">
+            <a:spAutoFit/>
+          </a:bodyPr>
+          <a:lstStyle/>
+          <a:p>
+            <a:pPr algn="l">
+              <a:lnSpc>
+                <a:spcPct val="110000"/>
+              </a:lnSpc>
+              <a:spcAft>
+                <a:spcPts val="600"/>
+              </a:spcAft>
+            </a:pPr>
+            <a:r>
+              <a:rPr sz="1400" b="1">
+                <a:solidFill>
+                  <a:srgbClr val="0545E8"/>
+                </a:solidFill>
+                <a:latin typeface="微软雅黑"/>
+              </a:rPr>
+              <a:t>◆ 为什么外置</a:t>
+            </a:r>
+            <a:endParaRPr sz="1400" b="1">
+              <a:solidFill>
+                <a:srgbClr val="0545E8"/>
+              </a:solidFill>
+              <a:latin typeface="微软雅黑" panose="020B0502040204020203" charset="-122"/>
+            </a:endParaRPr>
+          </a:p>
+        </p:txBody>
+      </p:sp>
+      <p:sp>
+        <p:nvSpPr>
+          <p:cNvPr id="10" name="TextBox 9"/>
+          <p:cNvSpPr txBox="1"/>
+          <p:nvPr/>
+        </p:nvSpPr>
+        <p:spPr>
+          <a:xfrm>
+            <a:off x="1000000" y="3170000"/>
+            <a:ext cx="4800000" cy="900000"/>
+          </a:xfrm>
+          <a:prstGeom prst="rect">
+            <a:avLst/>
+          </a:prstGeom>
+          <a:noFill/>
+        </p:spPr>
+        <p:txBody>
+          <a:bodyPr wrap="square" anchor="t">
+            <a:spAutoFit/>
+          </a:bodyPr>
+          <a:lstStyle/>
+          <a:p>
+            <a:pPr algn="l">
+              <a:lnSpc>
+                <a:spcPct val="130000"/>
+              </a:lnSpc>
+              <a:spcAft>
+                <a:spcPts val="600"/>
+              </a:spcAft>
+            </a:pPr>
+            <a:r>
+              <a:rPr sz="1300" b="0">
+                <a:solidFill>
+                  <a:srgbClr val="010328"/>
+                </a:solidFill>
+                <a:latin typeface="微软雅黑"/>
+              </a:rPr>
+              <a:t>阈值/批量/轮次/数据源全在 config/rules.yaml——业务规则与代码分离，改一处不动逻辑</a:t>
+            </a:r>
+            <a:endParaRPr sz="1300" b="0">
+              <a:solidFill>
+                <a:srgbClr val="010328"/>
+              </a:solidFill>
+              <a:latin typeface="微软雅黑" panose="020B0502040204020203" charset="-122"/>
+            </a:endParaRPr>
+          </a:p>
+        </p:txBody>
+      </p:sp>
+      <p:sp>
+        <p:nvSpPr>
+          <p:cNvPr id="11" name="Rectangle 10"/>
+          <p:cNvSpPr/>
+          <p:nvPr/>
+        </p:nvSpPr>
+        <p:spPr>
+          <a:xfrm>
+            <a:off x="760000" y="4300000"/>
+            <a:ext cx="5300000" cy="1500000"/>
+          </a:xfrm>
+          <a:prstGeom prst="rect">
+            <a:avLst/>
+          </a:prstGeom>
+          <a:solidFill>
+            <a:srgbClr val="F3F6FD"/>
+          </a:solidFill>
+          <a:ln>
+            <a:solidFill>
+              <a:srgbClr val="0475B6"/>
+            </a:solidFill>
+          </a:ln>
+          <a:effectLst/>
+        </p:spPr>
+        <p:style>
+          <a:lnRef idx="1">
+            <a:schemeClr val="accent1"/>
+          </a:lnRef>
+          <a:fillRef idx="3">
+            <a:schemeClr val="accent1"/>
+          </a:fillRef>
+          <a:effectRef idx="2">
+            <a:schemeClr val="accent1"/>
+          </a:effectRef>
+          <a:fontRef idx="minor">
+            <a:schemeClr val="lt1"/>
+          </a:fontRef>
+        </p:style>
+        <p:txBody>
+          <a:bodyPr rtlCol="0" anchor="ctr"/>
+          <a:lstStyle/>
+          <a:p>
+            <a:pPr algn="ctr"/>
+          </a:p>
+        </p:txBody>
+      </p:sp>
+      <p:sp>
+        <p:nvSpPr>
+          <p:cNvPr id="12" name="Rectangle 11"/>
+          <p:cNvSpPr/>
+          <p:nvPr/>
+        </p:nvSpPr>
+        <p:spPr>
+          <a:xfrm>
+            <a:off x="760000" y="4300000"/>
+            <a:ext cx="120000" cy="1500000"/>
+          </a:xfrm>
+          <a:prstGeom prst="rect">
+            <a:avLst/>
+          </a:prstGeom>
+          <a:solidFill>
+            <a:srgbClr val="0475B6"/>
+          </a:solidFill>
+          <a:ln>
+            <a:noFill/>
+          </a:ln>
+          <a:effectLst/>
+        </p:spPr>
+        <p:style>
+          <a:lnRef idx="1">
+            <a:schemeClr val="accent1"/>
+          </a:lnRef>
+          <a:fillRef idx="3">
+            <a:schemeClr val="accent1"/>
+          </a:fillRef>
+          <a:effectRef idx="2">
+            <a:schemeClr val="accent1"/>
+          </a:effectRef>
+          <a:fontRef idx="minor">
+            <a:schemeClr val="lt1"/>
+          </a:fontRef>
+        </p:style>
+        <p:txBody>
+          <a:bodyPr rtlCol="0" anchor="ctr"/>
+          <a:lstStyle/>
+          <a:p>
+            <a:pPr algn="ctr"/>
+          </a:p>
+        </p:txBody>
+      </p:sp>
+      <p:sp>
+        <p:nvSpPr>
+          <p:cNvPr id="13" name="TextBox 12"/>
+          <p:cNvSpPr txBox="1"/>
+          <p:nvPr/>
+        </p:nvSpPr>
+        <p:spPr>
+          <a:xfrm>
+            <a:off x="1000000" y="4400000"/>
+            <a:ext cx="1600000" cy="360000"/>
+          </a:xfrm>
+          <a:prstGeom prst="rect">
+            <a:avLst/>
+          </a:prstGeom>
+          <a:noFill/>
+        </p:spPr>
+        <p:txBody>
+          <a:bodyPr wrap="square" anchor="ctr">
+            <a:spAutoFit/>
+          </a:bodyPr>
+          <a:lstStyle/>
+          <a:p>
+            <a:pPr algn="l">
+              <a:lnSpc>
+                <a:spcPct val="110000"/>
+              </a:lnSpc>
+              <a:spcAft>
+                <a:spcPts val="600"/>
+              </a:spcAft>
+            </a:pPr>
+            <a:r>
+              <a:rPr sz="1400" b="1">
+                <a:solidFill>
+                  <a:srgbClr val="0475B6"/>
+                </a:solidFill>
+                <a:latin typeface="微软雅黑"/>
+              </a:rPr>
+              <a:t>◆ 收益</a:t>
+            </a:r>
+            <a:endParaRPr sz="1400" b="1">
+              <a:solidFill>
+                <a:srgbClr val="0475B6"/>
+              </a:solidFill>
+              <a:latin typeface="微软雅黑" panose="020B0502040204020203" charset="-122"/>
+            </a:endParaRPr>
+          </a:p>
+        </p:txBody>
+      </p:sp>
+      <p:sp>
+        <p:nvSpPr>
+          <p:cNvPr id="14" name="TextBox 13"/>
+          <p:cNvSpPr txBox="1"/>
+          <p:nvPr/>
+        </p:nvSpPr>
+        <p:spPr>
+          <a:xfrm>
+            <a:off x="1000000" y="4820000"/>
+            <a:ext cx="4800000" cy="900000"/>
+          </a:xfrm>
+          <a:prstGeom prst="rect">
+            <a:avLst/>
+          </a:prstGeom>
+          <a:noFill/>
+        </p:spPr>
+        <p:txBody>
+          <a:bodyPr wrap="square" anchor="t">
+            <a:spAutoFit/>
+          </a:bodyPr>
+          <a:lstStyle/>
+          <a:p>
+            <a:pPr algn="l">
+              <a:lnSpc>
+                <a:spcPct val="130000"/>
+              </a:lnSpc>
+              <a:spcAft>
+                <a:spcPts val="600"/>
+              </a:spcAft>
+            </a:pPr>
+            <a:r>
+              <a:rPr sz="1300" b="0">
+                <a:solidFill>
+                  <a:srgbClr val="010328"/>
+                </a:solidFill>
+                <a:latin typeface="微软雅黑"/>
+              </a:rPr>
+              <a:t>二次运行结果一致(种子固定)；配置修改不需重编译/重分发——现场调参即改即用</a:t>
+            </a:r>
+            <a:endParaRPr sz="1300" b="0">
+              <a:solidFill>
+                <a:srgbClr val="010328"/>
+              </a:solidFill>
+              <a:latin typeface="微软雅黑" panose="020B0502040204020203" charset="-122"/>
+            </a:endParaRPr>
+          </a:p>
+        </p:txBody>
+      </p:sp>
+      <p:sp>
+        <p:nvSpPr>
+          <p:cNvPr id="15" name="Rectangle 14"/>
+          <p:cNvSpPr/>
+          <p:nvPr/>
+        </p:nvSpPr>
+        <p:spPr>
+          <a:xfrm>
+            <a:off x="6300000" y="2650000"/>
+            <a:ext cx="5360000" cy="1500000"/>
+          </a:xfrm>
+          <a:prstGeom prst="rect">
+            <a:avLst/>
+          </a:prstGeom>
+          <a:solidFill>
+            <a:srgbClr val="0D112A"/>
+          </a:solidFill>
+          <a:ln>
+            <a:noFill/>
+          </a:ln>
+          <a:effectLst/>
+        </p:spPr>
+        <p:style>
+          <a:lnRef idx="1">
+            <a:schemeClr val="accent1"/>
+          </a:lnRef>
+          <a:fillRef idx="3">
+            <a:schemeClr val="accent1"/>
+          </a:fillRef>
+          <a:effectRef idx="2">
+            <a:schemeClr val="accent1"/>
+          </a:effectRef>
+          <a:fontRef idx="minor">
+            <a:schemeClr val="lt1"/>
+          </a:fontRef>
+        </p:style>
+        <p:txBody>
+          <a:bodyPr rtlCol="0" anchor="ctr"/>
+          <a:lstStyle/>
+          <a:p>
+            <a:pPr algn="ctr"/>
+          </a:p>
+        </p:txBody>
+      </p:sp>
+      <p:sp>
+        <p:nvSpPr>
+          <p:cNvPr id="16" name="Rectangle 15"/>
+          <p:cNvSpPr/>
+          <p:nvPr/>
+        </p:nvSpPr>
+        <p:spPr>
+          <a:xfrm>
+            <a:off x="6300000" y="2650000"/>
+            <a:ext cx="5360000" cy="120000"/>
+          </a:xfrm>
+          <a:prstGeom prst="rect">
+            <a:avLst/>
+          </a:prstGeom>
+          <a:solidFill>
+            <a:srgbClr val="F5670F"/>
+          </a:solidFill>
+          <a:ln>
+            <a:noFill/>
+          </a:ln>
+          <a:effectLst/>
+        </p:spPr>
+        <p:style>
+          <a:lnRef idx="1">
+            <a:schemeClr val="accent1"/>
+          </a:lnRef>
+          <a:fillRef idx="3">
+            <a:schemeClr val="accent1"/>
+          </a:fillRef>
+          <a:effectRef idx="2">
+            <a:schemeClr val="accent1"/>
+          </a:effectRef>
+          <a:fontRef idx="minor">
+            <a:schemeClr val="lt1"/>
+          </a:fontRef>
+        </p:style>
+        <p:txBody>
+          <a:bodyPr rtlCol="0" anchor="ctr"/>
+          <a:lstStyle/>
+          <a:p>
+            <a:pPr algn="ctr"/>
+          </a:p>
+        </p:txBody>
+      </p:sp>
+      <p:sp>
+        <p:nvSpPr>
+          <p:cNvPr id="17" name="TextBox 16"/>
+          <p:cNvSpPr txBox="1"/>
+          <p:nvPr/>
+        </p:nvSpPr>
+        <p:spPr>
+          <a:xfrm>
+            <a:off x="6600000" y="2930000"/>
+            <a:ext cx="4800000" cy="1100000"/>
+          </a:xfrm>
+          <a:prstGeom prst="rect">
+            <a:avLst/>
+          </a:prstGeom>
+          <a:noFill/>
+        </p:spPr>
+        <p:txBody>
+          <a:bodyPr wrap="square" anchor="t">
+            <a:spAutoFit/>
+          </a:bodyPr>
+          <a:lstStyle/>
+          <a:p>
+            <a:pPr algn="l">
+              <a:lnSpc>
+                <a:spcPct val="125000"/>
+              </a:lnSpc>
+              <a:spcAft>
+                <a:spcPts val="600"/>
+              </a:spcAft>
+            </a:pPr>
+            <a:r>
+              <a:rPr sz="1150" b="0">
+                <a:solidFill>
+                  <a:srgbClr val="D6DEF6"/>
+                </a:solidFill>
+                <a:latin typeface="微软雅黑"/>
+              </a:rPr>
+              <a:t>warn:80  danger:95  batch:3  rounds:4</a:t>
+            </a:r>
+            <a:endParaRPr sz="1150" b="0">
+              <a:solidFill>
+                <a:srgbClr val="D6DEF6"/>
+              </a:solidFill>
+              <a:latin typeface="微软雅黑" panose="020B0502040204020203" charset="-122"/>
+            </a:endParaRPr>
+          </a:p>
+          <a:p>
+            <a:r>
+              <a:rPr sz="1150" b="0">
+                <a:solidFill>
+                  <a:srgbClr val="D6DEF6"/>
+                </a:solidFill>
+                <a:latin typeface="微软雅黑"/>
+              </a:rPr>
+              <a:t>backoff:0.01  unit:'c'</a:t>
+            </a:r>
+          </a:p>
+          <a:p>
+            <a:r>
+              <a:rPr sz="1150" b="0">
+                <a:solidFill>
+                  <a:srgbClr val="D6DEF6"/>
+                </a:solidFill>
+                <a:latin typeface="微软雅黑"/>
+              </a:rPr>
+              <a:t>sources:  PLC1:5020 scale=10</a:t>
+            </a:r>
+          </a:p>
+          <a:p>
+            <a:r>
+              <a:rPr sz="1150" b="0">
+                <a:solidFill>
+                  <a:srgbClr val="D6DEF6"/>
+                </a:solidFill>
+                <a:latin typeface="微软雅黑"/>
+              </a:rPr>
+              <a:t>          PLC2:5021 scale=1</a:t>
+            </a:r>
+          </a:p>
+        </p:txBody>
+      </p:sp>
+      <p:sp>
+        <p:nvSpPr>
+          <p:cNvPr id="18" name="Rectangle 17"/>
+          <p:cNvSpPr/>
+          <p:nvPr/>
+        </p:nvSpPr>
+        <p:spPr>
+          <a:xfrm>
+            <a:off x="6300000" y="4300000"/>
+            <a:ext cx="5360000" cy="1500000"/>
+          </a:xfrm>
+          <a:prstGeom prst="rect">
+            <a:avLst/>
+          </a:prstGeom>
+          <a:solidFill>
+            <a:srgbClr val="FFFFFF"/>
+          </a:solidFill>
+          <a:ln>
+            <a:solidFill>
+              <a:srgbClr val="F5670F"/>
+            </a:solidFill>
+          </a:ln>
+          <a:effectLst/>
+        </p:spPr>
+        <p:style>
+          <a:lnRef idx="1">
+            <a:schemeClr val="accent1"/>
+          </a:lnRef>
+          <a:fillRef idx="3">
+            <a:schemeClr val="accent1"/>
+          </a:fillRef>
+          <a:effectRef idx="2">
+            <a:schemeClr val="accent1"/>
+          </a:effectRef>
+          <a:fontRef idx="minor">
+            <a:schemeClr val="lt1"/>
+          </a:fontRef>
+        </p:style>
+        <p:txBody>
+          <a:bodyPr rtlCol="0" anchor="ctr"/>
+          <a:lstStyle/>
+          <a:p>
+            <a:pPr algn="ctr"/>
+          </a:p>
+        </p:txBody>
+      </p:sp>
+      <p:sp>
+        <p:nvSpPr>
+          <p:cNvPr id="19" name="TextBox 18"/>
+          <p:cNvSpPr txBox="1"/>
+          <p:nvPr/>
+        </p:nvSpPr>
+        <p:spPr>
+          <a:xfrm>
+            <a:off x="6600000" y="4400000"/>
+            <a:ext cx="2000000" cy="360000"/>
+          </a:xfrm>
+          <a:prstGeom prst="rect">
+            <a:avLst/>
+          </a:prstGeom>
+          <a:noFill/>
+        </p:spPr>
+        <p:txBody>
+          <a:bodyPr wrap="square" anchor="ctr">
+            <a:spAutoFit/>
+          </a:bodyPr>
+          <a:lstStyle/>
+          <a:p>
+            <a:pPr algn="l">
+              <a:lnSpc>
+                <a:spcPct val="110000"/>
+              </a:lnSpc>
+              <a:spcAft>
+                <a:spcPts val="600"/>
+              </a:spcAft>
+            </a:pPr>
+            <a:r>
+              <a:rPr sz="1400" b="1">
+                <a:solidFill>
+                  <a:srgbClr val="F5670F"/>
+                </a:solidFill>
+                <a:latin typeface="微软雅黑"/>
+              </a:rPr>
+              <a:t>◆ 设计要点</a:t>
+            </a:r>
+            <a:endParaRPr sz="1400" b="1">
+              <a:solidFill>
+                <a:srgbClr val="F5670F"/>
+              </a:solidFill>
+              <a:latin typeface="微软雅黑" panose="020B0502040204020203" charset="-122"/>
+            </a:endParaRPr>
+          </a:p>
+        </p:txBody>
+      </p:sp>
+      <p:sp>
+        <p:nvSpPr>
+          <p:cNvPr id="20" name="TextBox 19"/>
+          <p:cNvSpPr txBox="1"/>
+          <p:nvPr/>
+        </p:nvSpPr>
+        <p:spPr>
+          <a:xfrm>
+            <a:off x="6600000" y="4820000"/>
+            <a:ext cx="4800000" cy="900000"/>
+          </a:xfrm>
+          <a:prstGeom prst="rect">
+            <a:avLst/>
+          </a:prstGeom>
+          <a:noFill/>
+        </p:spPr>
+        <p:txBody>
+          <a:bodyPr wrap="square" anchor="t">
+            <a:spAutoFit/>
+          </a:bodyPr>
+          <a:lstStyle/>
+          <a:p>
+            <a:pPr algn="l">
+              <a:lnSpc>
+                <a:spcPct val="130000"/>
+              </a:lnSpc>
+              <a:spcAft>
+                <a:spcPts val="600"/>
+              </a:spcAft>
+            </a:pPr>
+            <a:r>
+              <a:rPr sz="1300" b="0">
+                <a:solidFill>
+                  <a:srgbClr val="010328"/>
+                </a:solidFill>
+                <a:latin typeface="微软雅黑"/>
+              </a:rPr>
+              <a:t>config.py 用 YAML 加载 + yaml_lite 兜底；非法阈值(顺序颠倒)启动即校验并拒绝</a:t>
+            </a:r>
+            <a:endParaRPr sz="1300" b="0">
+              <a:solidFill>
+                <a:srgbClr val="FF0000"/>
+              </a:solidFill>
+              <a:latin typeface="微软雅黑" panose="020B0502040204020203" charset="-122"/>
+            </a:endParaRPr>
+          </a:p>
+        </p:txBody>
+      </p:sp>
+      <p:sp>
+        <p:nvSpPr>
+          <p:cNvPr id="21" name="Rectangle 20"/>
+          <p:cNvSpPr/>
+          <p:nvPr/>
+        </p:nvSpPr>
+        <p:spPr>
+          <a:xfrm>
+            <a:off x="500000" y="6500000"/>
+            <a:ext cx="11100000" cy="20000"/>
+          </a:xfrm>
+          <a:prstGeom prst="rect">
+            <a:avLst/>
+          </a:prstGeom>
+          <a:solidFill>
+            <a:srgbClr val="C9D4EE"/>
+          </a:solidFill>
+          <a:ln>
+            <a:noFill/>
+          </a:ln>
+          <a:effectLst/>
+        </p:spPr>
+        <p:style>
+          <a:lnRef idx="1">
+            <a:schemeClr val="accent1"/>
+          </a:lnRef>
+          <a:fillRef idx="3">
+            <a:schemeClr val="accent1"/>
+          </a:fillRef>
+          <a:effectRef idx="2">
+            <a:schemeClr val="accent1"/>
+          </a:effectRef>
+          <a:fontRef idx="minor">
+            <a:schemeClr val="lt1"/>
+          </a:fontRef>
+        </p:style>
+        <p:txBody>
+          <a:bodyPr rtlCol="0" anchor="ctr"/>
+          <a:lstStyle/>
+          <a:p>
+            <a:pPr algn="ctr"/>
+          </a:p>
+        </p:txBody>
+      </p:sp>
+      <p:sp>
+        <p:nvSpPr>
+          <p:cNvPr id="22" name="TextBox 21"/>
+          <p:cNvSpPr txBox="1"/>
+          <p:nvPr/>
+        </p:nvSpPr>
+        <p:spPr>
+          <a:xfrm>
+            <a:off x="500000" y="6540000"/>
+            <a:ext cx="7000000" cy="300000"/>
+          </a:xfrm>
+          <a:prstGeom prst="rect">
+            <a:avLst/>
+          </a:prstGeom>
+          <a:noFill/>
+        </p:spPr>
+        <p:txBody>
+          <a:bodyPr wrap="square" anchor="t">
+            <a:spAutoFit/>
+          </a:bodyPr>
+          <a:lstStyle/>
+          <a:p>
+            <a:pPr algn="l">
+              <a:lnSpc>
+                <a:spcPct val="110000"/>
+              </a:lnSpc>
+              <a:spcAft>
+                <a:spcPts val="600"/>
+              </a:spcAft>
+            </a:pPr>
+            <a:r>
+              <a:rPr sz="1000" b="0">
+                <a:solidFill>
+                  <a:srgbClr val="8A97B5"/>
+                </a:solidFill>
+                <a:latin typeface="微软雅黑" panose="020B0502040204020203" charset="-122"/>
+              </a:rPr>
+              <a:t>两江智造集团 · Python程序设计（项目实战）</a:t>
+            </a:r>
+            <a:endParaRPr sz="1000" b="0">
+              <a:solidFill>
+                <a:srgbClr val="8A97B5"/>
+              </a:solidFill>
+              <a:latin typeface="微软雅黑" panose="020B0502040204020203" charset="-122"/>
+            </a:endParaRPr>
+          </a:p>
+        </p:txBody>
+      </p:sp>
+      <p:sp>
+        <p:nvSpPr>
+          <p:cNvPr id="23" name="TextBox 22"/>
+          <p:cNvSpPr txBox="1"/>
+          <p:nvPr/>
+        </p:nvSpPr>
+        <p:spPr>
+          <a:xfrm>
+            <a:off x="10600000" y="6540000"/>
+            <a:ext cx="1000000" cy="300000"/>
+          </a:xfrm>
+          <a:prstGeom prst="rect">
+            <a:avLst/>
+          </a:prstGeom>
+          <a:noFill/>
+        </p:spPr>
+        <p:txBody>
+          <a:bodyPr wrap="square" anchor="t">
+            <a:spAutoFit/>
+          </a:bodyPr>
+          <a:lstStyle/>
+          <a:p>
+            <a:pPr algn="r">
+              <a:lnSpc>
+                <a:spcPct val="110000"/>
+              </a:lnSpc>
+              <a:spcAft>
+                <a:spcPts val="600"/>
+              </a:spcAft>
+            </a:pPr>
+            <a:r>
+              <a:rPr sz="1000" b="0">
+                <a:solidFill>
+                  <a:srgbClr val="8A97B5"/>
+                </a:solidFill>
+                <a:latin typeface="微软雅黑"/>
+              </a:rPr>
+              <a:t>6 / 11</a:t>
+            </a:r>
+            <a:endParaRPr sz="1000" b="0">
+              <a:solidFill>
+                <a:srgbClr val="8A97B5"/>
+              </a:solidFill>
+              <a:latin typeface="微软雅黑" panose="020B0502040204020203" charset="-122"/>
+            </a:endParaRPr>
+          </a:p>
+        </p:txBody>
+      </p:sp>
+    </p:spTree>
+  </p:cSld>
+  <p:clrMapOvr>
+    <a:masterClrMapping/>
+  </p:clrMapOvr>
+</p:sld>
+</file>
+
+<file path=ppt/slides/slide11.xml><?xml version="1.0" encoding="utf-8"?>
+<p:sld xmlns:a="http://schemas.openxmlformats.org/drawingml/2006/main" xmlns:p="http://schemas.openxmlformats.org/presentationml/2006/main" xmlns:r="http://schemas.openxmlformats.org/officeDocument/2006/relationships">
+  <p:cSld>
+    <p:spTree>
+      <p:nvGrpSpPr>
+        <p:cNvPr id="1" name=""/>
+        <p:cNvGrpSpPr/>
+        <p:nvPr/>
+      </p:nvGrpSpPr>
+      <p:grpSpPr/>
+      <p:sp>
+        <p:nvSpPr>
+          <p:cNvPr id="2" name="Rectangle 1"/>
+          <p:cNvSpPr/>
+          <p:nvPr/>
+        </p:nvSpPr>
+        <p:spPr>
+          <a:xfrm>
+            <a:off x="0" y="0"/>
+            <a:ext cx="12192000" cy="1150000"/>
+          </a:xfrm>
+          <a:prstGeom prst="rect">
+            <a:avLst/>
+          </a:prstGeom>
+          <a:solidFill>
+            <a:srgbClr val="010328"/>
+          </a:solidFill>
+          <a:ln>
+            <a:noFill/>
+          </a:ln>
+          <a:effectLst/>
+        </p:spPr>
+        <p:style>
+          <a:lnRef idx="1">
+            <a:schemeClr val="accent1"/>
+          </a:lnRef>
+          <a:fillRef idx="3">
+            <a:schemeClr val="accent1"/>
+          </a:fillRef>
+          <a:effectRef idx="2">
+            <a:schemeClr val="accent1"/>
+          </a:effectRef>
+          <a:fontRef idx="minor">
+            <a:schemeClr val="lt1"/>
+          </a:fontRef>
+        </p:style>
+        <p:txBody>
+          <a:bodyPr rtlCol="0" anchor="ctr"/>
+          <a:lstStyle/>
+          <a:p>
+            <a:pPr algn="ctr"/>
+          </a:p>
+        </p:txBody>
+      </p:sp>
+      <p:sp>
+        <p:nvSpPr>
+          <p:cNvPr id="3" name="Rectangle 2"/>
+          <p:cNvSpPr/>
+          <p:nvPr/>
+        </p:nvSpPr>
+        <p:spPr>
+          <a:xfrm>
+            <a:off x="0" y="1150000"/>
+            <a:ext cx="2600000" cy="70000"/>
+          </a:xfrm>
+          <a:prstGeom prst="rect">
+            <a:avLst/>
+          </a:prstGeom>
+          <a:solidFill>
+            <a:srgbClr val="F5670F"/>
+          </a:solidFill>
+          <a:ln>
+            <a:noFill/>
+          </a:ln>
+          <a:effectLst/>
+        </p:spPr>
+        <p:style>
+          <a:lnRef idx="1">
+            <a:schemeClr val="accent1"/>
+          </a:lnRef>
+          <a:fillRef idx="3">
+            <a:schemeClr val="accent1"/>
+          </a:fillRef>
+          <a:effectRef idx="2">
+            <a:schemeClr val="accent1"/>
+          </a:effectRef>
+          <a:fontRef idx="minor">
+            <a:schemeClr val="lt1"/>
+          </a:fontRef>
+        </p:style>
+        <p:txBody>
+          <a:bodyPr rtlCol="0" anchor="ctr"/>
+          <a:lstStyle/>
+          <a:p>
+            <a:pPr algn="ctr"/>
+          </a:p>
+        </p:txBody>
+      </p:sp>
+      <p:sp>
+        <p:nvSpPr>
+          <p:cNvPr id="4" name="TextBox 3"/>
+          <p:cNvSpPr txBox="1"/>
+          <p:nvPr/>
+        </p:nvSpPr>
+        <p:spPr>
+          <a:xfrm>
+            <a:off x="700000" y="300000"/>
+            <a:ext cx="10792000" cy="700000"/>
+          </a:xfrm>
+          <a:prstGeom prst="rect">
+            <a:avLst/>
+          </a:prstGeom>
+          <a:noFill/>
+        </p:spPr>
+        <p:txBody>
+          <a:bodyPr wrap="square" anchor="t">
+            <a:spAutoFit/>
+          </a:bodyPr>
+          <a:lstStyle/>
+          <a:p>
+            <a:pPr algn="l">
+              <a:lnSpc>
+                <a:spcPct val="110000"/>
+              </a:lnSpc>
+              <a:spcAft>
+                <a:spcPts val="600"/>
+              </a:spcAft>
+            </a:pPr>
+            <a:r>
+              <a:rPr sz="2400" b="1">
+                <a:solidFill>
+                  <a:srgbClr val="FFFFFF"/>
+                </a:solidFill>
+                <a:latin typeface="微软雅黑"/>
+              </a:rPr>
+              <a:t>工程化测试：单测怎么证可靠（GB/T 15532）</a:t>
+            </a:r>
+            <a:endParaRPr sz="2400" b="1">
+              <a:solidFill>
+                <a:srgbClr val="FFFFFF"/>
+              </a:solidFill>
+              <a:latin typeface="微软雅黑" panose="020B0502040204020203" charset="-122"/>
+            </a:endParaRPr>
+          </a:p>
+        </p:txBody>
+      </p:sp>
+      <p:sp>
+        <p:nvSpPr>
+          <p:cNvPr id="5" name="Rectangle 4"/>
+          <p:cNvSpPr/>
+          <p:nvPr/>
+        </p:nvSpPr>
+        <p:spPr>
+          <a:xfrm>
+            <a:off x="760000" y="1750000"/>
+            <a:ext cx="10900000" cy="700000"/>
+          </a:xfrm>
+          <a:prstGeom prst="rect">
+            <a:avLst/>
+          </a:prstGeom>
+          <a:solidFill>
+            <a:srgbClr val="010328"/>
+          </a:solidFill>
+          <a:ln>
+            <a:noFill/>
+          </a:ln>
+          <a:effectLst/>
+        </p:spPr>
+        <p:style>
+          <a:lnRef idx="1">
+            <a:schemeClr val="accent1"/>
+          </a:lnRef>
+          <a:fillRef idx="3">
+            <a:schemeClr val="accent1"/>
+          </a:fillRef>
+          <a:effectRef idx="2">
+            <a:schemeClr val="accent1"/>
+          </a:effectRef>
+          <a:fontRef idx="minor">
+            <a:schemeClr val="lt1"/>
+          </a:fontRef>
+        </p:style>
+        <p:txBody>
+          <a:bodyPr rtlCol="0" anchor="ctr"/>
+          <a:lstStyle/>
+          <a:p>
+            <a:pPr algn="ctr"/>
+          </a:p>
+        </p:txBody>
+      </p:sp>
+      <p:sp>
+        <p:nvSpPr>
+          <p:cNvPr id="6" name="TextBox 5"/>
+          <p:cNvSpPr txBox="1"/>
+          <p:nvPr/>
+        </p:nvSpPr>
+        <p:spPr>
+          <a:xfrm>
+            <a:off x="1000000" y="1830000"/>
+            <a:ext cx="10300000" cy="540000"/>
+          </a:xfrm>
+          <a:prstGeom prst="rect">
+            <a:avLst/>
+          </a:prstGeom>
+          <a:noFill/>
+        </p:spPr>
+        <p:txBody>
+          <a:bodyPr wrap="square" anchor="t">
+            <a:spAutoFit/>
+          </a:bodyPr>
+          <a:lstStyle/>
+          <a:p>
+            <a:pPr algn="l">
+              <a:lnSpc>
+                <a:spcPct val="110000"/>
+              </a:lnSpc>
+              <a:spcAft>
+                <a:spcPts val="600"/>
+              </a:spcAft>
+            </a:pPr>
+            <a:r>
+              <a:rPr sz="2000" b="1">
+                <a:solidFill>
+                  <a:srgbClr val="FFFFFF"/>
+                </a:solidFill>
+                <a:latin typeface="微软雅黑"/>
+              </a:rPr>
+              <a:t>测试计划与报告 · pytest 三层策略</a:t>
+            </a:r>
+            <a:endParaRPr sz="2000" b="1">
+              <a:solidFill>
+                <a:srgbClr val="FFFFFF"/>
+              </a:solidFill>
+              <a:latin typeface="微软雅黑" panose="020B0502040204020203" charset="-122"/>
+            </a:endParaRPr>
+          </a:p>
+        </p:txBody>
+      </p:sp>
+      <p:sp>
+        <p:nvSpPr>
+          <p:cNvPr id="7" name="Rectangle 6"/>
+          <p:cNvSpPr/>
+          <p:nvPr/>
+        </p:nvSpPr>
+        <p:spPr>
+          <a:xfrm>
+            <a:off x="760000" y="2650000"/>
+            <a:ext cx="5300000" cy="1500000"/>
+          </a:xfrm>
+          <a:prstGeom prst="rect">
+            <a:avLst/>
+          </a:prstGeom>
+          <a:solidFill>
+            <a:srgbClr val="F3F6FD"/>
+          </a:solidFill>
+          <a:ln>
+            <a:solidFill>
+              <a:srgbClr val="0545E8"/>
+            </a:solidFill>
+          </a:ln>
+          <a:effectLst/>
+        </p:spPr>
+        <p:style>
+          <a:lnRef idx="1">
+            <a:schemeClr val="accent1"/>
+          </a:lnRef>
+          <a:fillRef idx="3">
+            <a:schemeClr val="accent1"/>
+          </a:fillRef>
+          <a:effectRef idx="2">
+            <a:schemeClr val="accent1"/>
+          </a:effectRef>
+          <a:fontRef idx="minor">
+            <a:schemeClr val="lt1"/>
+          </a:fontRef>
+        </p:style>
+        <p:txBody>
+          <a:bodyPr rtlCol="0" anchor="ctr"/>
+          <a:lstStyle/>
+          <a:p>
+            <a:pPr algn="ctr"/>
+          </a:p>
+        </p:txBody>
+      </p:sp>
+      <p:sp>
+        <p:nvSpPr>
+          <p:cNvPr id="8" name="Rectangle 7"/>
+          <p:cNvSpPr/>
+          <p:nvPr/>
+        </p:nvSpPr>
+        <p:spPr>
+          <a:xfrm>
+            <a:off x="760000" y="2650000"/>
+            <a:ext cx="120000" cy="1500000"/>
+          </a:xfrm>
+          <a:prstGeom prst="rect">
+            <a:avLst/>
+          </a:prstGeom>
+          <a:solidFill>
+            <a:srgbClr val="0545E8"/>
+          </a:solidFill>
+          <a:ln>
+            <a:noFill/>
+          </a:ln>
+          <a:effectLst/>
+        </p:spPr>
+        <p:style>
+          <a:lnRef idx="1">
+            <a:schemeClr val="accent1"/>
+          </a:lnRef>
+          <a:fillRef idx="3">
+            <a:schemeClr val="accent1"/>
+          </a:fillRef>
+          <a:effectRef idx="2">
+            <a:schemeClr val="accent1"/>
+          </a:effectRef>
+          <a:fontRef idx="minor">
+            <a:schemeClr val="lt1"/>
+          </a:fontRef>
+        </p:style>
+        <p:txBody>
+          <a:bodyPr rtlCol="0" anchor="ctr"/>
+          <a:lstStyle/>
+          <a:p>
+            <a:pPr algn="ctr"/>
+          </a:p>
+        </p:txBody>
+      </p:sp>
+      <p:sp>
+        <p:nvSpPr>
+          <p:cNvPr id="9" name="TextBox 8"/>
+          <p:cNvSpPr txBox="1"/>
+          <p:nvPr/>
+        </p:nvSpPr>
+        <p:spPr>
+          <a:xfrm>
+            <a:off x="1000000" y="2750000"/>
+            <a:ext cx="1600000" cy="360000"/>
+          </a:xfrm>
+          <a:prstGeom prst="rect">
+            <a:avLst/>
+          </a:prstGeom>
+          <a:noFill/>
+        </p:spPr>
+        <p:txBody>
+          <a:bodyPr wrap="square" anchor="ctr">
+            <a:spAutoFit/>
+          </a:bodyPr>
+          <a:lstStyle/>
+          <a:p>
+            <a:pPr algn="l">
+              <a:lnSpc>
+                <a:spcPct val="110000"/>
+              </a:lnSpc>
+              <a:spcAft>
+                <a:spcPts val="600"/>
+              </a:spcAft>
+            </a:pPr>
+            <a:r>
+              <a:rPr sz="1400" b="1">
+                <a:solidFill>
+                  <a:srgbClr val="0545E8"/>
+                </a:solidFill>
+                <a:latin typeface="微软雅黑"/>
+              </a:rPr>
+              <a:t>◆ 纯函数单测</a:t>
+            </a:r>
+            <a:endParaRPr sz="1400" b="1">
+              <a:solidFill>
+                <a:srgbClr val="0545E8"/>
+              </a:solidFill>
+              <a:latin typeface="微软雅黑" panose="020B0502040204020203" charset="-122"/>
+            </a:endParaRPr>
+          </a:p>
+        </p:txBody>
+      </p:sp>
+      <p:sp>
+        <p:nvSpPr>
+          <p:cNvPr id="10" name="TextBox 9"/>
+          <p:cNvSpPr txBox="1"/>
+          <p:nvPr/>
+        </p:nvSpPr>
+        <p:spPr>
+          <a:xfrm>
+            <a:off x="1000000" y="3170000"/>
+            <a:ext cx="4800000" cy="900000"/>
+          </a:xfrm>
+          <a:prstGeom prst="rect">
+            <a:avLst/>
+          </a:prstGeom>
+          <a:noFill/>
+        </p:spPr>
+        <p:txBody>
+          <a:bodyPr wrap="square" anchor="t">
+            <a:spAutoFit/>
+          </a:bodyPr>
+          <a:lstStyle/>
+          <a:p>
+            <a:pPr algn="l">
+              <a:lnSpc>
+                <a:spcPct val="130000"/>
+              </a:lnSpc>
+              <a:spcAft>
+                <a:spcPts val="600"/>
+              </a:spcAft>
+            </a:pPr>
+            <a:r>
+              <a:rPr sz="1300" b="0">
+                <a:solidFill>
+                  <a:srgbClr val="010328"/>
+                </a:solidFill>
+                <a:latin typeface="微软雅黑"/>
+              </a:rPr>
+              <a:t>复现: python -m pytest -q ｜ 用例≥6 全绿</a:t>
+            </a:r>
+            <a:endParaRPr sz="1300" b="0">
+              <a:solidFill>
+                <a:srgbClr val="010328"/>
+              </a:solidFill>
+              <a:latin typeface="微软雅黑" panose="020B0502040204020203" charset="-122"/>
+            </a:endParaRPr>
+          </a:p>
+          <a:p>
+            <a:r>
+              <a:rPr sz="1300" b="0">
+                <a:solidFill>
+                  <a:srgbClr val="010328"/>
+                </a:solidFill>
+                <a:latin typeface="微软雅黑"/>
+              </a:rPr>
+              <a:t>按 正常/边界/异常 三档覆盖——可靠性是被测出来的，不是写在注释里</a:t>
+            </a:r>
+          </a:p>
+        </p:txBody>
+      </p:sp>
+      <p:sp>
+        <p:nvSpPr>
+          <p:cNvPr id="11" name="Rectangle 10"/>
+          <p:cNvSpPr/>
+          <p:nvPr/>
+        </p:nvSpPr>
+        <p:spPr>
+          <a:xfrm>
+            <a:off x="760000" y="4300000"/>
+            <a:ext cx="5300000" cy="1500000"/>
+          </a:xfrm>
+          <a:prstGeom prst="rect">
+            <a:avLst/>
+          </a:prstGeom>
+          <a:solidFill>
+            <a:srgbClr val="F3F6FD"/>
+          </a:solidFill>
+          <a:ln>
+            <a:solidFill>
+              <a:srgbClr val="0475B6"/>
+            </a:solidFill>
+          </a:ln>
+          <a:effectLst/>
+        </p:spPr>
+        <p:style>
+          <a:lnRef idx="1">
+            <a:schemeClr val="accent1"/>
+          </a:lnRef>
+          <a:fillRef idx="3">
+            <a:schemeClr val="accent1"/>
+          </a:fillRef>
+          <a:effectRef idx="2">
+            <a:schemeClr val="accent1"/>
+          </a:effectRef>
+          <a:fontRef idx="minor">
+            <a:schemeClr val="lt1"/>
+          </a:fontRef>
+        </p:style>
+        <p:txBody>
+          <a:bodyPr rtlCol="0" anchor="ctr"/>
+          <a:lstStyle/>
+          <a:p>
+            <a:pPr algn="ctr"/>
+          </a:p>
+        </p:txBody>
+      </p:sp>
+      <p:sp>
+        <p:nvSpPr>
+          <p:cNvPr id="12" name="Rectangle 11"/>
+          <p:cNvSpPr/>
+          <p:nvPr/>
+        </p:nvSpPr>
+        <p:spPr>
+          <a:xfrm>
+            <a:off x="760000" y="4300000"/>
+            <a:ext cx="120000" cy="1500000"/>
+          </a:xfrm>
+          <a:prstGeom prst="rect">
+            <a:avLst/>
+          </a:prstGeom>
+          <a:solidFill>
+            <a:srgbClr val="0475B6"/>
+          </a:solidFill>
+          <a:ln>
+            <a:noFill/>
+          </a:ln>
+          <a:effectLst/>
+        </p:spPr>
+        <p:style>
+          <a:lnRef idx="1">
+            <a:schemeClr val="accent1"/>
+          </a:lnRef>
+          <a:fillRef idx="3">
+            <a:schemeClr val="accent1"/>
+          </a:fillRef>
+          <a:effectRef idx="2">
+            <a:schemeClr val="accent1"/>
+          </a:effectRef>
+          <a:fontRef idx="minor">
+            <a:schemeClr val="lt1"/>
+          </a:fontRef>
+        </p:style>
+        <p:txBody>
+          <a:bodyPr rtlCol="0" anchor="ctr"/>
+          <a:lstStyle/>
+          <a:p>
+            <a:pPr algn="ctr"/>
+          </a:p>
+        </p:txBody>
+      </p:sp>
+      <p:sp>
+        <p:nvSpPr>
+          <p:cNvPr id="13" name="TextBox 12"/>
+          <p:cNvSpPr txBox="1"/>
+          <p:nvPr/>
+        </p:nvSpPr>
+        <p:spPr>
+          <a:xfrm>
+            <a:off x="1000000" y="4400000"/>
+            <a:ext cx="1600000" cy="360000"/>
+          </a:xfrm>
+          <a:prstGeom prst="rect">
+            <a:avLst/>
+          </a:prstGeom>
+          <a:noFill/>
+        </p:spPr>
+        <p:txBody>
+          <a:bodyPr wrap="square" anchor="ctr">
+            <a:spAutoFit/>
+          </a:bodyPr>
+          <a:lstStyle/>
+          <a:p>
+            <a:pPr algn="l">
+              <a:lnSpc>
+                <a:spcPct val="110000"/>
+              </a:lnSpc>
+              <a:spcAft>
+                <a:spcPts val="600"/>
+              </a:spcAft>
+            </a:pPr>
+            <a:r>
+              <a:rPr sz="1400" b="1">
+                <a:solidFill>
+                  <a:srgbClr val="0475B6"/>
+                </a:solidFill>
+                <a:latin typeface="微软雅黑"/>
+              </a:rPr>
+              <a:t>◆ 用例清单</a:t>
+            </a:r>
+            <a:endParaRPr sz="1400" b="1">
+              <a:solidFill>
+                <a:srgbClr val="0475B6"/>
+              </a:solidFill>
+              <a:latin typeface="微软雅黑" panose="020B0502040204020203" charset="-122"/>
+            </a:endParaRPr>
+          </a:p>
+        </p:txBody>
+      </p:sp>
+      <p:sp>
+        <p:nvSpPr>
+          <p:cNvPr id="14" name="TextBox 13"/>
+          <p:cNvSpPr txBox="1"/>
+          <p:nvPr/>
+        </p:nvSpPr>
+        <p:spPr>
+          <a:xfrm>
+            <a:off x="1000000" y="4820000"/>
+            <a:ext cx="4800000" cy="900000"/>
+          </a:xfrm>
+          <a:prstGeom prst="rect">
+            <a:avLst/>
+          </a:prstGeom>
+          <a:noFill/>
+        </p:spPr>
+        <p:txBody>
+          <a:bodyPr wrap="square" anchor="t">
+            <a:spAutoFit/>
+          </a:bodyPr>
+          <a:lstStyle/>
+          <a:p>
+            <a:pPr algn="l">
+              <a:lnSpc>
+                <a:spcPct val="130000"/>
+              </a:lnSpc>
+              <a:spcAft>
+                <a:spcPts val="600"/>
+              </a:spcAft>
+            </a:pPr>
+            <a:r>
+              <a:rPr sz="1300" b="0">
+                <a:solidFill>
+                  <a:srgbClr val="010328"/>
+                </a:solidFill>
+                <a:latin typeface="微软雅黑"/>
+              </a:rPr>
+              <a:t>TC-01 还原: 250/scale=10 → 25.0</a:t>
+            </a:r>
+            <a:endParaRPr sz="1300" b="0">
+              <a:solidFill>
+                <a:srgbClr val="010328"/>
+              </a:solidFill>
+              <a:latin typeface="微软雅黑" panose="020B0502040204020203" charset="-122"/>
+            </a:endParaRPr>
+          </a:p>
+          <a:p>
+            <a:r>
+              <a:rPr sz="1300" b="0">
+                <a:solidFill>
+                  <a:srgbClr val="010328"/>
+                </a:solidFill>
+                <a:latin typeface="微软雅黑"/>
+              </a:rPr>
+              <a:t>TC-02/03 对账: 一致→True / 不一致→False</a:t>
+            </a:r>
+          </a:p>
+          <a:p>
+            <a:r>
+              <a:rPr sz="1300" b="0">
+                <a:solidFill>
+                  <a:srgbClr val="010328"/>
+                </a:solidFill>
+                <a:latin typeface="微软雅黑"/>
+              </a:rPr>
+              <a:t>TC-04 异常: scale&lt;=0 → ValueError</a:t>
+            </a:r>
+          </a:p>
+        </p:txBody>
+      </p:sp>
+      <p:sp>
+        <p:nvSpPr>
+          <p:cNvPr id="15" name="Rectangle 14"/>
+          <p:cNvSpPr/>
+          <p:nvPr/>
+        </p:nvSpPr>
+        <p:spPr>
+          <a:xfrm>
+            <a:off x="6300000" y="2650000"/>
+            <a:ext cx="5360000" cy="1500000"/>
+          </a:xfrm>
+          <a:prstGeom prst="rect">
+            <a:avLst/>
+          </a:prstGeom>
+          <a:solidFill>
+            <a:srgbClr val="0D112A"/>
+          </a:solidFill>
+          <a:ln>
+            <a:noFill/>
+          </a:ln>
+          <a:effectLst/>
+        </p:spPr>
+        <p:style>
+          <a:lnRef idx="1">
+            <a:schemeClr val="accent1"/>
+          </a:lnRef>
+          <a:fillRef idx="3">
+            <a:schemeClr val="accent1"/>
+          </a:fillRef>
+          <a:effectRef idx="2">
+            <a:schemeClr val="accent1"/>
+          </a:effectRef>
+          <a:fontRef idx="minor">
+            <a:schemeClr val="lt1"/>
+          </a:fontRef>
+        </p:style>
+        <p:txBody>
+          <a:bodyPr rtlCol="0" anchor="ctr"/>
+          <a:lstStyle/>
+          <a:p>
+            <a:pPr algn="ctr"/>
+          </a:p>
+        </p:txBody>
+      </p:sp>
+      <p:sp>
+        <p:nvSpPr>
+          <p:cNvPr id="16" name="Rectangle 15"/>
+          <p:cNvSpPr/>
+          <p:nvPr/>
+        </p:nvSpPr>
+        <p:spPr>
+          <a:xfrm>
+            <a:off x="6300000" y="2650000"/>
+            <a:ext cx="5360000" cy="120000"/>
+          </a:xfrm>
+          <a:prstGeom prst="rect">
+            <a:avLst/>
+          </a:prstGeom>
+          <a:solidFill>
+            <a:srgbClr val="F5670F"/>
+          </a:solidFill>
+          <a:ln>
+            <a:noFill/>
+          </a:ln>
+          <a:effectLst/>
+        </p:spPr>
+        <p:style>
+          <a:lnRef idx="1">
+            <a:schemeClr val="accent1"/>
+          </a:lnRef>
+          <a:fillRef idx="3">
+            <a:schemeClr val="accent1"/>
+          </a:fillRef>
+          <a:effectRef idx="2">
+            <a:schemeClr val="accent1"/>
+          </a:effectRef>
+          <a:fontRef idx="minor">
+            <a:schemeClr val="lt1"/>
+          </a:fontRef>
+        </p:style>
+        <p:txBody>
+          <a:bodyPr rtlCol="0" anchor="ctr"/>
+          <a:lstStyle/>
+          <a:p>
+            <a:pPr algn="ctr"/>
+          </a:p>
+        </p:txBody>
+      </p:sp>
+      <p:sp>
+        <p:nvSpPr>
+          <p:cNvPr id="17" name="TextBox 16"/>
+          <p:cNvSpPr txBox="1"/>
+          <p:nvPr/>
+        </p:nvSpPr>
+        <p:spPr>
+          <a:xfrm>
+            <a:off x="6600000" y="2930000"/>
+            <a:ext cx="4800000" cy="1100000"/>
+          </a:xfrm>
+          <a:prstGeom prst="rect">
+            <a:avLst/>
+          </a:prstGeom>
+          <a:noFill/>
+        </p:spPr>
+        <p:txBody>
+          <a:bodyPr wrap="square" anchor="t">
+            <a:spAutoFit/>
+          </a:bodyPr>
+          <a:lstStyle/>
+          <a:p>
+            <a:pPr algn="l">
+              <a:lnSpc>
+                <a:spcPct val="125000"/>
+              </a:lnSpc>
+              <a:spcAft>
+                <a:spcPts val="600"/>
+              </a:spcAft>
+            </a:pPr>
+            <a:r>
+              <a:rPr sz="1150" b="0">
+                <a:solidFill>
+                  <a:srgbClr val="D6DEF6"/>
+                </a:solidFill>
+                <a:latin typeface="微软雅黑"/>
+              </a:rPr>
+              <a:t># core 零 IO 纯函数，transport 可注入</a:t>
+            </a:r>
+            <a:endParaRPr sz="1150" b="0">
+              <a:solidFill>
+                <a:srgbClr val="D6DEF6"/>
+              </a:solidFill>
+              <a:latin typeface="微软雅黑" panose="020B0502040204020203" charset="-122"/>
+            </a:endParaRPr>
+          </a:p>
+          <a:p>
+            <a:r>
+              <a:rPr sz="1150" b="0">
+                <a:solidFill>
+                  <a:srgbClr val="D6DEF6"/>
+                </a:solidFill>
+                <a:latin typeface="微软雅黑"/>
+              </a:rPr>
+              <a:t>#   → 单测不用连真PLC，确定性可复现</a:t>
+            </a:r>
+          </a:p>
+          <a:p>
+            <a:r>
+              <a:rPr sz="1150" b="0">
+                <a:solidFill>
+                  <a:srgbClr val="D6DEF6"/>
+                </a:solidFill>
+                <a:latin typeface="微软雅黑"/>
+              </a:rPr>
+              <a:t># test_core.py / test_config.py</a:t>
+            </a:r>
+          </a:p>
+          <a:p>
+            <a:r>
+              <a:rPr sz="1150" b="0">
+                <a:solidFill>
+                  <a:srgbClr val="D6DEF6"/>
+                </a:solidFill>
+                <a:latin typeface="微软雅黑"/>
+              </a:rPr>
+              <a:t>#   正常 / 边界 / 异常 三档</a:t>
+            </a:r>
+          </a:p>
+        </p:txBody>
+      </p:sp>
+      <p:sp>
+        <p:nvSpPr>
+          <p:cNvPr id="18" name="Rectangle 17"/>
+          <p:cNvSpPr/>
+          <p:nvPr/>
+        </p:nvSpPr>
+        <p:spPr>
+          <a:xfrm>
+            <a:off x="6300000" y="4300000"/>
+            <a:ext cx="5360000" cy="1500000"/>
+          </a:xfrm>
+          <a:prstGeom prst="rect">
+            <a:avLst/>
+          </a:prstGeom>
+          <a:solidFill>
+            <a:srgbClr val="FFFFFF"/>
+          </a:solidFill>
+          <a:ln>
+            <a:solidFill>
+              <a:srgbClr val="F5670F"/>
+            </a:solidFill>
+          </a:ln>
+          <a:effectLst/>
+        </p:spPr>
+        <p:style>
+          <a:lnRef idx="1">
+            <a:schemeClr val="accent1"/>
+          </a:lnRef>
+          <a:fillRef idx="3">
+            <a:schemeClr val="accent1"/>
+          </a:fillRef>
+          <a:effectRef idx="2">
+            <a:schemeClr val="accent1"/>
+          </a:effectRef>
+          <a:fontRef idx="minor">
+            <a:schemeClr val="lt1"/>
+          </a:fontRef>
+        </p:style>
+        <p:txBody>
+          <a:bodyPr rtlCol="0" anchor="ctr"/>
+          <a:lstStyle/>
+          <a:p>
+            <a:pPr algn="ctr"/>
+          </a:p>
+        </p:txBody>
+      </p:sp>
+      <p:sp>
+        <p:nvSpPr>
+          <p:cNvPr id="19" name="TextBox 18"/>
+          <p:cNvSpPr txBox="1"/>
+          <p:nvPr/>
+        </p:nvSpPr>
+        <p:spPr>
+          <a:xfrm>
+            <a:off x="6600000" y="4400000"/>
+            <a:ext cx="2000000" cy="360000"/>
+          </a:xfrm>
+          <a:prstGeom prst="rect">
+            <a:avLst/>
+          </a:prstGeom>
+          <a:noFill/>
+        </p:spPr>
+        <p:txBody>
+          <a:bodyPr wrap="square" anchor="ctr">
+            <a:spAutoFit/>
+          </a:bodyPr>
+          <a:lstStyle/>
+          <a:p>
+            <a:pPr algn="l">
+              <a:lnSpc>
+                <a:spcPct val="110000"/>
+              </a:lnSpc>
+              <a:spcAft>
+                <a:spcPts val="600"/>
+              </a:spcAft>
+            </a:pPr>
+            <a:r>
+              <a:rPr sz="1400" b="1">
+                <a:solidFill>
+                  <a:srgbClr val="F5670F"/>
+                </a:solidFill>
+                <a:latin typeface="微软雅黑"/>
+              </a:rPr>
+              <a:t>◆ GB/T 15532 三层</a:t>
+            </a:r>
+            <a:endParaRPr sz="1400" b="1">
+              <a:solidFill>
+                <a:srgbClr val="F5670F"/>
+              </a:solidFill>
+              <a:latin typeface="微软雅黑" panose="020B0502040204020203" charset="-122"/>
+            </a:endParaRPr>
+          </a:p>
+        </p:txBody>
+      </p:sp>
+      <p:sp>
+        <p:nvSpPr>
+          <p:cNvPr id="20" name="TextBox 19"/>
+          <p:cNvSpPr txBox="1"/>
+          <p:nvPr/>
+        </p:nvSpPr>
+        <p:spPr>
+          <a:xfrm>
+            <a:off x="6600000" y="4820000"/>
+            <a:ext cx="4800000" cy="900000"/>
+          </a:xfrm>
+          <a:prstGeom prst="rect">
+            <a:avLst/>
+          </a:prstGeom>
+          <a:noFill/>
+        </p:spPr>
+        <p:txBody>
+          <a:bodyPr wrap="square" anchor="t">
+            <a:spAutoFit/>
+          </a:bodyPr>
+          <a:lstStyle/>
+          <a:p>
+            <a:pPr algn="l">
+              <a:lnSpc>
+                <a:spcPct val="130000"/>
+              </a:lnSpc>
+              <a:spcAft>
+                <a:spcPts val="600"/>
+              </a:spcAft>
+            </a:pPr>
+            <a:r>
+              <a:rPr sz="1300" b="0">
+                <a:solidFill>
+                  <a:srgbClr val="010328"/>
+                </a:solidFill>
+                <a:latin typeface="微软雅黑"/>
+              </a:rPr>
+              <a:t>单元(纯函数) / 集成(pipeline端到端) / 回归(pytest -q 全量)</a:t>
+            </a:r>
+            <a:endParaRPr sz="1300" b="0">
+              <a:solidFill>
+                <a:srgbClr val="FF0000"/>
+              </a:solidFill>
+              <a:latin typeface="微软雅黑" panose="020B0502040204020203" charset="-122"/>
+            </a:endParaRPr>
+          </a:p>
+          <a:p>
+            <a:r>
+              <a:rPr sz="1300" b="0">
+                <a:solidFill>
+                  <a:srgbClr val="010328"/>
+                </a:solidFill>
+                <a:latin typeface="微软雅黑"/>
+              </a:rPr>
+              <a:t>缺陷记录: 本轮无遗留；退出码 0</a:t>
+            </a:r>
+          </a:p>
+        </p:txBody>
+      </p:sp>
+      <p:sp>
+        <p:nvSpPr>
+          <p:cNvPr id="21" name="Rectangle 20"/>
+          <p:cNvSpPr/>
+          <p:nvPr/>
+        </p:nvSpPr>
+        <p:spPr>
+          <a:xfrm>
+            <a:off x="500000" y="6500000"/>
+            <a:ext cx="11100000" cy="20000"/>
+          </a:xfrm>
+          <a:prstGeom prst="rect">
+            <a:avLst/>
+          </a:prstGeom>
+          <a:solidFill>
+            <a:srgbClr val="C9D4EE"/>
+          </a:solidFill>
+          <a:ln>
+            <a:noFill/>
+          </a:ln>
+          <a:effectLst/>
+        </p:spPr>
+        <p:style>
+          <a:lnRef idx="1">
+            <a:schemeClr val="accent1"/>
+          </a:lnRef>
+          <a:fillRef idx="3">
+            <a:schemeClr val="accent1"/>
+          </a:fillRef>
+          <a:effectRef idx="2">
+            <a:schemeClr val="accent1"/>
+          </a:effectRef>
+          <a:fontRef idx="minor">
+            <a:schemeClr val="lt1"/>
+          </a:fontRef>
+        </p:style>
+        <p:txBody>
+          <a:bodyPr rtlCol="0" anchor="ctr"/>
+          <a:lstStyle/>
+          <a:p>
+            <a:pPr algn="ctr"/>
+          </a:p>
+        </p:txBody>
+      </p:sp>
+      <p:sp>
+        <p:nvSpPr>
+          <p:cNvPr id="22" name="TextBox 21"/>
+          <p:cNvSpPr txBox="1"/>
+          <p:nvPr/>
+        </p:nvSpPr>
+        <p:spPr>
+          <a:xfrm>
+            <a:off x="500000" y="6540000"/>
+            <a:ext cx="7000000" cy="300000"/>
+          </a:xfrm>
+          <a:prstGeom prst="rect">
+            <a:avLst/>
+          </a:prstGeom>
+          <a:noFill/>
+        </p:spPr>
+        <p:txBody>
+          <a:bodyPr wrap="square" anchor="t">
+            <a:spAutoFit/>
+          </a:bodyPr>
+          <a:lstStyle/>
+          <a:p>
+            <a:pPr algn="l">
+              <a:lnSpc>
+                <a:spcPct val="110000"/>
+              </a:lnSpc>
+              <a:spcAft>
+                <a:spcPts val="600"/>
+              </a:spcAft>
+            </a:pPr>
+            <a:r>
+              <a:rPr sz="1000" b="0">
+                <a:solidFill>
+                  <a:srgbClr val="8A97B5"/>
+                </a:solidFill>
+                <a:latin typeface="微软雅黑" panose="020B0502040204020203" charset="-122"/>
+              </a:rPr>
+              <a:t>两江智造集团 · Python程序设计（项目实战）</a:t>
+            </a:r>
+            <a:endParaRPr sz="1000" b="0">
+              <a:solidFill>
+                <a:srgbClr val="8A97B5"/>
+              </a:solidFill>
+              <a:latin typeface="微软雅黑" panose="020B0502040204020203" charset="-122"/>
+            </a:endParaRPr>
+          </a:p>
+        </p:txBody>
+      </p:sp>
+      <p:sp>
+        <p:nvSpPr>
+          <p:cNvPr id="23" name="TextBox 22"/>
+          <p:cNvSpPr txBox="1"/>
+          <p:nvPr/>
+        </p:nvSpPr>
+        <p:spPr>
+          <a:xfrm>
+            <a:off x="10600000" y="6540000"/>
+            <a:ext cx="1000000" cy="300000"/>
+          </a:xfrm>
+          <a:prstGeom prst="rect">
+            <a:avLst/>
+          </a:prstGeom>
+          <a:noFill/>
+        </p:spPr>
+        <p:txBody>
+          <a:bodyPr wrap="square" anchor="t">
+            <a:spAutoFit/>
+          </a:bodyPr>
+          <a:lstStyle/>
+          <a:p>
+            <a:pPr algn="r">
+              <a:lnSpc>
+                <a:spcPct val="110000"/>
+              </a:lnSpc>
+              <a:spcAft>
+                <a:spcPts val="600"/>
+              </a:spcAft>
+            </a:pPr>
+            <a:r>
+              <a:rPr sz="1000" b="0">
+                <a:solidFill>
+                  <a:srgbClr val="8A97B5"/>
+                </a:solidFill>
+                <a:latin typeface="微软雅黑"/>
+              </a:rPr>
+              <a:t>7 / 11</a:t>
+            </a:r>
+            <a:endParaRPr sz="1000" b="0">
+              <a:solidFill>
+                <a:srgbClr val="8A97B5"/>
+              </a:solidFill>
+              <a:latin typeface="微软雅黑" panose="020B0502040204020203" charset="-122"/>
+            </a:endParaRPr>
+          </a:p>
+        </p:txBody>
+      </p:sp>
+    </p:spTree>
+  </p:cSld>
+  <p:clrMapOvr>
+    <a:masterClrMapping/>
+  </p:clrMapOvr>
+</p:sld>
+</file>
+
 <file path=ppt/slides/slide2.xml><?xml version="1.0" encoding="utf-8"?>
 <p:sld xmlns:a="http://schemas.openxmlformats.org/drawingml/2006/main" xmlns:p="http://schemas.openxmlformats.org/presentationml/2006/main" xmlns:r="http://schemas.openxmlformats.org/officeDocument/2006/relationships">
   <p:cSld>
@@ -4771,7 +6956,7 @@
                 </a:solidFill>
                 <a:latin typeface="微软雅黑"/>
               </a:rPr>
-              <a:t>2 / 8</a:t>
+              <a:t>2 / 11</a:t>
             </a:r>
           </a:p>
         </p:txBody>
@@ -5477,7 +7662,7 @@
                 </a:solidFill>
                 <a:latin typeface="微软雅黑"/>
               </a:rPr>
-              <a:t>3 / 8</a:t>
+              <a:t>3 / 11</a:t>
             </a:r>
           </a:p>
         </p:txBody>
@@ -6110,7 +8295,7 @@
                 </a:solidFill>
                 <a:latin typeface="微软雅黑"/>
               </a:rPr>
-              <a:t>4 / 8</a:t>
+              <a:t>4 / 11</a:t>
             </a:r>
           </a:p>
         </p:txBody>
@@ -7891,7 +10076,7 @@
                 </a:solidFill>
                 <a:latin typeface="微软雅黑"/>
               </a:rPr>
-              <a:t>6 / 8</a:t>
+              <a:t>9 / 11</a:t>
             </a:r>
           </a:p>
         </p:txBody>
@@ -8251,7 +10436,7 @@
                 </a:solidFill>
                 <a:latin typeface="微软雅黑"/>
               </a:rPr>
-              <a:t>7 / 8</a:t>
+              <a:t>10 / 11</a:t>
             </a:r>
           </a:p>
         </p:txBody>
@@ -8611,6 +10796,623 @@
               </a:rPr>
               <a:t>带着问题来上课——Predict先于Run</a:t>
             </a:r>
+          </a:p>
+        </p:txBody>
+      </p:sp>
+    </p:spTree>
+  </p:cSld>
+  <p:clrMapOvr>
+    <a:masterClrMapping/>
+  </p:clrMapOvr>
+</p:sld>
+</file>
+
+<file path=ppt/slides/slide9.xml><?xml version="1.0" encoding="utf-8"?>
+<p:sld xmlns:a="http://schemas.openxmlformats.org/drawingml/2006/main" xmlns:p="http://schemas.openxmlformats.org/presentationml/2006/main" xmlns:r="http://schemas.openxmlformats.org/officeDocument/2006/relationships">
+  <p:cSld>
+    <p:spTree>
+      <p:nvGrpSpPr>
+        <p:cNvPr id="1" name=""/>
+        <p:cNvGrpSpPr/>
+        <p:nvPr/>
+      </p:nvGrpSpPr>
+      <p:grpSpPr/>
+      <p:sp>
+        <p:nvSpPr>
+          <p:cNvPr id="2" name="Rectangle 1"/>
+          <p:cNvSpPr/>
+          <p:nvPr/>
+        </p:nvSpPr>
+        <p:spPr>
+          <a:xfrm>
+            <a:off x="0" y="0"/>
+            <a:ext cx="12192000" cy="1150000"/>
+          </a:xfrm>
+          <a:prstGeom prst="rect">
+            <a:avLst/>
+          </a:prstGeom>
+          <a:solidFill>
+            <a:srgbClr val="010328"/>
+          </a:solidFill>
+          <a:ln>
+            <a:noFill/>
+          </a:ln>
+          <a:effectLst/>
+        </p:spPr>
+        <p:style>
+          <a:lnRef idx="1">
+            <a:schemeClr val="accent1"/>
+          </a:lnRef>
+          <a:fillRef idx="3">
+            <a:schemeClr val="accent1"/>
+          </a:fillRef>
+          <a:effectRef idx="2">
+            <a:schemeClr val="accent1"/>
+          </a:effectRef>
+          <a:fontRef idx="minor">
+            <a:schemeClr val="lt1"/>
+          </a:fontRef>
+        </p:style>
+        <p:txBody>
+          <a:bodyPr rtlCol="0" anchor="ctr"/>
+          <a:lstStyle/>
+          <a:p>
+            <a:pPr algn="ctr"/>
+          </a:p>
+        </p:txBody>
+      </p:sp>
+      <p:sp>
+        <p:nvSpPr>
+          <p:cNvPr id="3" name="Rectangle 2"/>
+          <p:cNvSpPr/>
+          <p:nvPr/>
+        </p:nvSpPr>
+        <p:spPr>
+          <a:xfrm>
+            <a:off x="0" y="1150000"/>
+            <a:ext cx="2600000" cy="70000"/>
+          </a:xfrm>
+          <a:prstGeom prst="rect">
+            <a:avLst/>
+          </a:prstGeom>
+          <a:solidFill>
+            <a:srgbClr val="F5670F"/>
+          </a:solidFill>
+          <a:ln>
+            <a:noFill/>
+          </a:ln>
+          <a:effectLst/>
+        </p:spPr>
+        <p:style>
+          <a:lnRef idx="1">
+            <a:schemeClr val="accent1"/>
+          </a:lnRef>
+          <a:fillRef idx="3">
+            <a:schemeClr val="accent1"/>
+          </a:fillRef>
+          <a:effectRef idx="2">
+            <a:schemeClr val="accent1"/>
+          </a:effectRef>
+          <a:fontRef idx="minor">
+            <a:schemeClr val="lt1"/>
+          </a:fontRef>
+        </p:style>
+        <p:txBody>
+          <a:bodyPr rtlCol="0" anchor="ctr"/>
+          <a:lstStyle/>
+          <a:p>
+            <a:pPr algn="ctr"/>
+          </a:p>
+        </p:txBody>
+      </p:sp>
+      <p:sp>
+        <p:nvSpPr>
+          <p:cNvPr id="4" name="TextBox 3"/>
+          <p:cNvSpPr txBox="1"/>
+          <p:nvPr/>
+        </p:nvSpPr>
+        <p:spPr>
+          <a:xfrm>
+            <a:off x="700000" y="300000"/>
+            <a:ext cx="10792000" cy="700000"/>
+          </a:xfrm>
+          <a:prstGeom prst="rect">
+            <a:avLst/>
+          </a:prstGeom>
+          <a:noFill/>
+        </p:spPr>
+        <p:txBody>
+          <a:bodyPr wrap="square" anchor="t">
+            <a:spAutoFit/>
+          </a:bodyPr>
+          <a:lstStyle/>
+          <a:p>
+            <a:pPr algn="l">
+              <a:lnSpc>
+                <a:spcPct val="110000"/>
+              </a:lnSpc>
+              <a:spcAft>
+                <a:spcPts val="600"/>
+              </a:spcAft>
+            </a:pPr>
+            <a:r>
+              <a:rPr sz="2400" b="1">
+                <a:solidFill>
+                  <a:srgbClr val="FFFFFF"/>
+                </a:solidFill>
+                <a:latin typeface="微软雅黑"/>
+              </a:rPr>
+              <a:t>工程化代码：可靠性抽成可测纯函数</a:t>
+            </a:r>
+            <a:endParaRPr sz="2400" b="1">
+              <a:solidFill>
+                <a:srgbClr val="FFFFFF"/>
+              </a:solidFill>
+              <a:latin typeface="微软雅黑" panose="020B0502040204020203" charset="-122"/>
+            </a:endParaRPr>
+          </a:p>
+        </p:txBody>
+      </p:sp>
+      <p:sp>
+        <p:nvSpPr>
+          <p:cNvPr id="5" name="Rectangle 4"/>
+          <p:cNvSpPr/>
+          <p:nvPr/>
+        </p:nvSpPr>
+        <p:spPr>
+          <a:xfrm>
+            <a:off x="760000" y="1750000"/>
+            <a:ext cx="10900000" cy="4600000"/>
+          </a:xfrm>
+          <a:prstGeom prst="rect">
+            <a:avLst/>
+          </a:prstGeom>
+          <a:solidFill>
+            <a:srgbClr val="0D112A"/>
+          </a:solidFill>
+          <a:ln>
+            <a:noFill/>
+          </a:ln>
+          <a:effectLst/>
+        </p:spPr>
+        <p:style>
+          <a:lnRef idx="1">
+            <a:schemeClr val="accent1"/>
+          </a:lnRef>
+          <a:fillRef idx="3">
+            <a:schemeClr val="accent1"/>
+          </a:fillRef>
+          <a:effectRef idx="2">
+            <a:schemeClr val="accent1"/>
+          </a:effectRef>
+          <a:fontRef idx="minor">
+            <a:schemeClr val="lt1"/>
+          </a:fontRef>
+        </p:style>
+        <p:txBody>
+          <a:bodyPr rtlCol="0" anchor="ctr"/>
+          <a:lstStyle/>
+          <a:p>
+            <a:pPr algn="ctr"/>
+          </a:p>
+        </p:txBody>
+      </p:sp>
+      <p:sp>
+        <p:nvSpPr>
+          <p:cNvPr id="6" name="Rectangle 5"/>
+          <p:cNvSpPr/>
+          <p:nvPr/>
+        </p:nvSpPr>
+        <p:spPr>
+          <a:xfrm>
+            <a:off x="760000" y="1750000"/>
+            <a:ext cx="10900000" cy="120000"/>
+          </a:xfrm>
+          <a:prstGeom prst="rect">
+            <a:avLst/>
+          </a:prstGeom>
+          <a:solidFill>
+            <a:srgbClr val="F5670F"/>
+          </a:solidFill>
+          <a:ln>
+            <a:noFill/>
+          </a:ln>
+          <a:effectLst/>
+        </p:spPr>
+        <p:style>
+          <a:lnRef idx="1">
+            <a:schemeClr val="accent1"/>
+          </a:lnRef>
+          <a:fillRef idx="3">
+            <a:schemeClr val="accent1"/>
+          </a:fillRef>
+          <a:effectRef idx="2">
+            <a:schemeClr val="accent1"/>
+          </a:effectRef>
+          <a:fontRef idx="minor">
+            <a:schemeClr val="lt1"/>
+          </a:fontRef>
+        </p:style>
+        <p:txBody>
+          <a:bodyPr rtlCol="0" anchor="ctr"/>
+          <a:lstStyle/>
+          <a:p>
+            <a:pPr algn="ctr"/>
+          </a:p>
+        </p:txBody>
+      </p:sp>
+      <p:sp>
+        <p:nvSpPr>
+          <p:cNvPr id="7" name="TextBox 6"/>
+          <p:cNvSpPr txBox="1"/>
+          <p:nvPr/>
+        </p:nvSpPr>
+        <p:spPr>
+          <a:xfrm>
+            <a:off x="1000000" y="2000000"/>
+            <a:ext cx="10300000" cy="4200000"/>
+          </a:xfrm>
+          <a:prstGeom prst="rect">
+            <a:avLst/>
+          </a:prstGeom>
+          <a:noFill/>
+        </p:spPr>
+        <p:txBody>
+          <a:bodyPr wrap="square" anchor="t">
+            <a:spAutoFit/>
+          </a:bodyPr>
+          <a:lstStyle/>
+          <a:p>
+            <a:pPr algn="l">
+              <a:lnSpc>
+                <a:spcPct val="112000"/>
+              </a:lnSpc>
+              <a:spcAft>
+                <a:spcPts val="0"/>
+              </a:spcAft>
+            </a:pPr>
+            <a:r>
+              <a:rPr sz="1250" b="0">
+                <a:solidFill>
+                  <a:srgbClr val="D6DEF6"/>
+                </a:solidFill>
+                <a:latin typeface="微软雅黑"/>
+              </a:rPr>
+              <a:t># core.py —— transport 可注入 · 零 IO 纯函数</a:t>
+            </a:r>
+            <a:endParaRPr sz="1250" b="0">
+              <a:solidFill>
+                <a:srgbClr val="D6DEF6"/>
+              </a:solidFill>
+              <a:latin typeface="微软雅黑" panose="020B0502040204020203" charset="-122"/>
+            </a:endParaRPr>
+          </a:p>
+          <a:p>
+            <a:r>
+              <a:rPr sz="1250" b="0">
+                <a:solidFill>
+                  <a:srgbClr val="D6DEF6"/>
+                </a:solidFill>
+                <a:latin typeface="微软雅黑"/>
+              </a:rPr>
+              <a:t># 采集中枢: 读数 / 还原 / 对账恒等式 / 指数退避</a:t>
+            </a:r>
+          </a:p>
+          <a:p>
+            <a:r>
+              <a:rPr sz="1250" b="0">
+                <a:solidFill>
+                  <a:srgbClr val="D6DEF6"/>
+                </a:solidFill>
+                <a:latin typeface="微软雅黑"/>
+              </a:rPr>
+              <a:t/>
+            </a:r>
+          </a:p>
+          <a:p>
+            <a:r>
+              <a:rPr sz="1250" b="0">
+                <a:solidFill>
+                  <a:srgbClr val="D6DEF6"/>
+                </a:solidFill>
+                <a:latin typeface="微软雅黑"/>
+              </a:rPr>
+              <a:t>def read(transport, src):</a:t>
+            </a:r>
+          </a:p>
+          <a:p>
+            <a:r>
+              <a:rPr sz="1250" b="0">
+                <a:solidFill>
+                  <a:srgbClr val="D6DEF6"/>
+                </a:solidFill>
+                <a:latin typeface="微软雅黑"/>
+              </a:rPr>
+              <a:t>    return [transport(src) for _ in range(int(src.get("n", 3)))]</a:t>
+            </a:r>
+          </a:p>
+          <a:p>
+            <a:r>
+              <a:rPr sz="1250" b="0">
+                <a:solidFill>
+                  <a:srgbClr val="D6DEF6"/>
+                </a:solidFill>
+                <a:latin typeface="微软雅黑"/>
+              </a:rPr>
+              <a:t/>
+            </a:r>
+          </a:p>
+          <a:p>
+            <a:r>
+              <a:rPr sz="1250" b="0">
+                <a:solidFill>
+                  <a:srgbClr val="D6DEF6"/>
+                </a:solidFill>
+                <a:latin typeface="微软雅黑"/>
+              </a:rPr>
+              <a:t>def restore(raw, scale):</a:t>
+            </a:r>
+          </a:p>
+          <a:p>
+            <a:r>
+              <a:rPr sz="1250" b="0">
+                <a:solidFill>
+                  <a:srgbClr val="D6DEF6"/>
+                </a:solidFill>
+                <a:latin typeface="微软雅黑"/>
+              </a:rPr>
+              <a:t>    if scale &lt;= 0:</a:t>
+            </a:r>
+          </a:p>
+          <a:p>
+            <a:r>
+              <a:rPr sz="1250" b="0">
+                <a:solidFill>
+                  <a:srgbClr val="D6DEF6"/>
+                </a:solidFill>
+                <a:latin typeface="微软雅黑"/>
+              </a:rPr>
+              <a:t>        raise ValueError("scale 必须为正")</a:t>
+            </a:r>
+          </a:p>
+          <a:p>
+            <a:r>
+              <a:rPr sz="1250" b="0">
+                <a:solidFill>
+                  <a:srgbClr val="D6DEF6"/>
+                </a:solidFill>
+                <a:latin typeface="微软雅黑"/>
+              </a:rPr>
+              <a:t>    return [v / scale for v in raw]</a:t>
+            </a:r>
+          </a:p>
+          <a:p>
+            <a:r>
+              <a:rPr sz="1250" b="0">
+                <a:solidFill>
+                  <a:srgbClr val="D6DEF6"/>
+                </a:solidFill>
+                <a:latin typeface="微软雅黑"/>
+              </a:rPr>
+              <a:t/>
+            </a:r>
+          </a:p>
+          <a:p>
+            <a:r>
+              <a:rPr sz="1250" b="0">
+                <a:solidFill>
+                  <a:srgbClr val="D6DEF6"/>
+                </a:solidFill>
+                <a:latin typeface="微软雅黑"/>
+              </a:rPr>
+              <a:t>def reconcile(batches, flat):</a:t>
+            </a:r>
+          </a:p>
+          <a:p>
+            <a:r>
+              <a:rPr sz="1250" b="0">
+                <a:solidFill>
+                  <a:srgbClr val="D6DEF6"/>
+                </a:solidFill>
+                <a:latin typeface="微软雅黑"/>
+              </a:rPr>
+              <a:t>    sb = sum(sum(b) for b in batches)</a:t>
+            </a:r>
+          </a:p>
+          <a:p>
+            <a:r>
+              <a:rPr sz="1250" b="0">
+                <a:solidFill>
+                  <a:srgbClr val="D6DEF6"/>
+                </a:solidFill>
+                <a:latin typeface="微软雅黑"/>
+              </a:rPr>
+              <a:t>    sf = sum(flat)</a:t>
+            </a:r>
+          </a:p>
+          <a:p>
+            <a:r>
+              <a:rPr sz="1250" b="0">
+                <a:solidFill>
+                  <a:srgbClr val="D6DEF6"/>
+                </a:solidFill>
+                <a:latin typeface="微软雅黑"/>
+              </a:rPr>
+              <a:t>    return abs(sb - sf) &lt; 1e-9, round(sb - sf, 9)</a:t>
+            </a:r>
+          </a:p>
+          <a:p>
+            <a:r>
+              <a:rPr sz="1250" b="0">
+                <a:solidFill>
+                  <a:srgbClr val="D6DEF6"/>
+                </a:solidFill>
+                <a:latin typeface="微软雅黑"/>
+              </a:rPr>
+              <a:t/>
+            </a:r>
+          </a:p>
+          <a:p>
+            <a:r>
+              <a:rPr sz="1250" b="0">
+                <a:solidFill>
+                  <a:srgbClr val="D6DEF6"/>
+                </a:solidFill>
+                <a:latin typeface="微软雅黑"/>
+              </a:rPr>
+              <a:t>def sleep_with(base, attempt):</a:t>
+            </a:r>
+          </a:p>
+          <a:p>
+            <a:r>
+              <a:rPr sz="1250" b="0">
+                <a:solidFill>
+                  <a:srgbClr val="D6DEF6"/>
+                </a:solidFill>
+                <a:latin typeface="微软雅黑"/>
+              </a:rPr>
+              <a:t>    return base * (2 ** attempt)</a:t>
+            </a:r>
+          </a:p>
+        </p:txBody>
+      </p:sp>
+      <p:sp>
+        <p:nvSpPr>
+          <p:cNvPr id="8" name="Rectangle 7"/>
+          <p:cNvSpPr/>
+          <p:nvPr/>
+        </p:nvSpPr>
+        <p:spPr>
+          <a:xfrm>
+            <a:off x="500000" y="6500000"/>
+            <a:ext cx="11100000" cy="20000"/>
+          </a:xfrm>
+          <a:prstGeom prst="rect">
+            <a:avLst/>
+          </a:prstGeom>
+          <a:solidFill>
+            <a:srgbClr val="C9D4EE"/>
+          </a:solidFill>
+          <a:ln>
+            <a:noFill/>
+          </a:ln>
+          <a:effectLst/>
+        </p:spPr>
+        <p:style>
+          <a:lnRef idx="1">
+            <a:schemeClr val="accent1"/>
+          </a:lnRef>
+          <a:fillRef idx="3">
+            <a:schemeClr val="accent1"/>
+          </a:fillRef>
+          <a:effectRef idx="2">
+            <a:schemeClr val="accent1"/>
+          </a:effectRef>
+          <a:fontRef idx="minor">
+            <a:schemeClr val="lt1"/>
+          </a:fontRef>
+        </p:style>
+        <p:txBody>
+          <a:bodyPr rtlCol="0" anchor="ctr"/>
+          <a:lstStyle/>
+          <a:p>
+            <a:pPr algn="ctr"/>
+          </a:p>
+        </p:txBody>
+      </p:sp>
+      <p:sp>
+        <p:nvSpPr>
+          <p:cNvPr id="9" name="TextBox 8"/>
+          <p:cNvSpPr txBox="1"/>
+          <p:nvPr/>
+        </p:nvSpPr>
+        <p:spPr>
+          <a:xfrm>
+            <a:off x="500000" y="6540000"/>
+            <a:ext cx="7000000" cy="300000"/>
+          </a:xfrm>
+          <a:prstGeom prst="rect">
+            <a:avLst/>
+          </a:prstGeom>
+          <a:noFill/>
+        </p:spPr>
+        <p:txBody>
+          <a:bodyPr wrap="square" anchor="t">
+            <a:spAutoFit/>
+          </a:bodyPr>
+          <a:lstStyle/>
+          <a:p>
+            <a:pPr algn="l">
+              <a:lnSpc>
+                <a:spcPct val="110000"/>
+              </a:lnSpc>
+              <a:spcAft>
+                <a:spcPts val="600"/>
+              </a:spcAft>
+            </a:pPr>
+            <a:r>
+              <a:rPr sz="1000" b="0">
+                <a:solidFill>
+                  <a:srgbClr val="8A97B5"/>
+                </a:solidFill>
+                <a:latin typeface="微软雅黑" panose="020B0502040204020203" charset="-122"/>
+              </a:rPr>
+              <a:t>两江智造集团 · Python程序设计（项目实战）</a:t>
+            </a:r>
+            <a:endParaRPr sz="1000" b="0">
+              <a:solidFill>
+                <a:srgbClr val="8A97B5"/>
+              </a:solidFill>
+              <a:latin typeface="微软雅黑" panose="020B0502040204020203" charset="-122"/>
+            </a:endParaRPr>
+          </a:p>
+        </p:txBody>
+      </p:sp>
+      <p:sp>
+        <p:nvSpPr>
+          <p:cNvPr id="10" name="TextBox 9"/>
+          <p:cNvSpPr txBox="1"/>
+          <p:nvPr/>
+        </p:nvSpPr>
+        <p:spPr>
+          <a:xfrm>
+            <a:off x="10600000" y="6540000"/>
+            <a:ext cx="1000000" cy="300000"/>
+          </a:xfrm>
+          <a:prstGeom prst="rect">
+            <a:avLst/>
+          </a:prstGeom>
+          <a:noFill/>
+        </p:spPr>
+        <p:txBody>
+          <a:bodyPr wrap="square" anchor="t">
+            <a:spAutoFit/>
+          </a:bodyPr>
+          <a:lstStyle/>
+          <a:p>
+            <a:pPr algn="r">
+              <a:lnSpc>
+                <a:spcPct val="110000"/>
+              </a:lnSpc>
+              <a:spcAft>
+                <a:spcPts val="600"/>
+              </a:spcAft>
+            </a:pPr>
+            <a:r>
+              <a:rPr sz="1000" b="0">
+                <a:solidFill>
+                  <a:srgbClr val="8A97B5"/>
+                </a:solidFill>
+                <a:latin typeface="微软雅黑"/>
+              </a:rPr>
+              <a:t>5 / 11</a:t>
+            </a:r>
+            <a:endParaRPr sz="1000" b="0">
+              <a:solidFill>
+                <a:srgbClr val="8A97B5"/>
+              </a:solidFill>
+              <a:latin typeface="微软雅黑" panose="020B0502040204020203" charset="-122"/>
+            </a:endParaRPr>
           </a:p>
         </p:txBody>
       </p:sp>

--- a/03-Python程序设计-项目实战/V2授课PPT/W06-第12次课-搭建多源数据采集中枢.pptx
+++ b/03-Python程序设计-项目实战/V2授课PPT/W06-第12次课-搭建多源数据采集中枢.pptx
@@ -6,6 +6,7 @@
   </p:sldMasterIdLst>
   <p:sldIdLst>
     <p:sldId id="256" r:id="rId7"/>
+    <p:sldId id="374" r:id="rId22"/>
     <p:sldId id="280" r:id="rId32"/>
     <p:sldId id="311" r:id="rId63"/>
     <p:sldId id="319" r:id="rId71"/>
@@ -19,6 +20,8 @@
     <p:sldId id="338" r:id="rId90"/>
     <p:sldId id="365" r:id="rId117"/>
     <p:sldId id="366" r:id="rId118"/>
+    <p:sldId id="375" r:id="rId23"/>
+    <p:sldId id="376" r:id="rId24"/>
   </p:sldIdLst>
   <p:sldSz cx="12192000" cy="6858000" type="screen4x3"/>
   <p:notesSz cx="6858000" cy="9144000"/>
@@ -4328,20 +4331,22 @@
       <p:grpSpPr/>
       <p:sp>
         <p:nvSpPr>
-          <p:cNvPr id="2" name="Rectangle 1"/>
+          <p:cNvPr id="2" name="Rounded Rectangle 1"/>
           <p:cNvSpPr/>
           <p:nvPr/>
         </p:nvSpPr>
         <p:spPr>
           <a:xfrm>
             <a:off x="0" y="0"/>
-            <a:ext cx="12192000" cy="6858000"/>
-          </a:xfrm>
-          <a:prstGeom prst="rect">
-            <a:avLst/>
+            <a:ext cx="12191695" cy="64008"/>
+          </a:xfrm>
+          <a:prstGeom prst="roundRect">
+            <a:avLst>
+              <a:gd name="adj" fmla="val 50000"/>
+            </a:avLst>
           </a:prstGeom>
           <a:solidFill>
-            <a:srgbClr val="010328"/>
+            <a:srgbClr val="0B5E54"/>
           </a:solidFill>
           <a:ln>
             <a:noFill/>
@@ -4372,20 +4377,60 @@
       </p:sp>
       <p:sp>
         <p:nvSpPr>
-          <p:cNvPr id="3" name="Rectangle 2"/>
+          <p:cNvPr id="3" name="TextBox 2"/>
+          <p:cNvSpPr txBox="1"/>
+          <p:nvPr/>
+        </p:nvSpPr>
+        <p:spPr>
+          <a:xfrm>
+            <a:off x="475488" y="146304"/>
+            <a:ext cx="8229600" cy="292608"/>
+          </a:xfrm>
+          <a:prstGeom prst="rect">
+            <a:avLst/>
+          </a:prstGeom>
+          <a:noFill/>
+        </p:spPr>
+        <p:txBody>
+          <a:bodyPr wrap="square" anchor="t" lIns="0" rIns="0" tIns="0" bIns="0">
+            <a:spAutoFit/>
+          </a:bodyPr>
+          <a:lstStyle/>
+          <a:p>
+            <a:pPr algn="l">
+              <a:lnSpc>
+                <a:spcPct val="114000"/>
+              </a:lnSpc>
+            </a:pPr>
+            <a:r>
+              <a:rPr sz="1100" b="1">
+                <a:solidFill>
+                  <a:srgbClr val="0B5E54"/>
+                </a:solidFill>
+              </a:rPr>
+              <a:t>工单实战 · 运行留证</a:t>
+            </a:r>
+          </a:p>
+        </p:txBody>
+      </p:sp>
+      <p:sp>
+        <p:nvSpPr>
+          <p:cNvPr id="4" name="Rounded Rectangle 3"/>
           <p:cNvSpPr/>
           <p:nvPr/>
         </p:nvSpPr>
         <p:spPr>
           <a:xfrm>
-            <a:off x="0" y="2880360"/>
-            <a:ext cx="12192000" cy="50000"/>
-          </a:xfrm>
-          <a:prstGeom prst="rect">
-            <a:avLst/>
+            <a:off x="475488" y="475488"/>
+            <a:ext cx="2027872" cy="310896"/>
+          </a:xfrm>
+          <a:prstGeom prst="roundRect">
+            <a:avLst>
+              <a:gd name="adj" fmla="val 50000"/>
+            </a:avLst>
           </a:prstGeom>
           <a:solidFill>
-            <a:srgbClr val="F5670F"/>
+            <a:srgbClr val="C9A227"/>
           </a:solidFill>
           <a:ln>
             <a:noFill/>
@@ -4416,14 +4461,14 @@
       </p:sp>
       <p:sp>
         <p:nvSpPr>
-          <p:cNvPr id="4" name="TextBox 3"/>
+          <p:cNvPr id="5" name="TextBox 4"/>
           <p:cNvSpPr txBox="1"/>
           <p:nvPr/>
         </p:nvSpPr>
         <p:spPr>
           <a:xfrm>
-            <a:off x="0" y="1645920"/>
-            <a:ext cx="12192000" cy="1500000"/>
+            <a:off x="475488" y="475488"/>
+            <a:ext cx="2027872" cy="310896"/>
           </a:xfrm>
           <a:prstGeom prst="rect">
             <a:avLst/>
@@ -4431,41 +4476,37 @@
           <a:noFill/>
         </p:spPr>
         <p:txBody>
-          <a:bodyPr wrap="square" anchor="t">
+          <a:bodyPr wrap="square" anchor="ctr" lIns="0" rIns="0" tIns="0" bIns="0">
             <a:spAutoFit/>
           </a:bodyPr>
           <a:lstStyle/>
           <a:p>
             <a:pPr algn="ctr">
               <a:lnSpc>
-                <a:spcPct val="110000"/>
+                <a:spcPct val="114000"/>
               </a:lnSpc>
-              <a:spcAft>
-                <a:spcPts val="600"/>
-              </a:spcAft>
             </a:pPr>
             <a:r>
-              <a:rPr sz="5400" b="1">
+              <a:rPr sz="1050" b="1">
                 <a:solidFill>
                   <a:srgbClr val="FFFFFF"/>
                 </a:solidFill>
-                <a:latin typeface="微软雅黑"/>
-              </a:rPr>
-              <a:t>THANKS</a:t>
-            </a:r>
-          </a:p>
-        </p:txBody>
-      </p:sp>
-      <p:sp>
-        <p:nvSpPr>
-          <p:cNvPr id="5" name="TextBox 4"/>
+              </a:rPr>
+              <a:t>SCREENSHOT · 终端逐字截图</a:t>
+            </a:r>
+          </a:p>
+        </p:txBody>
+      </p:sp>
+      <p:sp>
+        <p:nvSpPr>
+          <p:cNvPr id="6" name="TextBox 5"/>
           <p:cNvSpPr txBox="1"/>
           <p:nvPr/>
         </p:nvSpPr>
         <p:spPr>
           <a:xfrm>
-            <a:off x="0" y="3429000"/>
-            <a:ext cx="12192000" cy="800000"/>
+            <a:off x="475488" y="859536"/>
+            <a:ext cx="11237976" cy="502920"/>
           </a:xfrm>
           <a:prstGeom prst="rect">
             <a:avLst/>
@@ -4473,89 +4514,45 @@
           <a:noFill/>
         </p:spPr>
         <p:txBody>
-          <a:bodyPr wrap="square" anchor="t">
+          <a:bodyPr wrap="square" anchor="t" lIns="0" rIns="0" tIns="0" bIns="0">
             <a:spAutoFit/>
           </a:bodyPr>
           <a:lstStyle/>
           <a:p>
-            <a:pPr algn="ctr">
+            <a:pPr algn="l">
               <a:lnSpc>
-                <a:spcPct val="110000"/>
+                <a:spcPct val="114000"/>
               </a:lnSpc>
-              <a:spcAft>
-                <a:spcPts val="600"/>
-              </a:spcAft>
             </a:pPr>
             <a:r>
               <a:rPr sz="2200" b="1">
                 <a:solidFill>
-                  <a:srgbClr val="F5670F"/>
-                </a:solidFill>
-                <a:latin typeface="微软雅黑"/>
-              </a:rPr>
-              <a:t>感谢聆听 · 动手实践出真知</a:t>
-            </a:r>
-          </a:p>
-        </p:txBody>
-      </p:sp>
-      <p:sp>
-        <p:nvSpPr>
-          <p:cNvPr id="6" name="TextBox 5"/>
-          <p:cNvSpPr txBox="1"/>
-          <p:nvPr/>
-        </p:nvSpPr>
-        <p:spPr>
-          <a:xfrm>
-            <a:off x="0" y="4526280"/>
-            <a:ext cx="12192000" cy="600000"/>
-          </a:xfrm>
-          <a:prstGeom prst="rect">
-            <a:avLst/>
-          </a:prstGeom>
-          <a:noFill/>
-        </p:spPr>
-        <p:txBody>
-          <a:bodyPr wrap="square" anchor="t">
-            <a:spAutoFit/>
-          </a:bodyPr>
-          <a:lstStyle/>
-          <a:p>
-            <a:pPr algn="ctr">
-              <a:lnSpc>
-                <a:spcPct val="110000"/>
-              </a:lnSpc>
-              <a:spcAft>
-                <a:spcPts val="600"/>
-              </a:spcAft>
-            </a:pPr>
-            <a:r>
-              <a:rPr sz="1400" b="0">
-                <a:solidFill>
-                  <a:srgbClr val="BBC6E6"/>
-                </a:solidFill>
-                <a:latin typeface="微软雅黑"/>
-              </a:rPr>
-              <a:t>以生为本   |   做中学 · 学中做</a:t>
-            </a:r>
-          </a:p>
-        </p:txBody>
-      </p:sp>
-      <p:sp>
-        <p:nvSpPr>
-          <p:cNvPr id="7" name="Rectangle 6"/>
+                  <a:srgbClr val="1B2B28"/>
+                </a:solidFill>
+              </a:rPr>
+              <a:t>P4.1 工单验收四档对照 · 四档逐字输出截图</a:t>
+            </a:r>
+          </a:p>
+        </p:txBody>
+      </p:sp>
+      <p:sp>
+        <p:nvSpPr>
+          <p:cNvPr id="7" name="Rounded Rectangle 6"/>
           <p:cNvSpPr/>
           <p:nvPr/>
         </p:nvSpPr>
         <p:spPr>
           <a:xfrm>
-            <a:off x="500000" y="6500000"/>
-            <a:ext cx="11100000" cy="20000"/>
-          </a:xfrm>
-          <a:prstGeom prst="rect">
-            <a:avLst/>
+            <a:off x="475488" y="1389888"/>
+            <a:ext cx="1234440" cy="27432"/>
+          </a:xfrm>
+          <a:prstGeom prst="roundRect">
+            <a:avLst>
+              <a:gd name="adj" fmla="val 50000"/>
+            </a:avLst>
           </a:prstGeom>
           <a:solidFill>
-            <a:srgbClr val="C9D4EE"/>
+            <a:srgbClr val="C9A227"/>
           </a:solidFill>
           <a:ln>
             <a:noFill/>
@@ -4586,14 +4583,60 @@
       </p:sp>
       <p:sp>
         <p:nvSpPr>
-          <p:cNvPr id="8" name="TextBox 7"/>
+          <p:cNvPr id="8" name="Rounded Rectangle 7"/>
+          <p:cNvSpPr/>
+          <p:nvPr/>
+        </p:nvSpPr>
+        <p:spPr>
+          <a:xfrm>
+            <a:off x="475488" y="6419088"/>
+            <a:ext cx="11237976" cy="10972"/>
+          </a:xfrm>
+          <a:prstGeom prst="roundRect">
+            <a:avLst>
+              <a:gd name="adj" fmla="val 50000"/>
+            </a:avLst>
+          </a:prstGeom>
+          <a:solidFill>
+            <a:srgbClr val="E4F1EE"/>
+          </a:solidFill>
+          <a:ln>
+            <a:noFill/>
+          </a:ln>
+          <a:effectLst/>
+        </p:spPr>
+        <p:style>
+          <a:lnRef idx="1">
+            <a:schemeClr val="accent1"/>
+          </a:lnRef>
+          <a:fillRef idx="3">
+            <a:schemeClr val="accent1"/>
+          </a:fillRef>
+          <a:effectRef idx="2">
+            <a:schemeClr val="accent1"/>
+          </a:effectRef>
+          <a:fontRef idx="minor">
+            <a:schemeClr val="lt1"/>
+          </a:fontRef>
+        </p:style>
+        <p:txBody>
+          <a:bodyPr rtlCol="0" anchor="ctr"/>
+          <a:lstStyle/>
+          <a:p>
+            <a:pPr algn="ctr"/>
+          </a:p>
+        </p:txBody>
+      </p:sp>
+      <p:sp>
+        <p:nvSpPr>
+          <p:cNvPr id="9" name="TextBox 8"/>
           <p:cNvSpPr txBox="1"/>
           <p:nvPr/>
         </p:nvSpPr>
         <p:spPr>
           <a:xfrm>
-            <a:off x="500000" y="6540000"/>
-            <a:ext cx="7000000" cy="300000"/>
+            <a:off x="475488" y="6455664"/>
+            <a:ext cx="7315200" cy="292608"/>
           </a:xfrm>
           <a:prstGeom prst="rect">
             <a:avLst/>
@@ -4601,25 +4644,21 @@
           <a:noFill/>
         </p:spPr>
         <p:txBody>
-          <a:bodyPr wrap="square" anchor="t">
+          <a:bodyPr wrap="square" anchor="t" lIns="0" rIns="0" tIns="0" bIns="0">
             <a:spAutoFit/>
           </a:bodyPr>
           <a:lstStyle/>
           <a:p>
             <a:pPr algn="l">
               <a:lnSpc>
-                <a:spcPct val="110000"/>
+                <a:spcPct val="114000"/>
               </a:lnSpc>
-              <a:spcAft>
-                <a:spcPts val="600"/>
-              </a:spcAft>
             </a:pPr>
             <a:r>
-              <a:rPr sz="1000" b="0">
-                <a:solidFill>
-                  <a:srgbClr val="8A97B5"/>
-                </a:solidFill>
-                <a:latin typeface="微软雅黑"/>
+              <a:rPr sz="900" b="0">
+                <a:solidFill>
+                  <a:srgbClr val="5C6E6A"/>
+                </a:solidFill>
               </a:rPr>
               <a:t>两江智造集团 · Python程序设计（项目实战）</a:t>
             </a:r>
@@ -4628,14 +4667,14 @@
       </p:sp>
       <p:sp>
         <p:nvSpPr>
-          <p:cNvPr id="9" name="TextBox 8"/>
+          <p:cNvPr id="10" name="TextBox 9"/>
           <p:cNvSpPr txBox="1"/>
           <p:nvPr/>
         </p:nvSpPr>
         <p:spPr>
           <a:xfrm>
-            <a:off x="10600000" y="6540000"/>
-            <a:ext cx="1000000" cy="300000"/>
+            <a:off x="10597896" y="6537960"/>
+            <a:ext cx="996696" cy="301752"/>
           </a:xfrm>
           <a:prstGeom prst="rect">
             <a:avLst/>
@@ -4643,27 +4682,123 @@
           <a:noFill/>
         </p:spPr>
         <p:txBody>
-          <a:bodyPr wrap="square" anchor="ctr">
+          <a:bodyPr wrap="square" anchor="t" lIns="0" rIns="0" tIns="0" bIns="0">
             <a:spAutoFit/>
           </a:bodyPr>
           <a:lstStyle/>
           <a:p>
             <a:pPr algn="r">
               <a:lnSpc>
-                <a:spcPct val="110000"/>
+                <a:spcPct val="114000"/>
               </a:lnSpc>
-              <a:spcAft>
-                <a:spcPts val="600"/>
-              </a:spcAft>
             </a:pPr>
             <a:r>
               <a:rPr sz="1000" b="0">
                 <a:solidFill>
                   <a:srgbClr val="8A97B5"/>
                 </a:solidFill>
-                <a:latin typeface="微软雅黑"/>
-              </a:rPr>
-              <a:t>13 / 14</a:t>
+              </a:rPr>
+              <a:t>10 / 14</a:t>
+            </a:r>
+          </a:p>
+        </p:txBody>
+      </p:sp>
+      <p:sp>
+        <p:nvSpPr>
+          <p:cNvPr id="11" name="TextBox 10"/>
+          <p:cNvSpPr txBox="1"/>
+          <p:nvPr/>
+        </p:nvSpPr>
+        <p:spPr>
+          <a:xfrm>
+            <a:off x="475488" y="1517904"/>
+            <a:ext cx="11237976" cy="237744"/>
+          </a:xfrm>
+          <a:prstGeom prst="rect">
+            <a:avLst/>
+          </a:prstGeom>
+          <a:noFill/>
+        </p:spPr>
+        <p:txBody>
+          <a:bodyPr wrap="square" anchor="t" lIns="0" rIns="0" tIns="0" bIns="0">
+            <a:spAutoFit/>
+          </a:bodyPr>
+          <a:lstStyle/>
+          <a:p>
+            <a:pPr algn="l">
+              <a:lnSpc>
+                <a:spcPct val="114000"/>
+              </a:lnSpc>
+            </a:pPr>
+            <a:r>
+              <a:rPr sz="1000" b="0">
+                <a:solidFill>
+                  <a:srgbClr val="5C6E6A"/>
+                </a:solidFill>
+              </a:rPr>
+              <a:t>终端窗口截图：由 report.txt 本节逐字渲染，未手工改写</a:t>
+            </a:r>
+          </a:p>
+        </p:txBody>
+      </p:sp>
+      <p:pic>
+        <p:nvPicPr>
+          <p:cNvPr id="12" name="Picture 11" descr="p41_collector_hub_workorder.png"/>
+          <p:cNvPicPr>
+            <a:picLocks noChangeAspect="1"/>
+          </p:cNvPicPr>
+          <p:nvPr/>
+        </p:nvPicPr>
+        <p:blipFill>
+          <a:blip r:embed="rId2"/>
+          <a:stretch>
+            <a:fillRect/>
+          </a:stretch>
+        </p:blipFill>
+        <p:spPr>
+          <a:xfrm>
+            <a:off x="475488" y="2048196"/>
+            <a:ext cx="11237976" cy="3337679"/>
+          </a:xfrm>
+          <a:prstGeom prst="rect">
+            <a:avLst/>
+          </a:prstGeom>
+        </p:spPr>
+      </p:pic>
+      <p:sp>
+        <p:nvSpPr>
+          <p:cNvPr id="13" name="TextBox 12"/>
+          <p:cNvSpPr txBox="1"/>
+          <p:nvPr/>
+        </p:nvSpPr>
+        <p:spPr>
+          <a:xfrm>
+            <a:off x="475488" y="5422451"/>
+            <a:ext cx="11237976" cy="256032"/>
+          </a:xfrm>
+          <a:prstGeom prst="rect">
+            <a:avLst/>
+          </a:prstGeom>
+          <a:noFill/>
+        </p:spPr>
+        <p:txBody>
+          <a:bodyPr wrap="square" anchor="t" lIns="0" rIns="0" tIns="0" bIns="0">
+            <a:spAutoFit/>
+          </a:bodyPr>
+          <a:lstStyle/>
+          <a:p>
+            <a:pPr algn="l">
+              <a:lnSpc>
+                <a:spcPct val="114000"/>
+              </a:lnSpc>
+            </a:pPr>
+            <a:r>
+              <a:rPr sz="850" b="0">
+                <a:solidFill>
+                  <a:srgbClr val="5C6E6A"/>
+                </a:solidFill>
+              </a:rPr>
+              <a:t>▲ p41_collector_hub：工单验收四档对照 第 36 行起的四档逐字原文（绿=达标/通过，黄=仅本节取证项，橙=未实测项）</a:t>
             </a:r>
           </a:p>
         </p:txBody>
@@ -4688,20 +4823,22 @@
       <p:grpSpPr/>
       <p:sp>
         <p:nvSpPr>
-          <p:cNvPr id="2" name="Rectangle 1"/>
+          <p:cNvPr id="2" name="Rounded Rectangle 1"/>
           <p:cNvSpPr/>
           <p:nvPr/>
         </p:nvSpPr>
         <p:spPr>
           <a:xfrm>
             <a:off x="0" y="0"/>
-            <a:ext cx="12192000" cy="1150000"/>
-          </a:xfrm>
-          <a:prstGeom prst="rect">
-            <a:avLst/>
+            <a:ext cx="12191695" cy="64008"/>
+          </a:xfrm>
+          <a:prstGeom prst="roundRect">
+            <a:avLst>
+              <a:gd name="adj" fmla="val 50000"/>
+            </a:avLst>
           </a:prstGeom>
           <a:solidFill>
-            <a:srgbClr val="010328"/>
+            <a:srgbClr val="0B5E54"/>
           </a:solidFill>
           <a:ln>
             <a:noFill/>
@@ -4732,20 +4869,60 @@
       </p:sp>
       <p:sp>
         <p:nvSpPr>
-          <p:cNvPr id="3" name="Rectangle 2"/>
+          <p:cNvPr id="3" name="TextBox 2"/>
+          <p:cNvSpPr txBox="1"/>
+          <p:nvPr/>
+        </p:nvSpPr>
+        <p:spPr>
+          <a:xfrm>
+            <a:off x="475488" y="146304"/>
+            <a:ext cx="8229600" cy="292608"/>
+          </a:xfrm>
+          <a:prstGeom prst="rect">
+            <a:avLst/>
+          </a:prstGeom>
+          <a:noFill/>
+        </p:spPr>
+        <p:txBody>
+          <a:bodyPr wrap="square" anchor="t" lIns="0" rIns="0" tIns="0" bIns="0">
+            <a:spAutoFit/>
+          </a:bodyPr>
+          <a:lstStyle/>
+          <a:p>
+            <a:pPr algn="l">
+              <a:lnSpc>
+                <a:spcPct val="114000"/>
+              </a:lnSpc>
+            </a:pPr>
+            <a:r>
+              <a:rPr sz="1100" b="1">
+                <a:solidFill>
+                  <a:srgbClr val="0B5E54"/>
+                </a:solidFill>
+              </a:rPr>
+              <a:t>工单实战 · 运行留证</a:t>
+            </a:r>
+          </a:p>
+        </p:txBody>
+      </p:sp>
+      <p:sp>
+        <p:nvSpPr>
+          <p:cNvPr id="4" name="Rounded Rectangle 3"/>
           <p:cNvSpPr/>
           <p:nvPr/>
         </p:nvSpPr>
         <p:spPr>
           <a:xfrm>
-            <a:off x="0" y="1150000"/>
-            <a:ext cx="2600000" cy="70000"/>
-          </a:xfrm>
-          <a:prstGeom prst="rect">
-            <a:avLst/>
+            <a:off x="475488" y="475488"/>
+            <a:ext cx="2027872" cy="310896"/>
+          </a:xfrm>
+          <a:prstGeom prst="roundRect">
+            <a:avLst>
+              <a:gd name="adj" fmla="val 50000"/>
+            </a:avLst>
           </a:prstGeom>
           <a:solidFill>
-            <a:srgbClr val="F5670F"/>
+            <a:srgbClr val="C9A227"/>
           </a:solidFill>
           <a:ln>
             <a:noFill/>
@@ -4776,14 +4953,14 @@
       </p:sp>
       <p:sp>
         <p:nvSpPr>
-          <p:cNvPr id="4" name="TextBox 3"/>
+          <p:cNvPr id="5" name="TextBox 4"/>
           <p:cNvSpPr txBox="1"/>
           <p:nvPr/>
         </p:nvSpPr>
         <p:spPr>
           <a:xfrm>
-            <a:off x="700000" y="300000"/>
-            <a:ext cx="10792000" cy="700000"/>
+            <a:off x="475488" y="475488"/>
+            <a:ext cx="2027872" cy="310896"/>
           </a:xfrm>
           <a:prstGeom prst="rect">
             <a:avLst/>
@@ -4791,47 +4968,83 @@
           <a:noFill/>
         </p:spPr>
         <p:txBody>
-          <a:bodyPr wrap="square" anchor="t">
+          <a:bodyPr wrap="square" anchor="ctr" lIns="0" rIns="0" tIns="0" bIns="0">
             <a:spAutoFit/>
           </a:bodyPr>
           <a:lstStyle/>
           <a:p>
+            <a:pPr algn="ctr">
+              <a:lnSpc>
+                <a:spcPct val="114000"/>
+              </a:lnSpc>
+            </a:pPr>
+            <a:r>
+              <a:rPr sz="1050" b="1">
+                <a:solidFill>
+                  <a:srgbClr val="FFFFFF"/>
+                </a:solidFill>
+              </a:rPr>
+              <a:t>SCREENSHOT · 终端逐字截图</a:t>
+            </a:r>
+          </a:p>
+        </p:txBody>
+      </p:sp>
+      <p:sp>
+        <p:nvSpPr>
+          <p:cNvPr id="6" name="TextBox 5"/>
+          <p:cNvSpPr txBox="1"/>
+          <p:nvPr/>
+        </p:nvSpPr>
+        <p:spPr>
+          <a:xfrm>
+            <a:off x="475488" y="859536"/>
+            <a:ext cx="11237976" cy="502920"/>
+          </a:xfrm>
+          <a:prstGeom prst="rect">
+            <a:avLst/>
+          </a:prstGeom>
+          <a:noFill/>
+        </p:spPr>
+        <p:txBody>
+          <a:bodyPr wrap="square" anchor="t" lIns="0" rIns="0" tIns="0" bIns="0">
+            <a:spAutoFit/>
+          </a:bodyPr>
+          <a:lstStyle/>
+          <a:p>
             <a:pPr algn="l">
               <a:lnSpc>
-                <a:spcPct val="110000"/>
+                <a:spcPct val="114000"/>
               </a:lnSpc>
-              <a:spcAft>
-                <a:spcPts val="600"/>
-              </a:spcAft>
             </a:pPr>
             <a:r>
-              <a:rPr sz="2400" b="1">
-                <a:solidFill>
-                  <a:srgbClr val="FFFFFF"/>
-                </a:solidFill>
-                <a:latin typeface="微软雅黑"/>
-              </a:rPr>
-              <a:t>下次课预告（第7周）</a:t>
-            </a:r>
-          </a:p>
-        </p:txBody>
-      </p:sp>
-      <p:sp>
-        <p:nvSpPr>
-          <p:cNvPr id="5" name="Rectangle 4"/>
+              <a:rPr sz="2200" b="1">
+                <a:solidFill>
+                  <a:srgbClr val="1B2B28"/>
+                </a:solidFill>
+              </a:rPr>
+              <a:t>P4.1 · 另一套阶梯逐字输出＋pytest 全量实跑</a:t>
+            </a:r>
+          </a:p>
+        </p:txBody>
+      </p:sp>
+      <p:sp>
+        <p:nvSpPr>
+          <p:cNvPr id="7" name="Rounded Rectangle 6"/>
           <p:cNvSpPr/>
           <p:nvPr/>
         </p:nvSpPr>
         <p:spPr>
           <a:xfrm>
-            <a:off x="760000" y="1900000"/>
-            <a:ext cx="10900000" cy="1600000"/>
-          </a:xfrm>
-          <a:prstGeom prst="rect">
-            <a:avLst/>
+            <a:off x="475488" y="1389888"/>
+            <a:ext cx="1234440" cy="27432"/>
+          </a:xfrm>
+          <a:prstGeom prst="roundRect">
+            <a:avLst>
+              <a:gd name="adj" fmla="val 50000"/>
+            </a:avLst>
           </a:prstGeom>
           <a:solidFill>
-            <a:srgbClr val="F3F6FD"/>
+            <a:srgbClr val="C9A227"/>
           </a:solidFill>
           <a:ln>
             <a:noFill/>
@@ -4862,20 +5075,22 @@
       </p:sp>
       <p:sp>
         <p:nvSpPr>
-          <p:cNvPr id="6" name="Rectangle 5"/>
+          <p:cNvPr id="8" name="Rounded Rectangle 7"/>
           <p:cNvSpPr/>
           <p:nvPr/>
         </p:nvSpPr>
         <p:spPr>
           <a:xfrm>
-            <a:off x="760000" y="1900000"/>
-            <a:ext cx="150000" cy="1600000"/>
-          </a:xfrm>
-          <a:prstGeom prst="rect">
-            <a:avLst/>
+            <a:off x="475488" y="6419088"/>
+            <a:ext cx="11237976" cy="10972"/>
+          </a:xfrm>
+          <a:prstGeom prst="roundRect">
+            <a:avLst>
+              <a:gd name="adj" fmla="val 50000"/>
+            </a:avLst>
           </a:prstGeom>
           <a:solidFill>
-            <a:srgbClr val="F5670F"/>
+            <a:srgbClr val="E4F1EE"/>
           </a:solidFill>
           <a:ln>
             <a:noFill/>
@@ -4906,14 +5121,14 @@
       </p:sp>
       <p:sp>
         <p:nvSpPr>
-          <p:cNvPr id="7" name="TextBox 6"/>
+          <p:cNvPr id="9" name="TextBox 8"/>
           <p:cNvSpPr txBox="1"/>
           <p:nvPr/>
         </p:nvSpPr>
         <p:spPr>
           <a:xfrm>
-            <a:off x="1020000" y="2050000"/>
-            <a:ext cx="10500000" cy="1400000"/>
+            <a:off x="475488" y="6455664"/>
+            <a:ext cx="7315200" cy="292608"/>
           </a:xfrm>
           <a:prstGeom prst="rect">
             <a:avLst/>
@@ -4921,60 +5136,137 @@
           <a:noFill/>
         </p:spPr>
         <p:txBody>
-          <a:bodyPr wrap="square" anchor="t">
+          <a:bodyPr wrap="square" anchor="t" lIns="0" rIns="0" tIns="0" bIns="0">
             <a:spAutoFit/>
           </a:bodyPr>
           <a:lstStyle/>
           <a:p>
             <a:pPr algn="l">
               <a:lnSpc>
-                <a:spcPct val="110000"/>
+                <a:spcPct val="114000"/>
               </a:lnSpc>
-              <a:spcAft>
-                <a:spcPts val="600"/>
-              </a:spcAft>
             </a:pPr>
             <a:r>
-              <a:rPr sz="1700" b="1">
-                <a:solidFill>
-                  <a:srgbClr val="010328"/>
-                </a:solidFill>
-                <a:latin typeface="微软雅黑"/>
-              </a:rPr>
-              <a:t>主题: 四表ER设计与ORM建模——应用：见工单star</a:t>
-            </a:r>
-          </a:p>
+              <a:rPr sz="900" b="0">
+                <a:solidFill>
+                  <a:srgbClr val="5C6E6A"/>
+                </a:solidFill>
+              </a:rPr>
+              <a:t>两江智造集团 · Python程序设计（项目实战）</a:t>
+            </a:r>
+          </a:p>
+        </p:txBody>
+      </p:sp>
+      <p:sp>
+        <p:nvSpPr>
+          <p:cNvPr id="10" name="TextBox 9"/>
+          <p:cNvSpPr txBox="1"/>
+          <p:nvPr/>
+        </p:nvSpPr>
+        <p:spPr>
+          <a:xfrm>
+            <a:off x="10597896" y="6537960"/>
+            <a:ext cx="996696" cy="301752"/>
+          </a:xfrm>
+          <a:prstGeom prst="rect">
+            <a:avLst/>
+          </a:prstGeom>
+          <a:noFill/>
+        </p:spPr>
+        <p:txBody>
+          <a:bodyPr wrap="square" anchor="t" lIns="0" rIns="0" tIns="0" bIns="0">
+            <a:spAutoFit/>
+          </a:bodyPr>
+          <a:lstStyle/>
+          <a:p>
+            <a:pPr algn="r">
+              <a:lnSpc>
+                <a:spcPct val="114000"/>
+              </a:lnSpc>
+            </a:pPr>
+            <a:r>
+              <a:rPr sz="1000" b="0">
+                <a:solidFill>
+                  <a:srgbClr val="8A97B5"/>
+                </a:solidFill>
+              </a:rPr>
+              <a:t>11 / 14</a:t>
+            </a:r>
+          </a:p>
+        </p:txBody>
+      </p:sp>
+      <p:sp>
+        <p:nvSpPr>
+          <p:cNvPr id="11" name="TextBox 10"/>
+          <p:cNvSpPr txBox="1"/>
+          <p:nvPr/>
+        </p:nvSpPr>
+        <p:spPr>
+          <a:xfrm>
+            <a:off x="475488" y="1517904"/>
+            <a:ext cx="11237976" cy="237744"/>
+          </a:xfrm>
+          <a:prstGeom prst="rect">
+            <a:avLst/>
+          </a:prstGeom>
+          <a:noFill/>
+        </p:spPr>
+        <p:txBody>
+          <a:bodyPr wrap="square" anchor="t" lIns="0" rIns="0" tIns="0" bIns="0">
+            <a:spAutoFit/>
+          </a:bodyPr>
+          <a:lstStyle/>
           <a:p>
             <a:pPr algn="l">
               <a:lnSpc>
-                <a:spcPct val="110000"/>
+                <a:spcPct val="114000"/>
               </a:lnSpc>
-              <a:spcAft>
-                <a:spcPts val="600"/>
-              </a:spcAft>
             </a:pPr>
             <a:r>
-              <a:rPr sz="1300" b="0">
-                <a:solidFill>
-                  <a:srgbClr val="44546A"/>
-                </a:solidFill>
-                <a:latin typeface="微软雅黑"/>
-              </a:rPr>
-              <a:t>预习快问: 一对多关系在表结构上如何表达？</a:t>
-            </a:r>
-          </a:p>
-        </p:txBody>
-      </p:sp>
-      <p:sp>
-        <p:nvSpPr>
-          <p:cNvPr id="8" name="TextBox 7"/>
+              <a:rPr sz="1000" b="0">
+                <a:solidFill>
+                  <a:srgbClr val="5C6E6A"/>
+                </a:solidFill>
+              </a:rPr>
+              <a:t>上：p41_collector_hub 分层达标逐字输出（见上一页）｜下：pytest 全量实跑（退出码 0，全绿）</a:t>
+            </a:r>
+          </a:p>
+        </p:txBody>
+      </p:sp>
+      <p:pic>
+        <p:nvPicPr>
+          <p:cNvPr id="12" name="Picture 11" descr="p41_collector_hub_classroom.png"/>
+          <p:cNvPicPr>
+            <a:picLocks noChangeAspect="1"/>
+          </p:cNvPicPr>
+          <p:nvPr/>
+        </p:nvPicPr>
+        <p:blipFill>
+          <a:blip r:embed="rId2"/>
+          <a:stretch>
+            <a:fillRect/>
+          </a:stretch>
+        </p:blipFill>
+        <p:spPr>
+          <a:xfrm>
+            <a:off x="1096272" y="1792224"/>
+            <a:ext cx="9996406" cy="2169220"/>
+          </a:xfrm>
+          <a:prstGeom prst="rect">
+            <a:avLst/>
+          </a:prstGeom>
+        </p:spPr>
+      </p:pic>
+      <p:sp>
+        <p:nvSpPr>
+          <p:cNvPr id="13" name="TextBox 12"/>
           <p:cNvSpPr txBox="1"/>
           <p:nvPr/>
         </p:nvSpPr>
         <p:spPr>
           <a:xfrm>
-            <a:off x="760000" y="3900000"/>
-            <a:ext cx="10900000" cy="900000"/>
+            <a:off x="475488" y="3998020"/>
+            <a:ext cx="11237976" cy="256032"/>
           </a:xfrm>
           <a:prstGeom prst="rect">
             <a:avLst/>
@@ -4982,46 +5274,85 @@
           <a:noFill/>
         </p:spPr>
         <p:txBody>
-          <a:bodyPr wrap="square" anchor="t">
+          <a:bodyPr wrap="square" anchor="t" lIns="0" rIns="0" tIns="0" bIns="0">
             <a:spAutoFit/>
           </a:bodyPr>
           <a:lstStyle/>
           <a:p>
             <a:pPr algn="l">
               <a:lnSpc>
-                <a:spcPct val="110000"/>
+                <a:spcPct val="114000"/>
               </a:lnSpc>
-              <a:spcAft>
-                <a:spcPts val="600"/>
-              </a:spcAft>
             </a:pPr>
             <a:r>
-              <a:rPr sz="1400" b="1">
-                <a:solidFill>
-                  <a:srgbClr val="0545E8"/>
-                </a:solidFill>
-                <a:latin typeface="微软雅黑"/>
-              </a:rPr>
-              <a:t>课前完成：导学单 + 预习自测 + starter环境自检</a:t>
-            </a:r>
-          </a:p>
+              <a:rPr sz="850" b="0">
+                <a:solidFill>
+                  <a:srgbClr val="5C6E6A"/>
+                </a:solidFill>
+              </a:rPr>
+              <a:t>▲ 分层达标（第 44 行起）：四档逐字原文，未改写</a:t>
+            </a:r>
+          </a:p>
+        </p:txBody>
+      </p:sp>
+      <p:pic>
+        <p:nvPicPr>
+          <p:cNvPr id="14" name="Picture 13" descr="p41_collector_hub_pytest.png"/>
+          <p:cNvPicPr>
+            <a:picLocks noChangeAspect="1"/>
+          </p:cNvPicPr>
+          <p:nvPr/>
+        </p:nvPicPr>
+        <p:blipFill>
+          <a:blip r:embed="rId3"/>
+          <a:stretch>
+            <a:fillRect/>
+          </a:stretch>
+        </p:blipFill>
+        <p:spPr>
+          <a:xfrm>
+            <a:off x="1096272" y="4272340"/>
+            <a:ext cx="9996406" cy="1369508"/>
+          </a:xfrm>
+          <a:prstGeom prst="rect">
+            <a:avLst/>
+          </a:prstGeom>
+        </p:spPr>
+      </p:pic>
+      <p:sp>
+        <p:nvSpPr>
+          <p:cNvPr id="15" name="TextBox 14"/>
+          <p:cNvSpPr txBox="1"/>
+          <p:nvPr/>
+        </p:nvSpPr>
+        <p:spPr>
+          <a:xfrm>
+            <a:off x="475488" y="5678424"/>
+            <a:ext cx="11237976" cy="256032"/>
+          </a:xfrm>
+          <a:prstGeom prst="rect">
+            <a:avLst/>
+          </a:prstGeom>
+          <a:noFill/>
+        </p:spPr>
+        <p:txBody>
+          <a:bodyPr wrap="square" anchor="t" lIns="0" rIns="0" tIns="0" bIns="0">
+            <a:spAutoFit/>
+          </a:bodyPr>
+          <a:lstStyle/>
           <a:p>
             <a:pPr algn="l">
               <a:lnSpc>
-                <a:spcPct val="110000"/>
+                <a:spcPct val="114000"/>
               </a:lnSpc>
-              <a:spcAft>
-                <a:spcPts val="600"/>
-              </a:spcAft>
             </a:pPr>
             <a:r>
-              <a:rPr sz="1250" b="0">
-                <a:solidFill>
-                  <a:srgbClr val="44546A"/>
-                </a:solidFill>
-                <a:latin typeface="微软雅黑"/>
-              </a:rPr>
-              <a:t>带着问题来上课——Predict先于Run</a:t>
+              <a:rPr sz="850" b="0">
+                <a:solidFill>
+                  <a:srgbClr val="5C6E6A"/>
+                </a:solidFill>
+              </a:rPr>
+              <a:t>▲ pytest：47 passed in 0.28s（本机实跑，非示例）</a:t>
             </a:r>
           </a:p>
         </p:txBody>
@@ -5046,22 +5377,20 @@
       <p:grpSpPr/>
       <p:sp>
         <p:nvSpPr>
-          <p:cNvPr id="2" name="Rounded Rectangle 1"/>
+          <p:cNvPr id="2" name="Rectangle 1"/>
           <p:cNvSpPr/>
           <p:nvPr/>
         </p:nvSpPr>
         <p:spPr>
           <a:xfrm>
             <a:off x="0" y="0"/>
-            <a:ext cx="12191695" cy="64008"/>
-          </a:xfrm>
-          <a:prstGeom prst="roundRect">
-            <a:avLst>
-              <a:gd name="adj" fmla="val 50000"/>
-            </a:avLst>
+            <a:ext cx="12192000" cy="1150000"/>
+          </a:xfrm>
+          <a:prstGeom prst="rect">
+            <a:avLst/>
           </a:prstGeom>
           <a:solidFill>
-            <a:srgbClr val="0B5E54"/>
+            <a:srgbClr val="010328"/>
           </a:solidFill>
           <a:ln>
             <a:noFill/>
@@ -5092,60 +5421,20 @@
       </p:sp>
       <p:sp>
         <p:nvSpPr>
-          <p:cNvPr id="3" name="TextBox 2"/>
-          <p:cNvSpPr txBox="1"/>
-          <p:nvPr/>
-        </p:nvSpPr>
-        <p:spPr>
-          <a:xfrm>
-            <a:off x="475488" y="146304"/>
-            <a:ext cx="8229600" cy="292608"/>
-          </a:xfrm>
-          <a:prstGeom prst="rect">
-            <a:avLst/>
-          </a:prstGeom>
-          <a:noFill/>
-        </p:spPr>
-        <p:txBody>
-          <a:bodyPr wrap="square" anchor="t" lIns="0" rIns="0" tIns="0" bIns="0">
-            <a:spAutoFit/>
-          </a:bodyPr>
-          <a:lstStyle/>
-          <a:p>
-            <a:pPr algn="l">
-              <a:lnSpc>
-                <a:spcPct val="114000"/>
-              </a:lnSpc>
-            </a:pPr>
-            <a:r>
-              <a:rPr sz="1100" b="1">
-                <a:solidFill>
-                  <a:srgbClr val="0B5E54"/>
-                </a:solidFill>
-              </a:rPr>
-              <a:t>工单实战 · 本次实跑结果</a:t>
-            </a:r>
-          </a:p>
-        </p:txBody>
-      </p:sp>
-      <p:sp>
-        <p:nvSpPr>
-          <p:cNvPr id="4" name="Rounded Rectangle 3"/>
+          <p:cNvPr id="3" name="Rectangle 2"/>
           <p:cNvSpPr/>
           <p:nvPr/>
         </p:nvSpPr>
         <p:spPr>
           <a:xfrm>
-            <a:off x="475488" y="475488"/>
-            <a:ext cx="1881187" cy="310896"/>
-          </a:xfrm>
-          <a:prstGeom prst="roundRect">
-            <a:avLst>
-              <a:gd name="adj" fmla="val 50000"/>
-            </a:avLst>
+            <a:off x="0" y="1150000"/>
+            <a:ext cx="2600000" cy="70000"/>
+          </a:xfrm>
+          <a:prstGeom prst="rect">
+            <a:avLst/>
           </a:prstGeom>
           <a:solidFill>
-            <a:srgbClr val="C9A227"/>
+            <a:srgbClr val="F5670F"/>
           </a:solidFill>
           <a:ln>
             <a:noFill/>
@@ -5176,14 +5465,14 @@
       </p:sp>
       <p:sp>
         <p:nvSpPr>
-          <p:cNvPr id="5" name="TextBox 4"/>
+          <p:cNvPr id="4" name="TextBox 3"/>
           <p:cNvSpPr txBox="1"/>
           <p:nvPr/>
         </p:nvSpPr>
         <p:spPr>
           <a:xfrm>
-            <a:off x="475488" y="475488"/>
-            <a:ext cx="1881187" cy="310896"/>
+            <a:off x="700000" y="300000"/>
+            <a:ext cx="10792000" cy="700000"/>
           </a:xfrm>
           <a:prstGeom prst="rect">
             <a:avLst/>
@@ -5191,83 +5480,47 @@
           <a:noFill/>
         </p:spPr>
         <p:txBody>
-          <a:bodyPr wrap="square" anchor="ctr" lIns="0" rIns="0" tIns="0" bIns="0">
+          <a:bodyPr wrap="square" anchor="t">
             <a:spAutoFit/>
           </a:bodyPr>
           <a:lstStyle/>
           <a:p>
-            <a:pPr algn="ctr">
-              <a:lnSpc>
-                <a:spcPct val="114000"/>
-              </a:lnSpc>
-            </a:pPr>
-            <a:r>
-              <a:rPr sz="1050" b="1">
-                <a:solidFill>
-                  <a:srgbClr val="FFFFFF"/>
-                </a:solidFill>
-              </a:rPr>
-              <a:t>REAL RUN · 四档逐字实测</a:t>
-            </a:r>
-          </a:p>
-        </p:txBody>
-      </p:sp>
-      <p:sp>
-        <p:nvSpPr>
-          <p:cNvPr id="6" name="TextBox 5"/>
-          <p:cNvSpPr txBox="1"/>
-          <p:nvPr/>
-        </p:nvSpPr>
-        <p:spPr>
-          <a:xfrm>
-            <a:off x="475488" y="859536"/>
-            <a:ext cx="11237976" cy="502920"/>
-          </a:xfrm>
-          <a:prstGeom prst="rect">
-            <a:avLst/>
-          </a:prstGeom>
-          <a:noFill/>
-        </p:spPr>
-        <p:txBody>
-          <a:bodyPr wrap="square" anchor="t" lIns="0" rIns="0" tIns="0" bIns="0">
-            <a:spAutoFit/>
-          </a:bodyPr>
-          <a:lstStyle/>
-          <a:p>
             <a:pPr algn="l">
               <a:lnSpc>
-                <a:spcPct val="114000"/>
+                <a:spcPct val="110000"/>
               </a:lnSpc>
+              <a:spcAft>
+                <a:spcPts val="600"/>
+              </a:spcAft>
             </a:pPr>
             <a:r>
-              <a:rPr sz="2200" b="1">
-                <a:solidFill>
-                  <a:srgbClr val="1B2B28"/>
-                </a:solidFill>
-              </a:rPr>
-              <a:t>P4.1 p41_collector_hub：本次 D/C/B/A 四档实测</a:t>
-            </a:r>
-          </a:p>
-        </p:txBody>
-      </p:sp>
-      <p:sp>
-        <p:nvSpPr>
-          <p:cNvPr id="7" name="Rounded Rectangle 6"/>
+              <a:rPr sz="2400" b="1">
+                <a:solidFill>
+                  <a:srgbClr val="FFFFFF"/>
+                </a:solidFill>
+                <a:latin typeface="微软雅黑"/>
+              </a:rPr>
+              <a:t>总结评价与课后任务</a:t>
+            </a:r>
+          </a:p>
+        </p:txBody>
+      </p:sp>
+      <p:sp>
+        <p:nvSpPr>
+          <p:cNvPr id="5" name="Rectangle 4"/>
           <p:cNvSpPr/>
           <p:nvPr/>
         </p:nvSpPr>
         <p:spPr>
           <a:xfrm>
-            <a:off x="475488" y="1389888"/>
-            <a:ext cx="1234440" cy="27432"/>
-          </a:xfrm>
-          <a:prstGeom prst="roundRect">
-            <a:avLst>
-              <a:gd name="adj" fmla="val 50000"/>
-            </a:avLst>
+            <a:off x="800000" y="1950000"/>
+            <a:ext cx="10600000" cy="1500000"/>
+          </a:xfrm>
+          <a:prstGeom prst="rect">
+            <a:avLst/>
           </a:prstGeom>
           <a:solidFill>
-            <a:srgbClr val="C9A227"/>
+            <a:srgbClr val="F3F6FD"/>
           </a:solidFill>
           <a:ln>
             <a:noFill/>
@@ -5298,22 +5551,285 @@
       </p:sp>
       <p:sp>
         <p:nvSpPr>
-          <p:cNvPr id="8" name="Rounded Rectangle 7"/>
+          <p:cNvPr id="6" name="TextBox 5"/>
+          <p:cNvSpPr txBox="1"/>
+          <p:nvPr/>
+        </p:nvSpPr>
+        <p:spPr>
+          <a:xfrm>
+            <a:off x="1000000" y="2050000"/>
+            <a:ext cx="10300000" cy="1400000"/>
+          </a:xfrm>
+          <a:prstGeom prst="rect">
+            <a:avLst/>
+          </a:prstGeom>
+          <a:noFill/>
+        </p:spPr>
+        <p:txBody>
+          <a:bodyPr wrap="square" anchor="t">
+            <a:spAutoFit/>
+          </a:bodyPr>
+          <a:lstStyle/>
+          <a:p>
+            <a:pPr algn="l">
+              <a:lnSpc>
+                <a:spcPct val="110000"/>
+              </a:lnSpc>
+              <a:spcAft>
+                <a:spcPts val="600"/>
+              </a:spcAft>
+            </a:pPr>
+            <a:r>
+              <a:rPr sz="1500" b="1">
+                <a:solidFill>
+                  <a:srgbClr val="0545E8"/>
+                </a:solidFill>
+                <a:latin typeface="微软雅黑"/>
+              </a:rPr>
+              <a:t>评价（10分钟）：</a:t>
+            </a:r>
+          </a:p>
+          <a:p>
+            <a:pPr algn="l">
+              <a:lnSpc>
+                <a:spcPct val="110000"/>
+              </a:lnSpc>
+              <a:spcAft>
+                <a:spcPts val="600"/>
+              </a:spcAft>
+            </a:pPr>
+            <a:r>
+              <a:rPr sz="1400" b="0">
+                <a:solidFill>
+                  <a:srgbClr val="010328"/>
+                </a:solidFill>
+                <a:latin typeface="微软雅黑"/>
+              </a:rPr>
+              <a:t>按D/C/B/A量表当堂评分；工单24小时内反馈评语与改进建议。</a:t>
+            </a:r>
+          </a:p>
+        </p:txBody>
+      </p:sp>
+      <p:sp>
+        <p:nvSpPr>
+          <p:cNvPr id="7" name="TextBox 6"/>
+          <p:cNvSpPr txBox="1"/>
+          <p:nvPr/>
+        </p:nvSpPr>
+        <p:spPr>
+          <a:xfrm>
+            <a:off x="850000" y="3700000"/>
+            <a:ext cx="10600000" cy="700000"/>
+          </a:xfrm>
+          <a:prstGeom prst="rect">
+            <a:avLst/>
+          </a:prstGeom>
+          <a:noFill/>
+        </p:spPr>
+        <p:txBody>
+          <a:bodyPr wrap="square" anchor="t">
+            <a:spAutoFit/>
+          </a:bodyPr>
+          <a:lstStyle/>
+          <a:p>
+            <a:pPr algn="l">
+              <a:lnSpc>
+                <a:spcPct val="120000"/>
+              </a:lnSpc>
+              <a:spcAft>
+                <a:spcPts val="600"/>
+              </a:spcAft>
+            </a:pPr>
+            <a:r>
+              <a:rPr sz="1400" b="1">
+                <a:solidFill>
+                  <a:srgbClr val="F5670F"/>
+                </a:solidFill>
+                <a:latin typeface="微软雅黑"/>
+              </a:rPr>
+              <a:t>1. </a:t>
+            </a:r>
+            <a:r>
+              <a:rPr sz="1400" b="0">
+                <a:solidFill>
+                  <a:srgbClr val="010328"/>
+                </a:solidFill>
+                <a:latin typeface="微软雅黑"/>
+              </a:rPr>
+              <a:t>1. 完成工单P4.1《多源工业数据采集系统》：及格标准采集率&gt;95%+无数据丢失；优秀标准≥99.5%+延迟&lt;100ms+告警完善；</a:t>
+            </a:r>
+          </a:p>
+        </p:txBody>
+      </p:sp>
+      <p:sp>
+        <p:nvSpPr>
+          <p:cNvPr id="8" name="TextBox 7"/>
+          <p:cNvSpPr txBox="1"/>
+          <p:nvPr/>
+        </p:nvSpPr>
+        <p:spPr>
+          <a:xfrm>
+            <a:off x="850000" y="4420000"/>
+            <a:ext cx="10600000" cy="700000"/>
+          </a:xfrm>
+          <a:prstGeom prst="rect">
+            <a:avLst/>
+          </a:prstGeom>
+          <a:noFill/>
+        </p:spPr>
+        <p:txBody>
+          <a:bodyPr wrap="square" anchor="t">
+            <a:spAutoFit/>
+          </a:bodyPr>
+          <a:lstStyle/>
+          <a:p>
+            <a:pPr algn="l">
+              <a:lnSpc>
+                <a:spcPct val="120000"/>
+              </a:lnSpc>
+              <a:spcAft>
+                <a:spcPts val="600"/>
+              </a:spcAft>
+            </a:pPr>
+            <a:r>
+              <a:rPr sz="1400" b="1">
+                <a:solidFill>
+                  <a:srgbClr val="F5670F"/>
+                </a:solidFill>
+                <a:latin typeface="微软雅黑"/>
+              </a:rPr>
+              <a:t>2. </a:t>
+            </a:r>
+            <a:r>
+              <a:rPr sz="1400" b="0">
+                <a:solidFill>
+                  <a:srgbClr val="010328"/>
+                </a:solidFill>
+                <a:latin typeface="微软雅黑"/>
+              </a:rPr>
+              <a:t>2. 撰写系统架构文档（模块图+数据流图）；</a:t>
+            </a:r>
+          </a:p>
+        </p:txBody>
+      </p:sp>
+      <p:sp>
+        <p:nvSpPr>
+          <p:cNvPr id="9" name="TextBox 8"/>
+          <p:cNvSpPr txBox="1"/>
+          <p:nvPr/>
+        </p:nvSpPr>
+        <p:spPr>
+          <a:xfrm>
+            <a:off x="850000" y="5140000"/>
+            <a:ext cx="10600000" cy="700000"/>
+          </a:xfrm>
+          <a:prstGeom prst="rect">
+            <a:avLst/>
+          </a:prstGeom>
+          <a:noFill/>
+        </p:spPr>
+        <p:txBody>
+          <a:bodyPr wrap="square" anchor="t">
+            <a:spAutoFit/>
+          </a:bodyPr>
+          <a:lstStyle/>
+          <a:p>
+            <a:pPr algn="l">
+              <a:lnSpc>
+                <a:spcPct val="120000"/>
+              </a:lnSpc>
+              <a:spcAft>
+                <a:spcPts val="600"/>
+              </a:spcAft>
+            </a:pPr>
+            <a:r>
+              <a:rPr sz="1400" b="1">
+                <a:solidFill>
+                  <a:srgbClr val="F5670F"/>
+                </a:solidFill>
+                <a:latin typeface="微软雅黑"/>
+              </a:rPr>
+              <a:t>3. </a:t>
+            </a:r>
+            <a:r>
+              <a:rPr sz="1400" b="0">
+                <a:solidFill>
+                  <a:srgbClr val="010328"/>
+                </a:solidFill>
+                <a:latin typeface="微软雅黑"/>
+              </a:rPr>
+              <a:t>3. 预习SQL基础与数据库设计方法。</a:t>
+            </a:r>
+          </a:p>
+        </p:txBody>
+      </p:sp>
+      <p:sp>
+        <p:nvSpPr>
+          <p:cNvPr id="10" name="TextBox 9"/>
+          <p:cNvSpPr txBox="1"/>
+          <p:nvPr/>
+        </p:nvSpPr>
+        <p:spPr>
+          <a:xfrm>
+            <a:off x="850000" y="5960000"/>
+            <a:ext cx="10600000" cy="500000"/>
+          </a:xfrm>
+          <a:prstGeom prst="rect">
+            <a:avLst/>
+          </a:prstGeom>
+          <a:noFill/>
+        </p:spPr>
+        <p:txBody>
+          <a:bodyPr wrap="square" anchor="t">
+            <a:spAutoFit/>
+          </a:bodyPr>
+          <a:lstStyle/>
+          <a:p>
+            <a:pPr algn="l">
+              <a:lnSpc>
+                <a:spcPct val="110000"/>
+              </a:lnSpc>
+              <a:spcAft>
+                <a:spcPts val="600"/>
+              </a:spcAft>
+            </a:pPr>
+            <a:r>
+              <a:rPr sz="1300" b="1">
+                <a:solidFill>
+                  <a:srgbClr val="0475B6"/>
+                </a:solidFill>
+                <a:latin typeface="微软雅黑"/>
+              </a:rPr>
+              <a:t>下次课预告：</a:t>
+            </a:r>
+            <a:r>
+              <a:rPr sz="1300" b="0">
+                <a:solidFill>
+                  <a:srgbClr val="44546A"/>
+                </a:solidFill>
+                <a:latin typeface="微软雅黑"/>
+              </a:rPr>
+              <a:t>见下次课工单任务书</a:t>
+            </a:r>
+          </a:p>
+        </p:txBody>
+      </p:sp>
+      <p:sp>
+        <p:nvSpPr>
+          <p:cNvPr id="11" name="Rectangle 10"/>
           <p:cNvSpPr/>
           <p:nvPr/>
         </p:nvSpPr>
         <p:spPr>
           <a:xfrm>
-            <a:off x="475488" y="6419088"/>
-            <a:ext cx="11237976" cy="10972"/>
-          </a:xfrm>
-          <a:prstGeom prst="roundRect">
-            <a:avLst>
-              <a:gd name="adj" fmla="val 50000"/>
-            </a:avLst>
+            <a:off x="500000" y="6500000"/>
+            <a:ext cx="11100000" cy="20000"/>
+          </a:xfrm>
+          <a:prstGeom prst="rect">
+            <a:avLst/>
           </a:prstGeom>
           <a:solidFill>
-            <a:srgbClr val="E4F1EE"/>
+            <a:srgbClr val="C9D4EE"/>
           </a:solidFill>
           <a:ln>
             <a:noFill/>
@@ -5344,14 +5860,14 @@
       </p:sp>
       <p:sp>
         <p:nvSpPr>
-          <p:cNvPr id="9" name="TextBox 8"/>
+          <p:cNvPr id="12" name="TextBox 11"/>
           <p:cNvSpPr txBox="1"/>
           <p:nvPr/>
         </p:nvSpPr>
         <p:spPr>
           <a:xfrm>
-            <a:off x="475488" y="6455664"/>
-            <a:ext cx="7315200" cy="292608"/>
+            <a:off x="500000" y="6540000"/>
+            <a:ext cx="7000000" cy="300000"/>
           </a:xfrm>
           <a:prstGeom prst="rect">
             <a:avLst/>
@@ -5359,21 +5875,25 @@
           <a:noFill/>
         </p:spPr>
         <p:txBody>
-          <a:bodyPr wrap="square" anchor="t" lIns="0" rIns="0" tIns="0" bIns="0">
+          <a:bodyPr wrap="square" anchor="t">
             <a:spAutoFit/>
           </a:bodyPr>
           <a:lstStyle/>
           <a:p>
             <a:pPr algn="l">
               <a:lnSpc>
-                <a:spcPct val="114000"/>
+                <a:spcPct val="110000"/>
               </a:lnSpc>
+              <a:spcAft>
+                <a:spcPts val="600"/>
+              </a:spcAft>
             </a:pPr>
             <a:r>
-              <a:rPr sz="900" b="0">
-                <a:solidFill>
-                  <a:srgbClr val="5C6E6A"/>
-                </a:solidFill>
+              <a:rPr sz="1000" b="0">
+                <a:solidFill>
+                  <a:srgbClr val="8A97B5"/>
+                </a:solidFill>
+                <a:latin typeface="微软雅黑"/>
               </a:rPr>
               <a:t>两江智造集团 · Python程序设计（项目实战）</a:t>
             </a:r>
@@ -5382,14 +5902,14 @@
       </p:sp>
       <p:sp>
         <p:nvSpPr>
-          <p:cNvPr id="10" name="TextBox 9"/>
+          <p:cNvPr id="13" name="TextBox 12"/>
           <p:cNvSpPr txBox="1"/>
           <p:nvPr/>
         </p:nvSpPr>
         <p:spPr>
           <a:xfrm>
-            <a:off x="10597896" y="6537960"/>
-            <a:ext cx="996696" cy="301752"/>
+            <a:off x="10600000" y="6540000"/>
+            <a:ext cx="1000000" cy="300000"/>
           </a:xfrm>
           <a:prstGeom prst="rect">
             <a:avLst/>
@@ -5397,1599 +5917,27 @@
           <a:noFill/>
         </p:spPr>
         <p:txBody>
-          <a:bodyPr wrap="square" anchor="t" lIns="0" rIns="0" tIns="0" bIns="0">
+          <a:bodyPr wrap="square" anchor="t">
             <a:spAutoFit/>
           </a:bodyPr>
           <a:lstStyle/>
           <a:p>
             <a:pPr algn="r">
               <a:lnSpc>
-                <a:spcPct val="114000"/>
+                <a:spcPct val="110000"/>
               </a:lnSpc>
+              <a:spcAft>
+                <a:spcPts val="600"/>
+              </a:spcAft>
             </a:pPr>
             <a:r>
               <a:rPr sz="1000" b="0">
                 <a:solidFill>
                   <a:srgbClr val="8A97B5"/>
                 </a:solidFill>
-              </a:rPr>
-              <a:t>9 / 14</a:t>
-            </a:r>
-          </a:p>
-        </p:txBody>
-      </p:sp>
-      <p:sp>
-        <p:nvSpPr>
-          <p:cNvPr id="11" name="Rounded Rectangle 10"/>
-          <p:cNvSpPr/>
-          <p:nvPr/>
-        </p:nvSpPr>
-        <p:spPr>
-          <a:xfrm>
-            <a:off x="475488" y="1554480"/>
-            <a:ext cx="11237976" cy="916686"/>
-          </a:xfrm>
-          <a:prstGeom prst="roundRect">
-            <a:avLst>
-              <a:gd name="adj" fmla="val 6000"/>
-            </a:avLst>
-          </a:prstGeom>
-          <a:solidFill>
-            <a:srgbClr val="FFFFFF"/>
-          </a:solidFill>
-          <a:ln w="9525">
-            <a:solidFill>
-              <a:srgbClr val="E4F1EE"/>
-            </a:solidFill>
-          </a:ln>
-          <a:effectLst/>
-        </p:spPr>
-        <p:style>
-          <a:lnRef idx="1">
-            <a:schemeClr val="accent1"/>
-          </a:lnRef>
-          <a:fillRef idx="3">
-            <a:schemeClr val="accent1"/>
-          </a:fillRef>
-          <a:effectRef idx="2">
-            <a:schemeClr val="accent1"/>
-          </a:effectRef>
-          <a:fontRef idx="minor">
-            <a:schemeClr val="lt1"/>
-          </a:fontRef>
-        </p:style>
-        <p:txBody>
-          <a:bodyPr rtlCol="0" anchor="ctr"/>
-          <a:lstStyle/>
-          <a:p>
-            <a:pPr algn="ctr"/>
-          </a:p>
-        </p:txBody>
-      </p:sp>
-      <p:sp>
-        <p:nvSpPr>
-          <p:cNvPr id="12" name="Rounded Rectangle 11"/>
-          <p:cNvSpPr/>
-          <p:nvPr/>
-        </p:nvSpPr>
-        <p:spPr>
-          <a:xfrm>
-            <a:off x="475488" y="1554480"/>
-            <a:ext cx="54864" cy="916686"/>
-          </a:xfrm>
-          <a:prstGeom prst="roundRect">
-            <a:avLst>
-              <a:gd name="adj" fmla="val 50000"/>
-            </a:avLst>
-          </a:prstGeom>
-          <a:solidFill>
-            <a:srgbClr val="5C6E6A"/>
-          </a:solidFill>
-          <a:ln>
-            <a:noFill/>
-          </a:ln>
-          <a:effectLst/>
-        </p:spPr>
-        <p:style>
-          <a:lnRef idx="1">
-            <a:schemeClr val="accent1"/>
-          </a:lnRef>
-          <a:fillRef idx="3">
-            <a:schemeClr val="accent1"/>
-          </a:fillRef>
-          <a:effectRef idx="2">
-            <a:schemeClr val="accent1"/>
-          </a:effectRef>
-          <a:fontRef idx="minor">
-            <a:schemeClr val="lt1"/>
-          </a:fontRef>
-        </p:style>
-        <p:txBody>
-          <a:bodyPr rtlCol="0" anchor="ctr"/>
-          <a:lstStyle/>
-          <a:p>
-            <a:pPr algn="ctr"/>
-          </a:p>
-        </p:txBody>
-      </p:sp>
-      <p:sp>
-        <p:nvSpPr>
-          <p:cNvPr id="13" name="Rounded Rectangle 12"/>
-          <p:cNvSpPr/>
-          <p:nvPr/>
-        </p:nvSpPr>
-        <p:spPr>
-          <a:xfrm>
-            <a:off x="621792" y="1636776"/>
-            <a:ext cx="237744" cy="237744"/>
-          </a:xfrm>
-          <a:prstGeom prst="roundRect">
-            <a:avLst>
-              <a:gd name="adj" fmla="val 28000"/>
-            </a:avLst>
-          </a:prstGeom>
-          <a:solidFill>
-            <a:srgbClr val="5C6E6A"/>
-          </a:solidFill>
-          <a:ln>
-            <a:noFill/>
-          </a:ln>
-          <a:effectLst/>
-        </p:spPr>
-        <p:style>
-          <a:lnRef idx="1">
-            <a:schemeClr val="accent1"/>
-          </a:lnRef>
-          <a:fillRef idx="3">
-            <a:schemeClr val="accent1"/>
-          </a:fillRef>
-          <a:effectRef idx="2">
-            <a:schemeClr val="accent1"/>
-          </a:effectRef>
-          <a:fontRef idx="minor">
-            <a:schemeClr val="lt1"/>
-          </a:fontRef>
-        </p:style>
-        <p:txBody>
-          <a:bodyPr rtlCol="0" anchor="ctr"/>
-          <a:lstStyle/>
-          <a:p>
-            <a:pPr algn="ctr"/>
-          </a:p>
-        </p:txBody>
-      </p:sp>
-      <p:sp>
-        <p:nvSpPr>
-          <p:cNvPr id="14" name="TextBox 13"/>
-          <p:cNvSpPr txBox="1"/>
-          <p:nvPr/>
-        </p:nvSpPr>
-        <p:spPr>
-          <a:xfrm>
-            <a:off x="621792" y="1636776"/>
-            <a:ext cx="237744" cy="237744"/>
-          </a:xfrm>
-          <a:prstGeom prst="rect">
-            <a:avLst/>
-          </a:prstGeom>
-          <a:noFill/>
-        </p:spPr>
-        <p:txBody>
-          <a:bodyPr wrap="square" anchor="ctr" lIns="0" rIns="0" tIns="0" bIns="0">
-            <a:spAutoFit/>
-          </a:bodyPr>
-          <a:lstStyle/>
-          <a:p>
-            <a:pPr algn="ctr">
-              <a:lnSpc>
-                <a:spcPct val="114000"/>
-              </a:lnSpc>
-            </a:pPr>
-            <a:r>
-              <a:rPr sz="1000" b="1">
-                <a:solidFill>
-                  <a:srgbClr val="FFFFFF"/>
-                </a:solidFill>
-              </a:rPr>
-              <a:t>D</a:t>
-            </a:r>
-          </a:p>
-        </p:txBody>
-      </p:sp>
-      <p:sp>
-        <p:nvSpPr>
-          <p:cNvPr id="15" name="TextBox 14"/>
-          <p:cNvSpPr txBox="1"/>
-          <p:nvPr/>
-        </p:nvSpPr>
-        <p:spPr>
-          <a:xfrm>
-            <a:off x="932688" y="1618488"/>
-            <a:ext cx="8778240" cy="274320"/>
-          </a:xfrm>
-          <a:prstGeom prst="rect">
-            <a:avLst/>
-          </a:prstGeom>
-          <a:noFill/>
-        </p:spPr>
-        <p:txBody>
-          <a:bodyPr wrap="square" anchor="ctr" lIns="0" rIns="0" tIns="0" bIns="0">
-            <a:spAutoFit/>
-          </a:bodyPr>
-          <a:lstStyle/>
-          <a:p>
-            <a:pPr algn="l">
-              <a:lnSpc>
-                <a:spcPct val="114000"/>
-              </a:lnSpc>
-            </a:pPr>
-            <a:r>
-              <a:rPr sz="1050" b="1">
-                <a:solidFill>
-                  <a:srgbClr val="1B2B28"/>
-                </a:solidFill>
-              </a:rPr>
-              <a:t>及格</a:t>
-            </a:r>
-            <a:r>
-              <a:rPr sz="850" b="0">
-                <a:solidFill>
-                  <a:srgbClr val="5C6E6A"/>
-                </a:solidFill>
-              </a:rPr>
-              <a:t>   验收口径：</a:t>
-            </a:r>
-            <a:r>
-              <a:rPr sz="850" b="0">
-                <a:solidFill>
-                  <a:srgbClr val="5C6E6A"/>
-                </a:solidFill>
-              </a:rPr>
-              <a:t>三源数据贯通；采集率&gt;95%；无数据丢失；系统文档</a:t>
-            </a:r>
-          </a:p>
-        </p:txBody>
-      </p:sp>
-      <p:sp>
-        <p:nvSpPr>
-          <p:cNvPr id="16" name="Rounded Rectangle 15"/>
-          <p:cNvSpPr/>
-          <p:nvPr/>
-        </p:nvSpPr>
-        <p:spPr>
-          <a:xfrm>
-            <a:off x="11131803" y="1645920"/>
-            <a:ext cx="453644" cy="237744"/>
-          </a:xfrm>
-          <a:prstGeom prst="roundRect">
-            <a:avLst>
-              <a:gd name="adj" fmla="val 50000"/>
-            </a:avLst>
-          </a:prstGeom>
-          <a:solidFill>
-            <a:srgbClr val="0B5E54"/>
-          </a:solidFill>
-          <a:ln>
-            <a:noFill/>
-          </a:ln>
-          <a:effectLst/>
-        </p:spPr>
-        <p:style>
-          <a:lnRef idx="1">
-            <a:schemeClr val="accent1"/>
-          </a:lnRef>
-          <a:fillRef idx="3">
-            <a:schemeClr val="accent1"/>
-          </a:fillRef>
-          <a:effectRef idx="2">
-            <a:schemeClr val="accent1"/>
-          </a:effectRef>
-          <a:fontRef idx="minor">
-            <a:schemeClr val="lt1"/>
-          </a:fontRef>
-        </p:style>
-        <p:txBody>
-          <a:bodyPr rtlCol="0" anchor="ctr"/>
-          <a:lstStyle/>
-          <a:p>
-            <a:pPr algn="ctr"/>
-          </a:p>
-        </p:txBody>
-      </p:sp>
-      <p:sp>
-        <p:nvSpPr>
-          <p:cNvPr id="17" name="TextBox 16"/>
-          <p:cNvSpPr txBox="1"/>
-          <p:nvPr/>
-        </p:nvSpPr>
-        <p:spPr>
-          <a:xfrm>
-            <a:off x="11131803" y="1645920"/>
-            <a:ext cx="453644" cy="237744"/>
-          </a:xfrm>
-          <a:prstGeom prst="rect">
-            <a:avLst/>
-          </a:prstGeom>
-          <a:noFill/>
-        </p:spPr>
-        <p:txBody>
-          <a:bodyPr wrap="square" anchor="ctr" lIns="0" rIns="0" tIns="0" bIns="0">
-            <a:spAutoFit/>
-          </a:bodyPr>
-          <a:lstStyle/>
-          <a:p>
-            <a:pPr algn="ctr">
-              <a:lnSpc>
-                <a:spcPct val="114000"/>
-              </a:lnSpc>
-            </a:pPr>
-            <a:r>
-              <a:rPr sz="850" b="1">
-                <a:solidFill>
-                  <a:srgbClr val="FFFFFF"/>
-                </a:solidFill>
-              </a:rPr>
-              <a:t>达标</a:t>
-            </a:r>
-          </a:p>
-        </p:txBody>
-      </p:sp>
-      <p:sp>
-        <p:nvSpPr>
-          <p:cNvPr id="18" name="TextBox 17"/>
-          <p:cNvSpPr txBox="1"/>
-          <p:nvPr/>
-        </p:nvSpPr>
-        <p:spPr>
-          <a:xfrm>
-            <a:off x="932688" y="1901952"/>
-            <a:ext cx="10671047" cy="514350"/>
-          </a:xfrm>
-          <a:prstGeom prst="rect">
-            <a:avLst/>
-          </a:prstGeom>
-          <a:noFill/>
-        </p:spPr>
-        <p:txBody>
-          <a:bodyPr wrap="square" anchor="t" lIns="0" rIns="0" tIns="0" bIns="0">
-            <a:spAutoFit/>
-          </a:bodyPr>
-          <a:lstStyle/>
-          <a:p>
-            <a:pPr algn="l">
-              <a:lnSpc>
-                <a:spcPct val="114000"/>
-              </a:lnSpc>
-            </a:pPr>
-            <a:r>
-              <a:rPr sz="950" b="0">
-                <a:solidFill>
-                  <a:srgbClr val="1B2B28"/>
-                </a:solidFill>
-              </a:rPr>
-              <a:t>3/3 源各有成功读数｜默认链路采集率 97.22%（工单线 &gt;95.00%）｜重连上限抬到 4 次的零丢弃链路: 成功 36 丢弃 0｜成功+丢弃=计划恒等 通过｜docs/ 有效过程文档 8 篇（≥8 且每篇 &gt;200B）</a:t>
-            </a:r>
-          </a:p>
-        </p:txBody>
-      </p:sp>
-      <p:sp>
-        <p:nvSpPr>
-          <p:cNvPr id="19" name="Rounded Rectangle 18"/>
-          <p:cNvSpPr/>
-          <p:nvPr/>
-        </p:nvSpPr>
-        <p:spPr>
-          <a:xfrm>
-            <a:off x="475488" y="2535174"/>
-            <a:ext cx="11237976" cy="916686"/>
-          </a:xfrm>
-          <a:prstGeom prst="roundRect">
-            <a:avLst>
-              <a:gd name="adj" fmla="val 6000"/>
-            </a:avLst>
-          </a:prstGeom>
-          <a:solidFill>
-            <a:srgbClr val="FFFFFF"/>
-          </a:solidFill>
-          <a:ln w="9525">
-            <a:solidFill>
-              <a:srgbClr val="E4F1EE"/>
-            </a:solidFill>
-          </a:ln>
-          <a:effectLst/>
-        </p:spPr>
-        <p:style>
-          <a:lnRef idx="1">
-            <a:schemeClr val="accent1"/>
-          </a:lnRef>
-          <a:fillRef idx="3">
-            <a:schemeClr val="accent1"/>
-          </a:fillRef>
-          <a:effectRef idx="2">
-            <a:schemeClr val="accent1"/>
-          </a:effectRef>
-          <a:fontRef idx="minor">
-            <a:schemeClr val="lt1"/>
-          </a:fontRef>
-        </p:style>
-        <p:txBody>
-          <a:bodyPr rtlCol="0" anchor="ctr"/>
-          <a:lstStyle/>
-          <a:p>
-            <a:pPr algn="ctr"/>
-          </a:p>
-        </p:txBody>
-      </p:sp>
-      <p:sp>
-        <p:nvSpPr>
-          <p:cNvPr id="20" name="Rounded Rectangle 19"/>
-          <p:cNvSpPr/>
-          <p:nvPr/>
-        </p:nvSpPr>
-        <p:spPr>
-          <a:xfrm>
-            <a:off x="475488" y="2535174"/>
-            <a:ext cx="54864" cy="916686"/>
-          </a:xfrm>
-          <a:prstGeom prst="roundRect">
-            <a:avLst>
-              <a:gd name="adj" fmla="val 50000"/>
-            </a:avLst>
-          </a:prstGeom>
-          <a:solidFill>
-            <a:srgbClr val="157A6D"/>
-          </a:solidFill>
-          <a:ln>
-            <a:noFill/>
-          </a:ln>
-          <a:effectLst/>
-        </p:spPr>
-        <p:style>
-          <a:lnRef idx="1">
-            <a:schemeClr val="accent1"/>
-          </a:lnRef>
-          <a:fillRef idx="3">
-            <a:schemeClr val="accent1"/>
-          </a:fillRef>
-          <a:effectRef idx="2">
-            <a:schemeClr val="accent1"/>
-          </a:effectRef>
-          <a:fontRef idx="minor">
-            <a:schemeClr val="lt1"/>
-          </a:fontRef>
-        </p:style>
-        <p:txBody>
-          <a:bodyPr rtlCol="0" anchor="ctr"/>
-          <a:lstStyle/>
-          <a:p>
-            <a:pPr algn="ctr"/>
-          </a:p>
-        </p:txBody>
-      </p:sp>
-      <p:sp>
-        <p:nvSpPr>
-          <p:cNvPr id="21" name="Rounded Rectangle 20"/>
-          <p:cNvSpPr/>
-          <p:nvPr/>
-        </p:nvSpPr>
-        <p:spPr>
-          <a:xfrm>
-            <a:off x="621792" y="2617470"/>
-            <a:ext cx="237744" cy="237744"/>
-          </a:xfrm>
-          <a:prstGeom prst="roundRect">
-            <a:avLst>
-              <a:gd name="adj" fmla="val 28000"/>
-            </a:avLst>
-          </a:prstGeom>
-          <a:solidFill>
-            <a:srgbClr val="157A6D"/>
-          </a:solidFill>
-          <a:ln>
-            <a:noFill/>
-          </a:ln>
-          <a:effectLst/>
-        </p:spPr>
-        <p:style>
-          <a:lnRef idx="1">
-            <a:schemeClr val="accent1"/>
-          </a:lnRef>
-          <a:fillRef idx="3">
-            <a:schemeClr val="accent1"/>
-          </a:fillRef>
-          <a:effectRef idx="2">
-            <a:schemeClr val="accent1"/>
-          </a:effectRef>
-          <a:fontRef idx="minor">
-            <a:schemeClr val="lt1"/>
-          </a:fontRef>
-        </p:style>
-        <p:txBody>
-          <a:bodyPr rtlCol="0" anchor="ctr"/>
-          <a:lstStyle/>
-          <a:p>
-            <a:pPr algn="ctr"/>
-          </a:p>
-        </p:txBody>
-      </p:sp>
-      <p:sp>
-        <p:nvSpPr>
-          <p:cNvPr id="22" name="TextBox 21"/>
-          <p:cNvSpPr txBox="1"/>
-          <p:nvPr/>
-        </p:nvSpPr>
-        <p:spPr>
-          <a:xfrm>
-            <a:off x="621792" y="2617470"/>
-            <a:ext cx="237744" cy="237744"/>
-          </a:xfrm>
-          <a:prstGeom prst="rect">
-            <a:avLst/>
-          </a:prstGeom>
-          <a:noFill/>
-        </p:spPr>
-        <p:txBody>
-          <a:bodyPr wrap="square" anchor="ctr" lIns="0" rIns="0" tIns="0" bIns="0">
-            <a:spAutoFit/>
-          </a:bodyPr>
-          <a:lstStyle/>
-          <a:p>
-            <a:pPr algn="ctr">
-              <a:lnSpc>
-                <a:spcPct val="114000"/>
-              </a:lnSpc>
-            </a:pPr>
-            <a:r>
-              <a:rPr sz="1000" b="1">
-                <a:solidFill>
-                  <a:srgbClr val="FFFFFF"/>
-                </a:solidFill>
-              </a:rPr>
-              <a:t>C</a:t>
-            </a:r>
-          </a:p>
-        </p:txBody>
-      </p:sp>
-      <p:sp>
-        <p:nvSpPr>
-          <p:cNvPr id="23" name="TextBox 22"/>
-          <p:cNvSpPr txBox="1"/>
-          <p:nvPr/>
-        </p:nvSpPr>
-        <p:spPr>
-          <a:xfrm>
-            <a:off x="932688" y="2599182"/>
-            <a:ext cx="8778240" cy="274320"/>
-          </a:xfrm>
-          <a:prstGeom prst="rect">
-            <a:avLst/>
-          </a:prstGeom>
-          <a:noFill/>
-        </p:spPr>
-        <p:txBody>
-          <a:bodyPr wrap="square" anchor="ctr" lIns="0" rIns="0" tIns="0" bIns="0">
-            <a:spAutoFit/>
-          </a:bodyPr>
-          <a:lstStyle/>
-          <a:p>
-            <a:pPr algn="l">
-              <a:lnSpc>
-                <a:spcPct val="114000"/>
-              </a:lnSpc>
-            </a:pPr>
-            <a:r>
-              <a:rPr sz="1050" b="1">
-                <a:solidFill>
-                  <a:srgbClr val="1B2B28"/>
-                </a:solidFill>
-              </a:rPr>
-              <a:t>良好</a:t>
-            </a:r>
-            <a:r>
-              <a:rPr sz="850" b="0">
-                <a:solidFill>
-                  <a:srgbClr val="5C6E6A"/>
-                </a:solidFill>
-              </a:rPr>
-              <a:t>   验收口径：</a:t>
-            </a:r>
-            <a:r>
-              <a:rPr sz="850" b="0">
-                <a:solidFill>
-                  <a:srgbClr val="5C6E6A"/>
-                </a:solidFill>
-              </a:rPr>
-              <a:t>断线重连实测通过；统计输出准确</a:t>
-            </a:r>
-          </a:p>
-        </p:txBody>
-      </p:sp>
-      <p:sp>
-        <p:nvSpPr>
-          <p:cNvPr id="24" name="Rounded Rectangle 23"/>
-          <p:cNvSpPr/>
-          <p:nvPr/>
-        </p:nvSpPr>
-        <p:spPr>
-          <a:xfrm>
-            <a:off x="11131803" y="2626614"/>
-            <a:ext cx="453644" cy="237744"/>
-          </a:xfrm>
-          <a:prstGeom prst="roundRect">
-            <a:avLst>
-              <a:gd name="adj" fmla="val 50000"/>
-            </a:avLst>
-          </a:prstGeom>
-          <a:solidFill>
-            <a:srgbClr val="0B5E54"/>
-          </a:solidFill>
-          <a:ln>
-            <a:noFill/>
-          </a:ln>
-          <a:effectLst/>
-        </p:spPr>
-        <p:style>
-          <a:lnRef idx="1">
-            <a:schemeClr val="accent1"/>
-          </a:lnRef>
-          <a:fillRef idx="3">
-            <a:schemeClr val="accent1"/>
-          </a:fillRef>
-          <a:effectRef idx="2">
-            <a:schemeClr val="accent1"/>
-          </a:effectRef>
-          <a:fontRef idx="minor">
-            <a:schemeClr val="lt1"/>
-          </a:fontRef>
-        </p:style>
-        <p:txBody>
-          <a:bodyPr rtlCol="0" anchor="ctr"/>
-          <a:lstStyle/>
-          <a:p>
-            <a:pPr algn="ctr"/>
-          </a:p>
-        </p:txBody>
-      </p:sp>
-      <p:sp>
-        <p:nvSpPr>
-          <p:cNvPr id="25" name="TextBox 24"/>
-          <p:cNvSpPr txBox="1"/>
-          <p:nvPr/>
-        </p:nvSpPr>
-        <p:spPr>
-          <a:xfrm>
-            <a:off x="11131803" y="2626614"/>
-            <a:ext cx="453644" cy="237744"/>
-          </a:xfrm>
-          <a:prstGeom prst="rect">
-            <a:avLst/>
-          </a:prstGeom>
-          <a:noFill/>
-        </p:spPr>
-        <p:txBody>
-          <a:bodyPr wrap="square" anchor="ctr" lIns="0" rIns="0" tIns="0" bIns="0">
-            <a:spAutoFit/>
-          </a:bodyPr>
-          <a:lstStyle/>
-          <a:p>
-            <a:pPr algn="ctr">
-              <a:lnSpc>
-                <a:spcPct val="114000"/>
-              </a:lnSpc>
-            </a:pPr>
-            <a:r>
-              <a:rPr sz="850" b="1">
-                <a:solidFill>
-                  <a:srgbClr val="FFFFFF"/>
-                </a:solidFill>
-              </a:rPr>
-              <a:t>达标</a:t>
-            </a:r>
-          </a:p>
-        </p:txBody>
-      </p:sp>
-      <p:sp>
-        <p:nvSpPr>
-          <p:cNvPr id="26" name="TextBox 25"/>
-          <p:cNvSpPr txBox="1"/>
-          <p:nvPr/>
-        </p:nvSpPr>
-        <p:spPr>
-          <a:xfrm>
-            <a:off x="932688" y="2882646"/>
-            <a:ext cx="10671047" cy="514350"/>
-          </a:xfrm>
-          <a:prstGeom prst="rect">
-            <a:avLst/>
-          </a:prstGeom>
-          <a:noFill/>
-        </p:spPr>
-        <p:txBody>
-          <a:bodyPr wrap="square" anchor="t" lIns="0" rIns="0" tIns="0" bIns="0">
-            <a:spAutoFit/>
-          </a:bodyPr>
-          <a:lstStyle/>
-          <a:p>
-            <a:pPr algn="l">
-              <a:lnSpc>
-                <a:spcPct val="114000"/>
-              </a:lnSpc>
-            </a:pPr>
-            <a:r>
-              <a:rPr sz="950" b="0">
-                <a:solidFill>
-                  <a:srgbClr val="1B2B28"/>
-                </a:solidFill>
-              </a:rPr>
-              <a:t>同一份故障注入下不重连丢 3 条 → 重连丢 1 条（重连 7 次、挽回 2 条）｜分源计划之和 36 = 总计划 36｜计数自洽（调用=成功+丢弃+重试）通过</a:t>
-            </a:r>
-          </a:p>
-        </p:txBody>
-      </p:sp>
-      <p:sp>
-        <p:nvSpPr>
-          <p:cNvPr id="27" name="Rounded Rectangle 26"/>
-          <p:cNvSpPr/>
-          <p:nvPr/>
-        </p:nvSpPr>
-        <p:spPr>
-          <a:xfrm>
-            <a:off x="475488" y="3515868"/>
-            <a:ext cx="11237976" cy="916686"/>
-          </a:xfrm>
-          <a:prstGeom prst="roundRect">
-            <a:avLst>
-              <a:gd name="adj" fmla="val 6000"/>
-            </a:avLst>
-          </a:prstGeom>
-          <a:solidFill>
-            <a:srgbClr val="FFFFFF"/>
-          </a:solidFill>
-          <a:ln w="9525">
-            <a:solidFill>
-              <a:srgbClr val="E4F1EE"/>
-            </a:solidFill>
-          </a:ln>
-          <a:effectLst/>
-        </p:spPr>
-        <p:style>
-          <a:lnRef idx="1">
-            <a:schemeClr val="accent1"/>
-          </a:lnRef>
-          <a:fillRef idx="3">
-            <a:schemeClr val="accent1"/>
-          </a:fillRef>
-          <a:effectRef idx="2">
-            <a:schemeClr val="accent1"/>
-          </a:effectRef>
-          <a:fontRef idx="minor">
-            <a:schemeClr val="lt1"/>
-          </a:fontRef>
-        </p:style>
-        <p:txBody>
-          <a:bodyPr rtlCol="0" anchor="ctr"/>
-          <a:lstStyle/>
-          <a:p>
-            <a:pPr algn="ctr"/>
-          </a:p>
-        </p:txBody>
-      </p:sp>
-      <p:sp>
-        <p:nvSpPr>
-          <p:cNvPr id="28" name="Rounded Rectangle 27"/>
-          <p:cNvSpPr/>
-          <p:nvPr/>
-        </p:nvSpPr>
-        <p:spPr>
-          <a:xfrm>
-            <a:off x="475488" y="3515868"/>
-            <a:ext cx="54864" cy="916686"/>
-          </a:xfrm>
-          <a:prstGeom prst="roundRect">
-            <a:avLst>
-              <a:gd name="adj" fmla="val 50000"/>
-            </a:avLst>
-          </a:prstGeom>
-          <a:solidFill>
-            <a:srgbClr val="0B5E54"/>
-          </a:solidFill>
-          <a:ln>
-            <a:noFill/>
-          </a:ln>
-          <a:effectLst/>
-        </p:spPr>
-        <p:style>
-          <a:lnRef idx="1">
-            <a:schemeClr val="accent1"/>
-          </a:lnRef>
-          <a:fillRef idx="3">
-            <a:schemeClr val="accent1"/>
-          </a:fillRef>
-          <a:effectRef idx="2">
-            <a:schemeClr val="accent1"/>
-          </a:effectRef>
-          <a:fontRef idx="minor">
-            <a:schemeClr val="lt1"/>
-          </a:fontRef>
-        </p:style>
-        <p:txBody>
-          <a:bodyPr rtlCol="0" anchor="ctr"/>
-          <a:lstStyle/>
-          <a:p>
-            <a:pPr algn="ctr"/>
-          </a:p>
-        </p:txBody>
-      </p:sp>
-      <p:sp>
-        <p:nvSpPr>
-          <p:cNvPr id="29" name="Rounded Rectangle 28"/>
-          <p:cNvSpPr/>
-          <p:nvPr/>
-        </p:nvSpPr>
-        <p:spPr>
-          <a:xfrm>
-            <a:off x="621792" y="3598163"/>
-            <a:ext cx="237744" cy="237744"/>
-          </a:xfrm>
-          <a:prstGeom prst="roundRect">
-            <a:avLst>
-              <a:gd name="adj" fmla="val 28000"/>
-            </a:avLst>
-          </a:prstGeom>
-          <a:solidFill>
-            <a:srgbClr val="0B5E54"/>
-          </a:solidFill>
-          <a:ln>
-            <a:noFill/>
-          </a:ln>
-          <a:effectLst/>
-        </p:spPr>
-        <p:style>
-          <a:lnRef idx="1">
-            <a:schemeClr val="accent1"/>
-          </a:lnRef>
-          <a:fillRef idx="3">
-            <a:schemeClr val="accent1"/>
-          </a:fillRef>
-          <a:effectRef idx="2">
-            <a:schemeClr val="accent1"/>
-          </a:effectRef>
-          <a:fontRef idx="minor">
-            <a:schemeClr val="lt1"/>
-          </a:fontRef>
-        </p:style>
-        <p:txBody>
-          <a:bodyPr rtlCol="0" anchor="ctr"/>
-          <a:lstStyle/>
-          <a:p>
-            <a:pPr algn="ctr"/>
-          </a:p>
-        </p:txBody>
-      </p:sp>
-      <p:sp>
-        <p:nvSpPr>
-          <p:cNvPr id="30" name="TextBox 29"/>
-          <p:cNvSpPr txBox="1"/>
-          <p:nvPr/>
-        </p:nvSpPr>
-        <p:spPr>
-          <a:xfrm>
-            <a:off x="621792" y="3598163"/>
-            <a:ext cx="237744" cy="237744"/>
-          </a:xfrm>
-          <a:prstGeom prst="rect">
-            <a:avLst/>
-          </a:prstGeom>
-          <a:noFill/>
-        </p:spPr>
-        <p:txBody>
-          <a:bodyPr wrap="square" anchor="ctr" lIns="0" rIns="0" tIns="0" bIns="0">
-            <a:spAutoFit/>
-          </a:bodyPr>
-          <a:lstStyle/>
-          <a:p>
-            <a:pPr algn="ctr">
-              <a:lnSpc>
-                <a:spcPct val="114000"/>
-              </a:lnSpc>
-            </a:pPr>
-            <a:r>
-              <a:rPr sz="1000" b="1">
-                <a:solidFill>
-                  <a:srgbClr val="FFFFFF"/>
-                </a:solidFill>
-              </a:rPr>
-              <a:t>B</a:t>
-            </a:r>
-          </a:p>
-        </p:txBody>
-      </p:sp>
-      <p:sp>
-        <p:nvSpPr>
-          <p:cNvPr id="31" name="TextBox 30"/>
-          <p:cNvSpPr txBox="1"/>
-          <p:nvPr/>
-        </p:nvSpPr>
-        <p:spPr>
-          <a:xfrm>
-            <a:off x="932688" y="3579875"/>
-            <a:ext cx="8778240" cy="274320"/>
-          </a:xfrm>
-          <a:prstGeom prst="rect">
-            <a:avLst/>
-          </a:prstGeom>
-          <a:noFill/>
-        </p:spPr>
-        <p:txBody>
-          <a:bodyPr wrap="square" anchor="ctr" lIns="0" rIns="0" tIns="0" bIns="0">
-            <a:spAutoFit/>
-          </a:bodyPr>
-          <a:lstStyle/>
-          <a:p>
-            <a:pPr algn="l">
-              <a:lnSpc>
-                <a:spcPct val="114000"/>
-              </a:lnSpc>
-            </a:pPr>
-            <a:r>
-              <a:rPr sz="1050" b="1">
-                <a:solidFill>
-                  <a:srgbClr val="1B2B28"/>
-                </a:solidFill>
-              </a:rPr>
-              <a:t>优秀</a:t>
-            </a:r>
-            <a:r>
-              <a:rPr sz="850" b="0">
-                <a:solidFill>
-                  <a:srgbClr val="5C6E6A"/>
-                </a:solidFill>
-              </a:rPr>
-              <a:t>   验收口径：</a:t>
-            </a:r>
-            <a:r>
-              <a:rPr sz="850" b="0">
-                <a:solidFill>
-                  <a:srgbClr val="5C6E6A"/>
-                </a:solidFill>
-              </a:rPr>
-              <a:t>采集率≥99.5%；延迟&lt;100ms；线程安全(无共享可变状态)</a:t>
-            </a:r>
-          </a:p>
-        </p:txBody>
-      </p:sp>
-      <p:sp>
-        <p:nvSpPr>
-          <p:cNvPr id="32" name="Rounded Rectangle 31"/>
-          <p:cNvSpPr/>
-          <p:nvPr/>
-        </p:nvSpPr>
-        <p:spPr>
-          <a:xfrm>
-            <a:off x="11131803" y="3607308"/>
-            <a:ext cx="453644" cy="237744"/>
-          </a:xfrm>
-          <a:prstGeom prst="roundRect">
-            <a:avLst>
-              <a:gd name="adj" fmla="val 50000"/>
-            </a:avLst>
-          </a:prstGeom>
-          <a:solidFill>
-            <a:srgbClr val="0B5E54"/>
-          </a:solidFill>
-          <a:ln>
-            <a:noFill/>
-          </a:ln>
-          <a:effectLst/>
-        </p:spPr>
-        <p:style>
-          <a:lnRef idx="1">
-            <a:schemeClr val="accent1"/>
-          </a:lnRef>
-          <a:fillRef idx="3">
-            <a:schemeClr val="accent1"/>
-          </a:fillRef>
-          <a:effectRef idx="2">
-            <a:schemeClr val="accent1"/>
-          </a:effectRef>
-          <a:fontRef idx="minor">
-            <a:schemeClr val="lt1"/>
-          </a:fontRef>
-        </p:style>
-        <p:txBody>
-          <a:bodyPr rtlCol="0" anchor="ctr"/>
-          <a:lstStyle/>
-          <a:p>
-            <a:pPr algn="ctr"/>
-          </a:p>
-        </p:txBody>
-      </p:sp>
-      <p:sp>
-        <p:nvSpPr>
-          <p:cNvPr id="33" name="TextBox 32"/>
-          <p:cNvSpPr txBox="1"/>
-          <p:nvPr/>
-        </p:nvSpPr>
-        <p:spPr>
-          <a:xfrm>
-            <a:off x="11131803" y="3607308"/>
-            <a:ext cx="453644" cy="237744"/>
-          </a:xfrm>
-          <a:prstGeom prst="rect">
-            <a:avLst/>
-          </a:prstGeom>
-          <a:noFill/>
-        </p:spPr>
-        <p:txBody>
-          <a:bodyPr wrap="square" anchor="ctr" lIns="0" rIns="0" tIns="0" bIns="0">
-            <a:spAutoFit/>
-          </a:bodyPr>
-          <a:lstStyle/>
-          <a:p>
-            <a:pPr algn="ctr">
-              <a:lnSpc>
-                <a:spcPct val="114000"/>
-              </a:lnSpc>
-            </a:pPr>
-            <a:r>
-              <a:rPr sz="850" b="1">
-                <a:solidFill>
-                  <a:srgbClr val="FFFFFF"/>
-                </a:solidFill>
-              </a:rPr>
-              <a:t>达标</a:t>
-            </a:r>
-          </a:p>
-        </p:txBody>
-      </p:sp>
-      <p:sp>
-        <p:nvSpPr>
-          <p:cNvPr id="34" name="TextBox 33"/>
-          <p:cNvSpPr txBox="1"/>
-          <p:nvPr/>
-        </p:nvSpPr>
-        <p:spPr>
-          <a:xfrm>
-            <a:off x="932688" y="3863339"/>
-            <a:ext cx="10671047" cy="514350"/>
-          </a:xfrm>
-          <a:prstGeom prst="rect">
-            <a:avLst/>
-          </a:prstGeom>
-          <a:noFill/>
-        </p:spPr>
-        <p:txBody>
-          <a:bodyPr wrap="square" anchor="t" lIns="0" rIns="0" tIns="0" bIns="0">
-            <a:spAutoFit/>
-          </a:bodyPr>
-          <a:lstStyle/>
-          <a:p>
-            <a:pPr algn="l">
-              <a:lnSpc>
-                <a:spcPct val="114000"/>
-              </a:lnSpc>
-            </a:pPr>
-            <a:r>
-              <a:rPr sz="950" b="0">
-                <a:solidFill>
-                  <a:srgbClr val="1B2B28"/>
-                </a:solidFill>
-              </a:rPr>
-              <a:t>取重连最多的零丢弃链路（最保守）采集率 100.00% ≥ 99.50%｜平均延迟 22.28ms/条 &lt; 100.00ms｜AST 扫描 core.py 模块级可变全局 0 个（无跨线程共享的可变对象）</a:t>
-            </a:r>
-          </a:p>
-        </p:txBody>
-      </p:sp>
-      <p:sp>
-        <p:nvSpPr>
-          <p:cNvPr id="35" name="Rounded Rectangle 34"/>
-          <p:cNvSpPr/>
-          <p:nvPr/>
-        </p:nvSpPr>
-        <p:spPr>
-          <a:xfrm>
-            <a:off x="475488" y="4496562"/>
-            <a:ext cx="11237976" cy="916686"/>
-          </a:xfrm>
-          <a:prstGeom prst="roundRect">
-            <a:avLst>
-              <a:gd name="adj" fmla="val 6000"/>
-            </a:avLst>
-          </a:prstGeom>
-          <a:solidFill>
-            <a:srgbClr val="FFFFFF"/>
-          </a:solidFill>
-          <a:ln w="9525">
-            <a:solidFill>
-              <a:srgbClr val="E4F1EE"/>
-            </a:solidFill>
-          </a:ln>
-          <a:effectLst/>
-        </p:spPr>
-        <p:style>
-          <a:lnRef idx="1">
-            <a:schemeClr val="accent1"/>
-          </a:lnRef>
-          <a:fillRef idx="3">
-            <a:schemeClr val="accent1"/>
-          </a:fillRef>
-          <a:effectRef idx="2">
-            <a:schemeClr val="accent1"/>
-          </a:effectRef>
-          <a:fontRef idx="minor">
-            <a:schemeClr val="lt1"/>
-          </a:fontRef>
-        </p:style>
-        <p:txBody>
-          <a:bodyPr rtlCol="0" anchor="ctr"/>
-          <a:lstStyle/>
-          <a:p>
-            <a:pPr algn="ctr"/>
-          </a:p>
-        </p:txBody>
-      </p:sp>
-      <p:sp>
-        <p:nvSpPr>
-          <p:cNvPr id="36" name="Rounded Rectangle 35"/>
-          <p:cNvSpPr/>
-          <p:nvPr/>
-        </p:nvSpPr>
-        <p:spPr>
-          <a:xfrm>
-            <a:off x="475488" y="4496562"/>
-            <a:ext cx="54864" cy="916686"/>
-          </a:xfrm>
-          <a:prstGeom prst="roundRect">
-            <a:avLst>
-              <a:gd name="adj" fmla="val 50000"/>
-            </a:avLst>
-          </a:prstGeom>
-          <a:solidFill>
-            <a:srgbClr val="C9A227"/>
-          </a:solidFill>
-          <a:ln>
-            <a:noFill/>
-          </a:ln>
-          <a:effectLst/>
-        </p:spPr>
-        <p:style>
-          <a:lnRef idx="1">
-            <a:schemeClr val="accent1"/>
-          </a:lnRef>
-          <a:fillRef idx="3">
-            <a:schemeClr val="accent1"/>
-          </a:fillRef>
-          <a:effectRef idx="2">
-            <a:schemeClr val="accent1"/>
-          </a:effectRef>
-          <a:fontRef idx="minor">
-            <a:schemeClr val="lt1"/>
-          </a:fontRef>
-        </p:style>
-        <p:txBody>
-          <a:bodyPr rtlCol="0" anchor="ctr"/>
-          <a:lstStyle/>
-          <a:p>
-            <a:pPr algn="ctr"/>
-          </a:p>
-        </p:txBody>
-      </p:sp>
-      <p:sp>
-        <p:nvSpPr>
-          <p:cNvPr id="37" name="Rounded Rectangle 36"/>
-          <p:cNvSpPr/>
-          <p:nvPr/>
-        </p:nvSpPr>
-        <p:spPr>
-          <a:xfrm>
-            <a:off x="621792" y="4578857"/>
-            <a:ext cx="237744" cy="237744"/>
-          </a:xfrm>
-          <a:prstGeom prst="roundRect">
-            <a:avLst>
-              <a:gd name="adj" fmla="val 28000"/>
-            </a:avLst>
-          </a:prstGeom>
-          <a:solidFill>
-            <a:srgbClr val="C9A227"/>
-          </a:solidFill>
-          <a:ln>
-            <a:noFill/>
-          </a:ln>
-          <a:effectLst/>
-        </p:spPr>
-        <p:style>
-          <a:lnRef idx="1">
-            <a:schemeClr val="accent1"/>
-          </a:lnRef>
-          <a:fillRef idx="3">
-            <a:schemeClr val="accent1"/>
-          </a:fillRef>
-          <a:effectRef idx="2">
-            <a:schemeClr val="accent1"/>
-          </a:effectRef>
-          <a:fontRef idx="minor">
-            <a:schemeClr val="lt1"/>
-          </a:fontRef>
-        </p:style>
-        <p:txBody>
-          <a:bodyPr rtlCol="0" anchor="ctr"/>
-          <a:lstStyle/>
-          <a:p>
-            <a:pPr algn="ctr"/>
-          </a:p>
-        </p:txBody>
-      </p:sp>
-      <p:sp>
-        <p:nvSpPr>
-          <p:cNvPr id="38" name="TextBox 37"/>
-          <p:cNvSpPr txBox="1"/>
-          <p:nvPr/>
-        </p:nvSpPr>
-        <p:spPr>
-          <a:xfrm>
-            <a:off x="621792" y="4578857"/>
-            <a:ext cx="237744" cy="237744"/>
-          </a:xfrm>
-          <a:prstGeom prst="rect">
-            <a:avLst/>
-          </a:prstGeom>
-          <a:noFill/>
-        </p:spPr>
-        <p:txBody>
-          <a:bodyPr wrap="square" anchor="ctr" lIns="0" rIns="0" tIns="0" bIns="0">
-            <a:spAutoFit/>
-          </a:bodyPr>
-          <a:lstStyle/>
-          <a:p>
-            <a:pPr algn="ctr">
-              <a:lnSpc>
-                <a:spcPct val="114000"/>
-              </a:lnSpc>
-            </a:pPr>
-            <a:r>
-              <a:rPr sz="1000" b="1">
-                <a:solidFill>
-                  <a:srgbClr val="FFFFFF"/>
-                </a:solidFill>
-              </a:rPr>
-              <a:t>A</a:t>
-            </a:r>
-          </a:p>
-        </p:txBody>
-      </p:sp>
-      <p:sp>
-        <p:nvSpPr>
-          <p:cNvPr id="39" name="TextBox 38"/>
-          <p:cNvSpPr txBox="1"/>
-          <p:nvPr/>
-        </p:nvSpPr>
-        <p:spPr>
-          <a:xfrm>
-            <a:off x="932688" y="4560570"/>
-            <a:ext cx="8778240" cy="274320"/>
-          </a:xfrm>
-          <a:prstGeom prst="rect">
-            <a:avLst/>
-          </a:prstGeom>
-          <a:noFill/>
-        </p:spPr>
-        <p:txBody>
-          <a:bodyPr wrap="square" anchor="ctr" lIns="0" rIns="0" tIns="0" bIns="0">
-            <a:spAutoFit/>
-          </a:bodyPr>
-          <a:lstStyle/>
-          <a:p>
-            <a:pPr algn="l">
-              <a:lnSpc>
-                <a:spcPct val="114000"/>
-              </a:lnSpc>
-            </a:pPr>
-            <a:r>
-              <a:rPr sz="1050" b="1">
-                <a:solidFill>
-                  <a:srgbClr val="1B2B28"/>
-                </a:solidFill>
-              </a:rPr>
-              <a:t>超优</a:t>
-            </a:r>
-            <a:r>
-              <a:rPr sz="850" b="0">
-                <a:solidFill>
-                  <a:srgbClr val="5C6E6A"/>
-                </a:solidFill>
-              </a:rPr>
-              <a:t>   验收口径：</a:t>
-            </a:r>
-            <a:r>
-              <a:rPr sz="850" b="0">
-                <a:solidFill>
-                  <a:srgbClr val="5C6E6A"/>
-                </a:solidFill>
-              </a:rPr>
-              <a:t>优秀+故障自动转移/主从切换或性能监控小面板</a:t>
-            </a:r>
-          </a:p>
-        </p:txBody>
-      </p:sp>
-      <p:sp>
-        <p:nvSpPr>
-          <p:cNvPr id="40" name="Rounded Rectangle 39"/>
-          <p:cNvSpPr/>
-          <p:nvPr/>
-        </p:nvSpPr>
-        <p:spPr>
-          <a:xfrm>
-            <a:off x="11131803" y="4588001"/>
-            <a:ext cx="453644" cy="237744"/>
-          </a:xfrm>
-          <a:prstGeom prst="roundRect">
-            <a:avLst>
-              <a:gd name="adj" fmla="val 50000"/>
-            </a:avLst>
-          </a:prstGeom>
-          <a:solidFill>
-            <a:srgbClr val="0B5E54"/>
-          </a:solidFill>
-          <a:ln>
-            <a:noFill/>
-          </a:ln>
-          <a:effectLst/>
-        </p:spPr>
-        <p:style>
-          <a:lnRef idx="1">
-            <a:schemeClr val="accent1"/>
-          </a:lnRef>
-          <a:fillRef idx="3">
-            <a:schemeClr val="accent1"/>
-          </a:fillRef>
-          <a:effectRef idx="2">
-            <a:schemeClr val="accent1"/>
-          </a:effectRef>
-          <a:fontRef idx="minor">
-            <a:schemeClr val="lt1"/>
-          </a:fontRef>
-        </p:style>
-        <p:txBody>
-          <a:bodyPr rtlCol="0" anchor="ctr"/>
-          <a:lstStyle/>
-          <a:p>
-            <a:pPr algn="ctr"/>
-          </a:p>
-        </p:txBody>
-      </p:sp>
-      <p:sp>
-        <p:nvSpPr>
-          <p:cNvPr id="41" name="TextBox 40"/>
-          <p:cNvSpPr txBox="1"/>
-          <p:nvPr/>
-        </p:nvSpPr>
-        <p:spPr>
-          <a:xfrm>
-            <a:off x="11131803" y="4588001"/>
-            <a:ext cx="453644" cy="237744"/>
-          </a:xfrm>
-          <a:prstGeom prst="rect">
-            <a:avLst/>
-          </a:prstGeom>
-          <a:noFill/>
-        </p:spPr>
-        <p:txBody>
-          <a:bodyPr wrap="square" anchor="ctr" lIns="0" rIns="0" tIns="0" bIns="0">
-            <a:spAutoFit/>
-          </a:bodyPr>
-          <a:lstStyle/>
-          <a:p>
-            <a:pPr algn="ctr">
-              <a:lnSpc>
-                <a:spcPct val="114000"/>
-              </a:lnSpc>
-            </a:pPr>
-            <a:r>
-              <a:rPr sz="850" b="1">
-                <a:solidFill>
-                  <a:srgbClr val="FFFFFF"/>
-                </a:solidFill>
-              </a:rPr>
-              <a:t>达标</a:t>
-            </a:r>
-          </a:p>
-        </p:txBody>
-      </p:sp>
-      <p:sp>
-        <p:nvSpPr>
-          <p:cNvPr id="42" name="TextBox 41"/>
-          <p:cNvSpPr txBox="1"/>
-          <p:nvPr/>
-        </p:nvSpPr>
-        <p:spPr>
-          <a:xfrm>
-            <a:off x="932688" y="4844033"/>
-            <a:ext cx="10671047" cy="514350"/>
-          </a:xfrm>
-          <a:prstGeom prst="rect">
-            <a:avLst/>
-          </a:prstGeom>
-          <a:noFill/>
-        </p:spPr>
-        <p:txBody>
-          <a:bodyPr wrap="square" anchor="t" lIns="0" rIns="0" tIns="0" bIns="0">
-            <a:spAutoFit/>
-          </a:bodyPr>
-          <a:lstStyle/>
-          <a:p>
-            <a:pPr algn="l">
-              <a:lnSpc>
-                <a:spcPct val="114000"/>
-              </a:lnSpc>
-            </a:pPr>
-            <a:r>
-              <a:rPr sz="950" b="0">
-                <a:solidFill>
-                  <a:srgbClr val="1B2B28"/>
-                </a:solidFill>
-              </a:rPr>
-              <a:t>三链路对照即监控面板（不重连 / 重连默认 3 次 / 零丢弃 4 次），每条链路的计划-成功-丢弃-重试-调用-延迟六个计数各自自洽 通过</a:t>
-            </a:r>
-          </a:p>
-        </p:txBody>
-      </p:sp>
-      <p:sp>
-        <p:nvSpPr>
-          <p:cNvPr id="43" name="Rounded Rectangle 42"/>
-          <p:cNvSpPr/>
-          <p:nvPr/>
-        </p:nvSpPr>
-        <p:spPr>
-          <a:xfrm>
-            <a:off x="475488" y="5477255"/>
-            <a:ext cx="11237976" cy="941832"/>
-          </a:xfrm>
-          <a:prstGeom prst="roundRect">
-            <a:avLst>
-              <a:gd name="adj" fmla="val 5000"/>
-            </a:avLst>
-          </a:prstGeom>
-          <a:solidFill>
-            <a:srgbClr val="E4F1EE"/>
-          </a:solidFill>
-          <a:ln>
-            <a:noFill/>
-          </a:ln>
-          <a:effectLst/>
-        </p:spPr>
-        <p:style>
-          <a:lnRef idx="1">
-            <a:schemeClr val="accent1"/>
-          </a:lnRef>
-          <a:fillRef idx="3">
-            <a:schemeClr val="accent1"/>
-          </a:fillRef>
-          <a:effectRef idx="2">
-            <a:schemeClr val="accent1"/>
-          </a:effectRef>
-          <a:fontRef idx="minor">
-            <a:schemeClr val="lt1"/>
-          </a:fontRef>
-        </p:style>
-        <p:txBody>
-          <a:bodyPr rtlCol="0" anchor="ctr"/>
-          <a:lstStyle/>
-          <a:p>
-            <a:pPr algn="ctr"/>
-          </a:p>
-        </p:txBody>
-      </p:sp>
-      <p:sp>
-        <p:nvSpPr>
-          <p:cNvPr id="44" name="Rounded Rectangle 43"/>
-          <p:cNvSpPr/>
-          <p:nvPr/>
-        </p:nvSpPr>
-        <p:spPr>
-          <a:xfrm>
-            <a:off x="475488" y="5477255"/>
-            <a:ext cx="54864" cy="941832"/>
-          </a:xfrm>
-          <a:prstGeom prst="roundRect">
-            <a:avLst>
-              <a:gd name="adj" fmla="val 50000"/>
-            </a:avLst>
-          </a:prstGeom>
-          <a:solidFill>
-            <a:srgbClr val="C9A227"/>
-          </a:solidFill>
-          <a:ln>
-            <a:noFill/>
-          </a:ln>
-          <a:effectLst/>
-        </p:spPr>
-        <p:style>
-          <a:lnRef idx="1">
-            <a:schemeClr val="accent1"/>
-          </a:lnRef>
-          <a:fillRef idx="3">
-            <a:schemeClr val="accent1"/>
-          </a:fillRef>
-          <a:effectRef idx="2">
-            <a:schemeClr val="accent1"/>
-          </a:effectRef>
-          <a:fontRef idx="minor">
-            <a:schemeClr val="lt1"/>
-          </a:fontRef>
-        </p:style>
-        <p:txBody>
-          <a:bodyPr rtlCol="0" anchor="ctr"/>
-          <a:lstStyle/>
-          <a:p>
-            <a:pPr algn="ctr"/>
-          </a:p>
-        </p:txBody>
-      </p:sp>
-      <p:sp>
-        <p:nvSpPr>
-          <p:cNvPr id="45" name="TextBox 44"/>
-          <p:cNvSpPr txBox="1"/>
-          <p:nvPr/>
-        </p:nvSpPr>
-        <p:spPr>
-          <a:xfrm>
-            <a:off x="676656" y="5550407"/>
-            <a:ext cx="10908792" cy="795528"/>
-          </a:xfrm>
-          <a:prstGeom prst="rect">
-            <a:avLst/>
-          </a:prstGeom>
-          <a:noFill/>
-        </p:spPr>
-        <p:txBody>
-          <a:bodyPr wrap="square" anchor="t" lIns="0" rIns="0" tIns="0" bIns="0">
-            <a:spAutoFit/>
-          </a:bodyPr>
-          <a:lstStyle/>
-          <a:p>
-            <a:pPr algn="l">
-              <a:lnSpc>
-                <a:spcPct val="124000"/>
-              </a:lnSpc>
-            </a:pPr>
-            <a:r>
-              <a:rPr sz="850" b="0">
-                <a:solidFill>
-                  <a:srgbClr val="1B2B28"/>
-                </a:solidFill>
-              </a:rPr>
-              <a:t>出处：工程化项目/p41_collector_hub/output/report.txt 第 36 节「工单验收四档对照」——本机 2026-10-28 05:08 实跑落盘，上表数字逐字摘录、未改写。</a:t>
-            </a:r>
-          </a:p>
-          <a:p>
-            <a:pPr algn="l">
-              <a:lnSpc>
-                <a:spcPct val="124000"/>
-              </a:lnSpc>
-            </a:pPr>
-            <a:r>
-              <a:rPr sz="850" b="0">
-                <a:solidFill>
-                  <a:srgbClr val="1B2B28"/>
-                </a:solidFill>
-              </a:rPr>
-              <a:t>复现：cd 工程化项目/p41_collector_hub &amp;&amp; python run.py &amp;&amp; python -m pytest -q -o addopts=''</a:t>
-            </a:r>
-          </a:p>
-          <a:p>
-            <a:pPr algn="l">
-              <a:lnSpc>
-                <a:spcPct val="124000"/>
-              </a:lnSpc>
-            </a:pPr>
-            <a:r>
-              <a:rPr sz="850" b="0">
-                <a:solidFill>
-                  <a:srgbClr val="1B2B28"/>
-                </a:solidFill>
-              </a:rPr>
-              <a:t>口径：表中「判定」沿用报告原词——绿=达标/通过，黄=仅本节取证项通过（未取证子项在报告里逐条点名），红=未达标。</a:t>
+                <a:latin typeface="微软雅黑"/>
+              </a:rPr>
+              <a:t>12 / 14</a:t>
             </a:r>
           </a:p>
         </p:txBody>
@@ -7014,22 +5962,20 @@
       <p:grpSpPr/>
       <p:sp>
         <p:nvSpPr>
-          <p:cNvPr id="2" name="Rounded Rectangle 1"/>
+          <p:cNvPr id="2" name="Rectangle 1"/>
           <p:cNvSpPr/>
           <p:nvPr/>
         </p:nvSpPr>
         <p:spPr>
           <a:xfrm>
             <a:off x="0" y="0"/>
-            <a:ext cx="12191695" cy="64008"/>
-          </a:xfrm>
-          <a:prstGeom prst="roundRect">
-            <a:avLst>
-              <a:gd name="adj" fmla="val 50000"/>
-            </a:avLst>
+            <a:ext cx="12192000" cy="6858000"/>
+          </a:xfrm>
+          <a:prstGeom prst="rect">
+            <a:avLst/>
           </a:prstGeom>
           <a:solidFill>
-            <a:srgbClr val="0B5E54"/>
+            <a:srgbClr val="010328"/>
           </a:solidFill>
           <a:ln>
             <a:noFill/>
@@ -7060,60 +6006,20 @@
       </p:sp>
       <p:sp>
         <p:nvSpPr>
-          <p:cNvPr id="3" name="TextBox 2"/>
-          <p:cNvSpPr txBox="1"/>
-          <p:nvPr/>
-        </p:nvSpPr>
-        <p:spPr>
-          <a:xfrm>
-            <a:off x="475488" y="146304"/>
-            <a:ext cx="8229600" cy="292608"/>
-          </a:xfrm>
-          <a:prstGeom prst="rect">
-            <a:avLst/>
-          </a:prstGeom>
-          <a:noFill/>
-        </p:spPr>
-        <p:txBody>
-          <a:bodyPr wrap="square" anchor="t" lIns="0" rIns="0" tIns="0" bIns="0">
-            <a:spAutoFit/>
-          </a:bodyPr>
-          <a:lstStyle/>
-          <a:p>
-            <a:pPr algn="l">
-              <a:lnSpc>
-                <a:spcPct val="114000"/>
-              </a:lnSpc>
-            </a:pPr>
-            <a:r>
-              <a:rPr sz="1100" b="1">
-                <a:solidFill>
-                  <a:srgbClr val="0B5E54"/>
-                </a:solidFill>
-              </a:rPr>
-              <a:t>工单实战 · 运行留证</a:t>
-            </a:r>
-          </a:p>
-        </p:txBody>
-      </p:sp>
-      <p:sp>
-        <p:nvSpPr>
-          <p:cNvPr id="4" name="Rounded Rectangle 3"/>
+          <p:cNvPr id="3" name="Rectangle 2"/>
           <p:cNvSpPr/>
           <p:nvPr/>
         </p:nvSpPr>
         <p:spPr>
           <a:xfrm>
-            <a:off x="475488" y="475488"/>
-            <a:ext cx="2027872" cy="310896"/>
-          </a:xfrm>
-          <a:prstGeom prst="roundRect">
-            <a:avLst>
-              <a:gd name="adj" fmla="val 50000"/>
-            </a:avLst>
+            <a:off x="0" y="2880360"/>
+            <a:ext cx="12192000" cy="50000"/>
+          </a:xfrm>
+          <a:prstGeom prst="rect">
+            <a:avLst/>
           </a:prstGeom>
           <a:solidFill>
-            <a:srgbClr val="C9A227"/>
+            <a:srgbClr val="F5670F"/>
           </a:solidFill>
           <a:ln>
             <a:noFill/>
@@ -7144,14 +6050,56 @@
       </p:sp>
       <p:sp>
         <p:nvSpPr>
+          <p:cNvPr id="4" name="TextBox 3"/>
+          <p:cNvSpPr txBox="1"/>
+          <p:nvPr/>
+        </p:nvSpPr>
+        <p:spPr>
+          <a:xfrm>
+            <a:off x="0" y="1645920"/>
+            <a:ext cx="12192000" cy="1500000"/>
+          </a:xfrm>
+          <a:prstGeom prst="rect">
+            <a:avLst/>
+          </a:prstGeom>
+          <a:noFill/>
+        </p:spPr>
+        <p:txBody>
+          <a:bodyPr wrap="square" anchor="t">
+            <a:spAutoFit/>
+          </a:bodyPr>
+          <a:lstStyle/>
+          <a:p>
+            <a:pPr algn="ctr">
+              <a:lnSpc>
+                <a:spcPct val="110000"/>
+              </a:lnSpc>
+              <a:spcAft>
+                <a:spcPts val="600"/>
+              </a:spcAft>
+            </a:pPr>
+            <a:r>
+              <a:rPr sz="5400" b="1">
+                <a:solidFill>
+                  <a:srgbClr val="FFFFFF"/>
+                </a:solidFill>
+                <a:latin typeface="微软雅黑"/>
+              </a:rPr>
+              <a:t>THANKS</a:t>
+            </a:r>
+          </a:p>
+        </p:txBody>
+      </p:sp>
+      <p:sp>
+        <p:nvSpPr>
           <p:cNvPr id="5" name="TextBox 4"/>
           <p:cNvSpPr txBox="1"/>
           <p:nvPr/>
         </p:nvSpPr>
         <p:spPr>
           <a:xfrm>
-            <a:off x="475488" y="475488"/>
-            <a:ext cx="2027872" cy="310896"/>
+            <a:off x="0" y="3429000"/>
+            <a:ext cx="12192000" cy="800000"/>
           </a:xfrm>
           <a:prstGeom prst="rect">
             <a:avLst/>
@@ -7159,23 +6107,27 @@
           <a:noFill/>
         </p:spPr>
         <p:txBody>
-          <a:bodyPr wrap="square" anchor="ctr" lIns="0" rIns="0" tIns="0" bIns="0">
+          <a:bodyPr wrap="square" anchor="t">
             <a:spAutoFit/>
           </a:bodyPr>
           <a:lstStyle/>
           <a:p>
             <a:pPr algn="ctr">
               <a:lnSpc>
-                <a:spcPct val="114000"/>
+                <a:spcPct val="110000"/>
               </a:lnSpc>
+              <a:spcAft>
+                <a:spcPts val="600"/>
+              </a:spcAft>
             </a:pPr>
             <a:r>
-              <a:rPr sz="1050" b="1">
-                <a:solidFill>
-                  <a:srgbClr val="FFFFFF"/>
-                </a:solidFill>
-              </a:rPr>
-              <a:t>SCREENSHOT · 终端逐字截图</a:t>
+              <a:rPr sz="2200" b="1">
+                <a:solidFill>
+                  <a:srgbClr val="F5670F"/>
+                </a:solidFill>
+                <a:latin typeface="微软雅黑"/>
+              </a:rPr>
+              <a:t>感谢聆听 · 动手实践出真知</a:t>
             </a:r>
           </a:p>
         </p:txBody>
@@ -7188,8 +6140,8 @@
         </p:nvSpPr>
         <p:spPr>
           <a:xfrm>
-            <a:off x="475488" y="859536"/>
-            <a:ext cx="11237976" cy="502920"/>
+            <a:off x="0" y="4526280"/>
+            <a:ext cx="12192000" cy="600000"/>
           </a:xfrm>
           <a:prstGeom prst="rect">
             <a:avLst/>
@@ -7197,45 +6149,47 @@
           <a:noFill/>
         </p:spPr>
         <p:txBody>
-          <a:bodyPr wrap="square" anchor="t" lIns="0" rIns="0" tIns="0" bIns="0">
+          <a:bodyPr wrap="square" anchor="t">
             <a:spAutoFit/>
           </a:bodyPr>
           <a:lstStyle/>
           <a:p>
-            <a:pPr algn="l">
+            <a:pPr algn="ctr">
               <a:lnSpc>
-                <a:spcPct val="114000"/>
+                <a:spcPct val="110000"/>
               </a:lnSpc>
+              <a:spcAft>
+                <a:spcPts val="600"/>
+              </a:spcAft>
             </a:pPr>
             <a:r>
-              <a:rPr sz="2200" b="1">
-                <a:solidFill>
-                  <a:srgbClr val="1B2B28"/>
-                </a:solidFill>
-              </a:rPr>
-              <a:t>P4.1 工单验收四档对照 · 四档逐字输出截图</a:t>
-            </a:r>
-          </a:p>
-        </p:txBody>
-      </p:sp>
-      <p:sp>
-        <p:nvSpPr>
-          <p:cNvPr id="7" name="Rounded Rectangle 6"/>
+              <a:rPr sz="1400" b="0">
+                <a:solidFill>
+                  <a:srgbClr val="BBC6E6"/>
+                </a:solidFill>
+                <a:latin typeface="微软雅黑"/>
+              </a:rPr>
+              <a:t>以生为本   |   做中学 · 学中做</a:t>
+            </a:r>
+          </a:p>
+        </p:txBody>
+      </p:sp>
+      <p:sp>
+        <p:nvSpPr>
+          <p:cNvPr id="7" name="Rectangle 6"/>
           <p:cNvSpPr/>
           <p:nvPr/>
         </p:nvSpPr>
         <p:spPr>
           <a:xfrm>
-            <a:off x="475488" y="1389888"/>
-            <a:ext cx="1234440" cy="27432"/>
-          </a:xfrm>
-          <a:prstGeom prst="roundRect">
-            <a:avLst>
-              <a:gd name="adj" fmla="val 50000"/>
-            </a:avLst>
+            <a:off x="500000" y="6500000"/>
+            <a:ext cx="11100000" cy="20000"/>
+          </a:xfrm>
+          <a:prstGeom prst="rect">
+            <a:avLst/>
           </a:prstGeom>
           <a:solidFill>
-            <a:srgbClr val="C9A227"/>
+            <a:srgbClr val="C9D4EE"/>
           </a:solidFill>
           <a:ln>
             <a:noFill/>
@@ -7266,47 +6220,43 @@
       </p:sp>
       <p:sp>
         <p:nvSpPr>
-          <p:cNvPr id="8" name="Rounded Rectangle 7"/>
-          <p:cNvSpPr/>
-          <p:nvPr/>
-        </p:nvSpPr>
-        <p:spPr>
-          <a:xfrm>
-            <a:off x="475488" y="6419088"/>
-            <a:ext cx="11237976" cy="10972"/>
-          </a:xfrm>
-          <a:prstGeom prst="roundRect">
-            <a:avLst>
-              <a:gd name="adj" fmla="val 50000"/>
-            </a:avLst>
-          </a:prstGeom>
-          <a:solidFill>
-            <a:srgbClr val="E4F1EE"/>
-          </a:solidFill>
-          <a:ln>
-            <a:noFill/>
-          </a:ln>
-          <a:effectLst/>
-        </p:spPr>
-        <p:style>
-          <a:lnRef idx="1">
-            <a:schemeClr val="accent1"/>
-          </a:lnRef>
-          <a:fillRef idx="3">
-            <a:schemeClr val="accent1"/>
-          </a:fillRef>
-          <a:effectRef idx="2">
-            <a:schemeClr val="accent1"/>
-          </a:effectRef>
-          <a:fontRef idx="minor">
-            <a:schemeClr val="lt1"/>
-          </a:fontRef>
-        </p:style>
-        <p:txBody>
-          <a:bodyPr rtlCol="0" anchor="ctr"/>
-          <a:lstStyle/>
-          <a:p>
-            <a:pPr algn="ctr"/>
+          <p:cNvPr id="8" name="TextBox 7"/>
+          <p:cNvSpPr txBox="1"/>
+          <p:nvPr/>
+        </p:nvSpPr>
+        <p:spPr>
+          <a:xfrm>
+            <a:off x="500000" y="6540000"/>
+            <a:ext cx="7000000" cy="300000"/>
+          </a:xfrm>
+          <a:prstGeom prst="rect">
+            <a:avLst/>
+          </a:prstGeom>
+          <a:noFill/>
+        </p:spPr>
+        <p:txBody>
+          <a:bodyPr wrap="square" anchor="t">
+            <a:spAutoFit/>
+          </a:bodyPr>
+          <a:lstStyle/>
+          <a:p>
+            <a:pPr algn="l">
+              <a:lnSpc>
+                <a:spcPct val="110000"/>
+              </a:lnSpc>
+              <a:spcAft>
+                <a:spcPts val="600"/>
+              </a:spcAft>
+            </a:pPr>
+            <a:r>
+              <a:rPr sz="1000" b="0">
+                <a:solidFill>
+                  <a:srgbClr val="8A97B5"/>
+                </a:solidFill>
+                <a:latin typeface="微软雅黑"/>
+              </a:rPr>
+              <a:t>两江智造集团 · Python程序设计（项目实战）</a:t>
+            </a:r>
           </a:p>
         </p:txBody>
       </p:sp>
@@ -7318,8 +6268,8 @@
         </p:nvSpPr>
         <p:spPr>
           <a:xfrm>
-            <a:off x="475488" y="6455664"/>
-            <a:ext cx="7315200" cy="292608"/>
+            <a:off x="10600000" y="6540000"/>
+            <a:ext cx="1000000" cy="300000"/>
           </a:xfrm>
           <a:prstGeom prst="rect">
             <a:avLst/>
@@ -7327,161 +6277,27 @@
           <a:noFill/>
         </p:spPr>
         <p:txBody>
-          <a:bodyPr wrap="square" anchor="t" lIns="0" rIns="0" tIns="0" bIns="0">
+          <a:bodyPr wrap="square" anchor="ctr">
             <a:spAutoFit/>
           </a:bodyPr>
           <a:lstStyle/>
           <a:p>
-            <a:pPr algn="l">
-              <a:lnSpc>
-                <a:spcPct val="114000"/>
-              </a:lnSpc>
-            </a:pPr>
-            <a:r>
-              <a:rPr sz="900" b="0">
-                <a:solidFill>
-                  <a:srgbClr val="5C6E6A"/>
-                </a:solidFill>
-              </a:rPr>
-              <a:t>两江智造集团 · Python程序设计（项目实战）</a:t>
-            </a:r>
-          </a:p>
-        </p:txBody>
-      </p:sp>
-      <p:sp>
-        <p:nvSpPr>
-          <p:cNvPr id="10" name="TextBox 9"/>
-          <p:cNvSpPr txBox="1"/>
-          <p:nvPr/>
-        </p:nvSpPr>
-        <p:spPr>
-          <a:xfrm>
-            <a:off x="10597896" y="6537960"/>
-            <a:ext cx="996696" cy="301752"/>
-          </a:xfrm>
-          <a:prstGeom prst="rect">
-            <a:avLst/>
-          </a:prstGeom>
-          <a:noFill/>
-        </p:spPr>
-        <p:txBody>
-          <a:bodyPr wrap="square" anchor="t" lIns="0" rIns="0" tIns="0" bIns="0">
-            <a:spAutoFit/>
-          </a:bodyPr>
-          <a:lstStyle/>
-          <a:p>
             <a:pPr algn="r">
               <a:lnSpc>
-                <a:spcPct val="114000"/>
+                <a:spcPct val="110000"/>
               </a:lnSpc>
+              <a:spcAft>
+                <a:spcPts val="600"/>
+              </a:spcAft>
             </a:pPr>
             <a:r>
               <a:rPr sz="1000" b="0">
                 <a:solidFill>
                   <a:srgbClr val="8A97B5"/>
                 </a:solidFill>
-              </a:rPr>
-              <a:t>10 / 14</a:t>
-            </a:r>
-          </a:p>
-        </p:txBody>
-      </p:sp>
-      <p:sp>
-        <p:nvSpPr>
-          <p:cNvPr id="11" name="TextBox 10"/>
-          <p:cNvSpPr txBox="1"/>
-          <p:nvPr/>
-        </p:nvSpPr>
-        <p:spPr>
-          <a:xfrm>
-            <a:off x="475488" y="1517904"/>
-            <a:ext cx="11237976" cy="237744"/>
-          </a:xfrm>
-          <a:prstGeom prst="rect">
-            <a:avLst/>
-          </a:prstGeom>
-          <a:noFill/>
-        </p:spPr>
-        <p:txBody>
-          <a:bodyPr wrap="square" anchor="t" lIns="0" rIns="0" tIns="0" bIns="0">
-            <a:spAutoFit/>
-          </a:bodyPr>
-          <a:lstStyle/>
-          <a:p>
-            <a:pPr algn="l">
-              <a:lnSpc>
-                <a:spcPct val="114000"/>
-              </a:lnSpc>
-            </a:pPr>
-            <a:r>
-              <a:rPr sz="1000" b="0">
-                <a:solidFill>
-                  <a:srgbClr val="5C6E6A"/>
-                </a:solidFill>
-              </a:rPr>
-              <a:t>终端窗口截图：由 report.txt 本节逐字渲染，未手工改写</a:t>
-            </a:r>
-          </a:p>
-        </p:txBody>
-      </p:sp>
-      <p:pic>
-        <p:nvPicPr>
-          <p:cNvPr id="12" name="Picture 11" descr="p41_collector_hub_workorder.png"/>
-          <p:cNvPicPr>
-            <a:picLocks noChangeAspect="1"/>
-          </p:cNvPicPr>
-          <p:nvPr/>
-        </p:nvPicPr>
-        <p:blipFill>
-          <a:blip r:embed="rId2"/>
-          <a:stretch>
-            <a:fillRect/>
-          </a:stretch>
-        </p:blipFill>
-        <p:spPr>
-          <a:xfrm>
-            <a:off x="475488" y="2048196"/>
-            <a:ext cx="11237976" cy="3337679"/>
-          </a:xfrm>
-          <a:prstGeom prst="rect">
-            <a:avLst/>
-          </a:prstGeom>
-        </p:spPr>
-      </p:pic>
-      <p:sp>
-        <p:nvSpPr>
-          <p:cNvPr id="13" name="TextBox 12"/>
-          <p:cNvSpPr txBox="1"/>
-          <p:nvPr/>
-        </p:nvSpPr>
-        <p:spPr>
-          <a:xfrm>
-            <a:off x="475488" y="5422451"/>
-            <a:ext cx="11237976" cy="256032"/>
-          </a:xfrm>
-          <a:prstGeom prst="rect">
-            <a:avLst/>
-          </a:prstGeom>
-          <a:noFill/>
-        </p:spPr>
-        <p:txBody>
-          <a:bodyPr wrap="square" anchor="t" lIns="0" rIns="0" tIns="0" bIns="0">
-            <a:spAutoFit/>
-          </a:bodyPr>
-          <a:lstStyle/>
-          <a:p>
-            <a:pPr algn="l">
-              <a:lnSpc>
-                <a:spcPct val="114000"/>
-              </a:lnSpc>
-            </a:pPr>
-            <a:r>
-              <a:rPr sz="850" b="0">
-                <a:solidFill>
-                  <a:srgbClr val="5C6E6A"/>
-                </a:solidFill>
-              </a:rPr>
-              <a:t>▲ p41_collector_hub：工单验收四档对照 第 36 行起的四档逐字原文（绿=达标/通过，黄=仅本节取证项，橙=未实测项）</a:t>
+                <a:latin typeface="微软雅黑"/>
+              </a:rPr>
+              <a:t>13 / 14</a:t>
             </a:r>
           </a:p>
         </p:txBody>
@@ -7506,22 +6322,20 @@
       <p:grpSpPr/>
       <p:sp>
         <p:nvSpPr>
-          <p:cNvPr id="2" name="Rounded Rectangle 1"/>
+          <p:cNvPr id="2" name="Rectangle 1"/>
           <p:cNvSpPr/>
           <p:nvPr/>
         </p:nvSpPr>
         <p:spPr>
           <a:xfrm>
             <a:off x="0" y="0"/>
-            <a:ext cx="12191695" cy="64008"/>
-          </a:xfrm>
-          <a:prstGeom prst="roundRect">
-            <a:avLst>
-              <a:gd name="adj" fmla="val 50000"/>
-            </a:avLst>
+            <a:ext cx="12192000" cy="1150000"/>
+          </a:xfrm>
+          <a:prstGeom prst="rect">
+            <a:avLst/>
           </a:prstGeom>
           <a:solidFill>
-            <a:srgbClr val="0B5E54"/>
+            <a:srgbClr val="010328"/>
           </a:solidFill>
           <a:ln>
             <a:noFill/>
@@ -7552,60 +6366,20 @@
       </p:sp>
       <p:sp>
         <p:nvSpPr>
-          <p:cNvPr id="3" name="TextBox 2"/>
-          <p:cNvSpPr txBox="1"/>
-          <p:nvPr/>
-        </p:nvSpPr>
-        <p:spPr>
-          <a:xfrm>
-            <a:off x="475488" y="146304"/>
-            <a:ext cx="8229600" cy="292608"/>
-          </a:xfrm>
-          <a:prstGeom prst="rect">
-            <a:avLst/>
-          </a:prstGeom>
-          <a:noFill/>
-        </p:spPr>
-        <p:txBody>
-          <a:bodyPr wrap="square" anchor="t" lIns="0" rIns="0" tIns="0" bIns="0">
-            <a:spAutoFit/>
-          </a:bodyPr>
-          <a:lstStyle/>
-          <a:p>
-            <a:pPr algn="l">
-              <a:lnSpc>
-                <a:spcPct val="114000"/>
-              </a:lnSpc>
-            </a:pPr>
-            <a:r>
-              <a:rPr sz="1100" b="1">
-                <a:solidFill>
-                  <a:srgbClr val="0B5E54"/>
-                </a:solidFill>
-              </a:rPr>
-              <a:t>工单实战 · 运行留证</a:t>
-            </a:r>
-          </a:p>
-        </p:txBody>
-      </p:sp>
-      <p:sp>
-        <p:nvSpPr>
-          <p:cNvPr id="4" name="Rounded Rectangle 3"/>
+          <p:cNvPr id="3" name="Rectangle 2"/>
           <p:cNvSpPr/>
           <p:nvPr/>
         </p:nvSpPr>
         <p:spPr>
           <a:xfrm>
-            <a:off x="475488" y="475488"/>
-            <a:ext cx="2027872" cy="310896"/>
-          </a:xfrm>
-          <a:prstGeom prst="roundRect">
-            <a:avLst>
-              <a:gd name="adj" fmla="val 50000"/>
-            </a:avLst>
+            <a:off x="0" y="1150000"/>
+            <a:ext cx="2600000" cy="70000"/>
+          </a:xfrm>
+          <a:prstGeom prst="rect">
+            <a:avLst/>
           </a:prstGeom>
           <a:solidFill>
-            <a:srgbClr val="C9A227"/>
+            <a:srgbClr val="F5670F"/>
           </a:solidFill>
           <a:ln>
             <a:noFill/>
@@ -7636,14 +6410,14 @@
       </p:sp>
       <p:sp>
         <p:nvSpPr>
-          <p:cNvPr id="5" name="TextBox 4"/>
+          <p:cNvPr id="4" name="TextBox 3"/>
           <p:cNvSpPr txBox="1"/>
           <p:nvPr/>
         </p:nvSpPr>
         <p:spPr>
           <a:xfrm>
-            <a:off x="475488" y="475488"/>
-            <a:ext cx="2027872" cy="310896"/>
+            <a:off x="700000" y="300000"/>
+            <a:ext cx="10792000" cy="700000"/>
           </a:xfrm>
           <a:prstGeom prst="rect">
             <a:avLst/>
@@ -7651,83 +6425,47 @@
           <a:noFill/>
         </p:spPr>
         <p:txBody>
-          <a:bodyPr wrap="square" anchor="ctr" lIns="0" rIns="0" tIns="0" bIns="0">
+          <a:bodyPr wrap="square" anchor="t">
             <a:spAutoFit/>
           </a:bodyPr>
           <a:lstStyle/>
           <a:p>
-            <a:pPr algn="ctr">
-              <a:lnSpc>
-                <a:spcPct val="114000"/>
-              </a:lnSpc>
-            </a:pPr>
-            <a:r>
-              <a:rPr sz="1050" b="1">
-                <a:solidFill>
-                  <a:srgbClr val="FFFFFF"/>
-                </a:solidFill>
-              </a:rPr>
-              <a:t>SCREENSHOT · 终端逐字截图</a:t>
-            </a:r>
-          </a:p>
-        </p:txBody>
-      </p:sp>
-      <p:sp>
-        <p:nvSpPr>
-          <p:cNvPr id="6" name="TextBox 5"/>
-          <p:cNvSpPr txBox="1"/>
-          <p:nvPr/>
-        </p:nvSpPr>
-        <p:spPr>
-          <a:xfrm>
-            <a:off x="475488" y="859536"/>
-            <a:ext cx="11237976" cy="502920"/>
-          </a:xfrm>
-          <a:prstGeom prst="rect">
-            <a:avLst/>
-          </a:prstGeom>
-          <a:noFill/>
-        </p:spPr>
-        <p:txBody>
-          <a:bodyPr wrap="square" anchor="t" lIns="0" rIns="0" tIns="0" bIns="0">
-            <a:spAutoFit/>
-          </a:bodyPr>
-          <a:lstStyle/>
-          <a:p>
             <a:pPr algn="l">
               <a:lnSpc>
-                <a:spcPct val="114000"/>
+                <a:spcPct val="110000"/>
               </a:lnSpc>
+              <a:spcAft>
+                <a:spcPts val="600"/>
+              </a:spcAft>
             </a:pPr>
             <a:r>
-              <a:rPr sz="2200" b="1">
-                <a:solidFill>
-                  <a:srgbClr val="1B2B28"/>
-                </a:solidFill>
-              </a:rPr>
-              <a:t>P4.1 · 另一套阶梯逐字输出＋pytest 全量实跑</a:t>
-            </a:r>
-          </a:p>
-        </p:txBody>
-      </p:sp>
-      <p:sp>
-        <p:nvSpPr>
-          <p:cNvPr id="7" name="Rounded Rectangle 6"/>
+              <a:rPr sz="2400" b="1">
+                <a:solidFill>
+                  <a:srgbClr val="FFFFFF"/>
+                </a:solidFill>
+                <a:latin typeface="微软雅黑"/>
+              </a:rPr>
+              <a:t>下次课预告（第7周）</a:t>
+            </a:r>
+          </a:p>
+        </p:txBody>
+      </p:sp>
+      <p:sp>
+        <p:nvSpPr>
+          <p:cNvPr id="5" name="Rectangle 4"/>
           <p:cNvSpPr/>
           <p:nvPr/>
         </p:nvSpPr>
         <p:spPr>
           <a:xfrm>
-            <a:off x="475488" y="1389888"/>
-            <a:ext cx="1234440" cy="27432"/>
-          </a:xfrm>
-          <a:prstGeom prst="roundRect">
-            <a:avLst>
-              <a:gd name="adj" fmla="val 50000"/>
-            </a:avLst>
+            <a:off x="760000" y="1900000"/>
+            <a:ext cx="10900000" cy="1600000"/>
+          </a:xfrm>
+          <a:prstGeom prst="rect">
+            <a:avLst/>
           </a:prstGeom>
           <a:solidFill>
-            <a:srgbClr val="C9A227"/>
+            <a:srgbClr val="F3F6FD"/>
           </a:solidFill>
           <a:ln>
             <a:noFill/>
@@ -7758,22 +6496,20 @@
       </p:sp>
       <p:sp>
         <p:nvSpPr>
-          <p:cNvPr id="8" name="Rounded Rectangle 7"/>
+          <p:cNvPr id="6" name="Rectangle 5"/>
           <p:cNvSpPr/>
           <p:nvPr/>
         </p:nvSpPr>
         <p:spPr>
           <a:xfrm>
-            <a:off x="475488" y="6419088"/>
-            <a:ext cx="11237976" cy="10972"/>
-          </a:xfrm>
-          <a:prstGeom prst="roundRect">
-            <a:avLst>
-              <a:gd name="adj" fmla="val 50000"/>
-            </a:avLst>
+            <a:off x="760000" y="1900000"/>
+            <a:ext cx="150000" cy="1600000"/>
+          </a:xfrm>
+          <a:prstGeom prst="rect">
+            <a:avLst/>
           </a:prstGeom>
           <a:solidFill>
-            <a:srgbClr val="E4F1EE"/>
+            <a:srgbClr val="F5670F"/>
           </a:solidFill>
           <a:ln>
             <a:noFill/>
@@ -7804,14 +6540,14 @@
       </p:sp>
       <p:sp>
         <p:nvSpPr>
-          <p:cNvPr id="9" name="TextBox 8"/>
+          <p:cNvPr id="7" name="TextBox 6"/>
           <p:cNvSpPr txBox="1"/>
           <p:nvPr/>
         </p:nvSpPr>
         <p:spPr>
           <a:xfrm>
-            <a:off x="475488" y="6455664"/>
-            <a:ext cx="7315200" cy="292608"/>
+            <a:off x="1020000" y="2050000"/>
+            <a:ext cx="10500000" cy="1400000"/>
           </a:xfrm>
           <a:prstGeom prst="rect">
             <a:avLst/>
@@ -7819,37 +6555,60 @@
           <a:noFill/>
         </p:spPr>
         <p:txBody>
-          <a:bodyPr wrap="square" anchor="t" lIns="0" rIns="0" tIns="0" bIns="0">
+          <a:bodyPr wrap="square" anchor="t">
             <a:spAutoFit/>
           </a:bodyPr>
           <a:lstStyle/>
           <a:p>
             <a:pPr algn="l">
               <a:lnSpc>
-                <a:spcPct val="114000"/>
+                <a:spcPct val="110000"/>
               </a:lnSpc>
+              <a:spcAft>
+                <a:spcPts val="600"/>
+              </a:spcAft>
             </a:pPr>
             <a:r>
-              <a:rPr sz="900" b="0">
-                <a:solidFill>
-                  <a:srgbClr val="5C6E6A"/>
-                </a:solidFill>
-              </a:rPr>
-              <a:t>两江智造集团 · Python程序设计（项目实战）</a:t>
-            </a:r>
-          </a:p>
-        </p:txBody>
-      </p:sp>
-      <p:sp>
-        <p:nvSpPr>
-          <p:cNvPr id="10" name="TextBox 9"/>
+              <a:rPr sz="1700" b="1">
+                <a:solidFill>
+                  <a:srgbClr val="010328"/>
+                </a:solidFill>
+                <a:latin typeface="微软雅黑"/>
+              </a:rPr>
+              <a:t>主题: 四表ER设计与ORM建模——应用：见工单star</a:t>
+            </a:r>
+          </a:p>
+          <a:p>
+            <a:pPr algn="l">
+              <a:lnSpc>
+                <a:spcPct val="110000"/>
+              </a:lnSpc>
+              <a:spcAft>
+                <a:spcPts val="600"/>
+              </a:spcAft>
+            </a:pPr>
+            <a:r>
+              <a:rPr sz="1300" b="0">
+                <a:solidFill>
+                  <a:srgbClr val="44546A"/>
+                </a:solidFill>
+                <a:latin typeface="微软雅黑"/>
+              </a:rPr>
+              <a:t>预习快问: 一对多关系在表结构上如何表达？</a:t>
+            </a:r>
+          </a:p>
+        </p:txBody>
+      </p:sp>
+      <p:sp>
+        <p:nvSpPr>
+          <p:cNvPr id="8" name="TextBox 7"/>
           <p:cNvSpPr txBox="1"/>
           <p:nvPr/>
         </p:nvSpPr>
         <p:spPr>
           <a:xfrm>
-            <a:off x="10597896" y="6537960"/>
-            <a:ext cx="996696" cy="301752"/>
+            <a:off x="760000" y="3900000"/>
+            <a:ext cx="10900000" cy="900000"/>
           </a:xfrm>
           <a:prstGeom prst="rect">
             <a:avLst/>
@@ -7857,37 +6616,78 @@
           <a:noFill/>
         </p:spPr>
         <p:txBody>
-          <a:bodyPr wrap="square" anchor="t" lIns="0" rIns="0" tIns="0" bIns="0">
+          <a:bodyPr wrap="square" anchor="t">
             <a:spAutoFit/>
           </a:bodyPr>
           <a:lstStyle/>
           <a:p>
-            <a:pPr algn="r">
+            <a:pPr algn="l">
               <a:lnSpc>
-                <a:spcPct val="114000"/>
+                <a:spcPct val="110000"/>
               </a:lnSpc>
+              <a:spcAft>
+                <a:spcPts val="600"/>
+              </a:spcAft>
             </a:pPr>
             <a:r>
-              <a:rPr sz="1000" b="0">
-                <a:solidFill>
-                  <a:srgbClr val="8A97B5"/>
-                </a:solidFill>
-              </a:rPr>
-              <a:t>11 / 14</a:t>
-            </a:r>
-          </a:p>
-        </p:txBody>
-      </p:sp>
-      <p:sp>
-        <p:nvSpPr>
-          <p:cNvPr id="11" name="TextBox 10"/>
+              <a:rPr sz="1400" b="1">
+                <a:solidFill>
+                  <a:srgbClr val="0545E8"/>
+                </a:solidFill>
+                <a:latin typeface="微软雅黑"/>
+              </a:rPr>
+              <a:t>课前完成：导学单 + 预习自测 + starter环境自检</a:t>
+            </a:r>
+          </a:p>
+          <a:p>
+            <a:pPr algn="l">
+              <a:lnSpc>
+                <a:spcPct val="110000"/>
+              </a:lnSpc>
+              <a:spcAft>
+                <a:spcPts val="600"/>
+              </a:spcAft>
+            </a:pPr>
+            <a:r>
+              <a:rPr sz="1250" b="0">
+                <a:solidFill>
+                  <a:srgbClr val="44546A"/>
+                </a:solidFill>
+                <a:latin typeface="微软雅黑"/>
+              </a:rPr>
+              <a:t>带着问题来上课——Predict先于Run</a:t>
+            </a:r>
+          </a:p>
+        </p:txBody>
+      </p:sp>
+    </p:spTree>
+  </p:cSld>
+  <p:clrMapOvr>
+    <a:masterClrMapping/>
+  </p:clrMapOvr>
+</p:sld>
+</file>
+
+<file path=ppt/slides/slide15.xml><?xml version="1.0" encoding="utf-8"?>
+<p:sld xmlns:a="http://schemas.openxmlformats.org/drawingml/2006/main" xmlns:p="http://schemas.openxmlformats.org/presentationml/2006/main" xmlns:r="http://schemas.openxmlformats.org/officeDocument/2006/relationships">
+  <p:cSld>
+    <p:spTree>
+      <p:nvGrpSpPr>
+        <p:cNvPr id="1" name=""/>
+        <p:cNvGrpSpPr/>
+        <p:nvPr/>
+      </p:nvGrpSpPr>
+      <p:grpSpPr/>
+      <p:sp>
+        <p:nvSpPr>
+          <p:cNvPr id="2" name="TextBox 1"/>
           <p:cNvSpPr txBox="1"/>
           <p:nvPr/>
         </p:nvSpPr>
         <p:spPr>
           <a:xfrm>
-            <a:off x="475488" y="1517904"/>
-            <a:ext cx="11237976" cy="237744"/>
+            <a:off x="548640" y="320040"/>
+            <a:ext cx="11094720" cy="914400"/>
           </a:xfrm>
           <a:prstGeom prst="rect">
             <a:avLst/>
@@ -7895,61 +6695,28 @@
           <a:noFill/>
         </p:spPr>
         <p:txBody>
-          <a:bodyPr wrap="square" anchor="t" lIns="0" rIns="0" tIns="0" bIns="0">
+          <a:bodyPr wrap="none">
             <a:spAutoFit/>
           </a:bodyPr>
           <a:lstStyle/>
           <a:p>
-            <a:pPr algn="l">
-              <a:lnSpc>
-                <a:spcPct val="114000"/>
-              </a:lnSpc>
-            </a:pPr>
-            <a:r>
-              <a:rPr sz="1000" b="0">
-                <a:solidFill>
-                  <a:srgbClr val="5C6E6A"/>
-                </a:solidFill>
-              </a:rPr>
-              <a:t>上：p41_collector_hub 分层达标逐字输出（见上一页）｜下：pytest 全量实跑（退出码 0，全绿）</a:t>
-            </a:r>
-          </a:p>
-        </p:txBody>
-      </p:sp>
-      <p:pic>
-        <p:nvPicPr>
-          <p:cNvPr id="12" name="Picture 11" descr="p41_collector_hub_classroom.png"/>
-          <p:cNvPicPr>
-            <a:picLocks noChangeAspect="1"/>
-          </p:cNvPicPr>
-          <p:nvPr/>
-        </p:nvPicPr>
-        <p:blipFill>
-          <a:blip r:embed="rId2"/>
-          <a:stretch>
-            <a:fillRect/>
-          </a:stretch>
-        </p:blipFill>
-        <p:spPr>
-          <a:xfrm>
-            <a:off x="1096272" y="1792224"/>
-            <a:ext cx="9996406" cy="2169220"/>
-          </a:xfrm>
-          <a:prstGeom prst="rect">
-            <a:avLst/>
-          </a:prstGeom>
-        </p:spPr>
-      </p:pic>
-      <p:sp>
-        <p:nvSpPr>
-          <p:cNvPr id="13" name="TextBox 12"/>
+            <a:r>
+              <a:rPr sz="3000" b="1"/>
+              <a:t>安全与合规警示（操作前必读）</a:t>
+            </a:r>
+          </a:p>
+        </p:txBody>
+      </p:sp>
+      <p:sp>
+        <p:nvSpPr>
+          <p:cNvPr id="3" name="TextBox 2"/>
           <p:cNvSpPr txBox="1"/>
           <p:nvPr/>
         </p:nvSpPr>
         <p:spPr>
           <a:xfrm>
-            <a:off x="475488" y="3998020"/>
-            <a:ext cx="11237976" cy="256032"/>
+            <a:off x="731520" y="1371600"/>
+            <a:ext cx="10728960" cy="4663440"/>
           </a:xfrm>
           <a:prstGeom prst="rect">
             <a:avLst/>
@@ -7957,61 +6724,101 @@
           <a:noFill/>
         </p:spPr>
         <p:txBody>
-          <a:bodyPr wrap="square" anchor="t" lIns="0" rIns="0" tIns="0" bIns="0">
+          <a:bodyPr wrap="square">
             <a:spAutoFit/>
           </a:bodyPr>
           <a:lstStyle/>
           <a:p>
-            <a:pPr algn="l">
-              <a:lnSpc>
-                <a:spcPct val="114000"/>
-              </a:lnSpc>
+            <a:pPr>
+              <a:spcAft>
+                <a:spcPts val="1000"/>
+              </a:spcAft>
             </a:pPr>
             <a:r>
-              <a:rPr sz="850" b="0">
-                <a:solidFill>
-                  <a:srgbClr val="5C6E6A"/>
-                </a:solidFill>
-              </a:rPr>
-              <a:t>▲ 分层达标（第 44 行起）：四档逐字原文，未改写</a:t>
-            </a:r>
-          </a:p>
-        </p:txBody>
-      </p:sp>
-      <p:pic>
-        <p:nvPicPr>
-          <p:cNvPr id="14" name="Picture 13" descr="p41_collector_hub_pytest.png"/>
-          <p:cNvPicPr>
-            <a:picLocks noChangeAspect="1"/>
-          </p:cNvPicPr>
-          <p:nvPr/>
-        </p:nvPicPr>
-        <p:blipFill>
-          <a:blip r:embed="rId3"/>
-          <a:stretch>
-            <a:fillRect/>
-          </a:stretch>
-        </p:blipFill>
-        <p:spPr>
-          <a:xfrm>
-            <a:off x="1096272" y="4272340"/>
-            <a:ext cx="9996406" cy="1369508"/>
-          </a:xfrm>
-          <a:prstGeom prst="rect">
-            <a:avLst/>
-          </a:prstGeom>
-        </p:spPr>
-      </p:pic>
-      <p:sp>
-        <p:nvSpPr>
-          <p:cNvPr id="15" name="TextBox 14"/>
+              <a:rPr sz="1800"/>
+              <a:t>1. 上机前确认本工位电源开关与急停位置，确认设备处于安全状态。</a:t>
+            </a:r>
+          </a:p>
+          <a:p>
+            <a:pPr>
+              <a:spcAft>
+                <a:spcPts val="1000"/>
+              </a:spcAft>
+            </a:pPr>
+            <a:r>
+              <a:rPr sz="1800"/>
+              <a:t>2. 涉及接线的操作一律先断电、后验电、再作业，禁止带电插拔。</a:t>
+            </a:r>
+          </a:p>
+          <a:p>
+            <a:pPr>
+              <a:spcAft>
+                <a:spcPts val="1000"/>
+              </a:spcAft>
+            </a:pPr>
+            <a:r>
+              <a:rPr sz="1800"/>
+              <a:t>3. 身体任何部位不进入设备运动/散热区域，长发束起，不佩戴悬垂饰物。</a:t>
+            </a:r>
+          </a:p>
+          <a:p>
+            <a:pPr>
+              <a:spcAft>
+                <a:spcPts val="1000"/>
+              </a:spcAft>
+            </a:pPr>
+            <a:r>
+              <a:rPr sz="1800"/>
+              <a:t>4. 调试程序前先静态检查、再低速小样本试运行，确认无异常后放大规模。</a:t>
+            </a:r>
+          </a:p>
+          <a:p>
+            <a:pPr>
+              <a:spcAft>
+                <a:spcPts val="1000"/>
+              </a:spcAft>
+            </a:pPr>
+            <a:r>
+              <a:rPr sz="1800"/>
+              <a:t>5. 任何不确定或异常情况，立即停止操作并报告指导教师，不擅自处置。</a:t>
+            </a:r>
+          </a:p>
+          <a:p>
+            <a:r>
+              <a:rPr sz="1400" b="1"/>
+              <a:t>以上任一条违反，本次任务按课程标准「安全规范一票否决」条款记 0 分并中止实训。</a:t>
+            </a:r>
+          </a:p>
+        </p:txBody>
+      </p:sp>
+    </p:spTree>
+  </p:cSld>
+  <p:clrMapOvr>
+    <a:masterClrMapping/>
+  </p:clrMapOvr>
+</p:sld>
+</file>
+
+<file path=ppt/slides/slide16.xml><?xml version="1.0" encoding="utf-8"?>
+<p:sld xmlns:a="http://schemas.openxmlformats.org/drawingml/2006/main" xmlns:p="http://schemas.openxmlformats.org/presentationml/2006/main" xmlns:r="http://schemas.openxmlformats.org/officeDocument/2006/relationships">
+  <p:cSld>
+    <p:spTree>
+      <p:nvGrpSpPr>
+        <p:cNvPr id="1" name=""/>
+        <p:cNvGrpSpPr/>
+        <p:nvPr/>
+      </p:nvGrpSpPr>
+      <p:grpSpPr/>
+      <p:sp>
+        <p:nvSpPr>
+          <p:cNvPr id="2" name="TextBox 1"/>
           <p:cNvSpPr txBox="1"/>
           <p:nvPr/>
         </p:nvSpPr>
         <p:spPr>
           <a:xfrm>
-            <a:off x="475488" y="5678424"/>
-            <a:ext cx="11237976" cy="256032"/>
+            <a:off x="548640" y="320040"/>
+            <a:ext cx="11094720" cy="914400"/>
           </a:xfrm>
           <a:prstGeom prst="rect">
             <a:avLst/>
@@ -8019,23 +6826,195 @@
           <a:noFill/>
         </p:spPr>
         <p:txBody>
-          <a:bodyPr wrap="square" anchor="t" lIns="0" rIns="0" tIns="0" bIns="0">
+          <a:bodyPr wrap="none">
             <a:spAutoFit/>
           </a:bodyPr>
           <a:lstStyle/>
           <a:p>
-            <a:pPr algn="l">
-              <a:lnSpc>
-                <a:spcPct val="114000"/>
-              </a:lnSpc>
+            <a:r>
+              <a:rPr sz="3000" b="1"/>
+              <a:t>本任务六步法导航</a:t>
+            </a:r>
+          </a:p>
+        </p:txBody>
+      </p:sp>
+      <p:sp>
+        <p:nvSpPr>
+          <p:cNvPr id="3" name="TextBox 2"/>
+          <p:cNvSpPr txBox="1"/>
+          <p:nvPr/>
+        </p:nvSpPr>
+        <p:spPr>
+          <a:xfrm>
+            <a:off x="731520" y="1371600"/>
+            <a:ext cx="10728960" cy="4663440"/>
+          </a:xfrm>
+          <a:prstGeom prst="rect">
+            <a:avLst/>
+          </a:prstGeom>
+          <a:noFill/>
+        </p:spPr>
+        <p:txBody>
+          <a:bodyPr wrap="square">
+            <a:spAutoFit/>
+          </a:bodyPr>
+          <a:lstStyle/>
+          <a:p>
+            <a:pPr>
+              <a:spcAft>
+                <a:spcPts val="1000"/>
+              </a:spcAft>
             </a:pPr>
             <a:r>
-              <a:rPr sz="850" b="0">
-                <a:solidFill>
-                  <a:srgbClr val="5C6E6A"/>
-                </a:solidFill>
-              </a:rPr>
-              <a:t>▲ pytest：47 passed in 0.28s（本机实跑，非示例）</a:t>
+              <a:rPr sz="1800"/>
+              <a:t>六步法：资讯 → 计划 → 决策 → 实施 → 检查 → 评估</a:t>
+            </a:r>
+          </a:p>
+          <a:p>
+            <a:pPr>
+              <a:spcAft>
+                <a:spcPts val="1000"/>
+              </a:spcAft>
+            </a:pPr>
+            <a:r>
+              <a:rPr sz="1800"/>
+              <a:t>本讲对应工单：《Python程序设计-项目实战》分层任务工单</a:t>
+            </a:r>
+          </a:p>
+          <a:p>
+            <a:pPr>
+              <a:spcAft>
+                <a:spcPts val="1000"/>
+              </a:spcAft>
+            </a:pPr>
+            <a:r>
+              <a:rPr sz="1800"/>
+              <a:t>课堂产出：工单第六节实施记录须当堂填写，含操作前安全打勾与学生本人签字。</a:t>
+            </a:r>
+          </a:p>
+          <a:p>
+            <a:pPr>
+              <a:spcAft>
+                <a:spcPts val="1000"/>
+              </a:spcAft>
+            </a:pPr>
+            <a:r>
+              <a:rPr sz="1800"/>
+              <a:t>课后交付：班组长／操作员／教师三方联签后交回，缺签视为未交付。</a:t>
+            </a:r>
+          </a:p>
+        </p:txBody>
+      </p:sp>
+    </p:spTree>
+  </p:cSld>
+  <p:clrMapOvr>
+    <a:masterClrMapping/>
+  </p:clrMapOvr>
+</p:sld>
+</file>
+
+<file path=ppt/slides/slide17.xml><?xml version="1.0" encoding="utf-8"?>
+<p:sld xmlns:a="http://schemas.openxmlformats.org/drawingml/2006/main" xmlns:p="http://schemas.openxmlformats.org/presentationml/2006/main" xmlns:r="http://schemas.openxmlformats.org/officeDocument/2006/relationships">
+  <p:cSld>
+    <p:spTree>
+      <p:nvGrpSpPr>
+        <p:cNvPr id="1" name=""/>
+        <p:cNvGrpSpPr/>
+        <p:nvPr/>
+      </p:nvGrpSpPr>
+      <p:grpSpPr/>
+      <p:sp>
+        <p:nvSpPr>
+          <p:cNvPr id="2" name="TextBox 1"/>
+          <p:cNvSpPr txBox="1"/>
+          <p:nvPr/>
+        </p:nvSpPr>
+        <p:spPr>
+          <a:xfrm>
+            <a:off x="548640" y="320040"/>
+            <a:ext cx="11094720" cy="914400"/>
+          </a:xfrm>
+          <a:prstGeom prst="rect">
+            <a:avLst/>
+          </a:prstGeom>
+          <a:noFill/>
+        </p:spPr>
+        <p:txBody>
+          <a:bodyPr wrap="none">
+            <a:spAutoFit/>
+          </a:bodyPr>
+          <a:lstStyle/>
+          <a:p>
+            <a:r>
+              <a:rPr sz="3000" b="1"/>
+              <a:t>本讲与岗位任务单的衔接</a:t>
+            </a:r>
+          </a:p>
+        </p:txBody>
+      </p:sp>
+      <p:sp>
+        <p:nvSpPr>
+          <p:cNvPr id="3" name="TextBox 2"/>
+          <p:cNvSpPr txBox="1"/>
+          <p:nvPr/>
+        </p:nvSpPr>
+        <p:spPr>
+          <a:xfrm>
+            <a:off x="731520" y="1371600"/>
+            <a:ext cx="10728960" cy="4663440"/>
+          </a:xfrm>
+          <a:prstGeom prst="rect">
+            <a:avLst/>
+          </a:prstGeom>
+          <a:noFill/>
+        </p:spPr>
+        <p:txBody>
+          <a:bodyPr wrap="square">
+            <a:spAutoFit/>
+          </a:bodyPr>
+          <a:lstStyle/>
+          <a:p>
+            <a:pPr>
+              <a:spcAft>
+                <a:spcPts val="1000"/>
+              </a:spcAft>
+            </a:pPr>
+            <a:r>
+              <a:rPr sz="1800"/>
+              <a:t>本讲在工作过程系统化课程中承担的任务环节：任务实施</a:t>
+            </a:r>
+          </a:p>
+          <a:p>
+            <a:pPr>
+              <a:spcAft>
+                <a:spcPts val="1000"/>
+              </a:spcAft>
+            </a:pPr>
+            <a:r>
+              <a:rPr sz="1800"/>
+              <a:t>考核对齐：过程性成绩取自本讲工单第六节各模块得分合计（满分 100）。</a:t>
+            </a:r>
+          </a:p>
+          <a:p>
+            <a:pPr>
+              <a:spcAft>
+                <a:spcPts val="1000"/>
+              </a:spcAft>
+            </a:pPr>
+            <a:r>
+              <a:rPr sz="1800"/>
+              <a:t>达标线：综合成绩≥60 分，且无安全红线一票否决记录</a:t>
+            </a:r>
+          </a:p>
+          <a:p>
+            <a:pPr>
+              <a:spcAft>
+                <a:spcPts val="1000"/>
+              </a:spcAft>
+            </a:pPr>
+            <a:r>
+              <a:rPr sz="1800"/>
+              <a:t>无效工单判定：未打安全勾、无本人签字、无三方联签。</a:t>
             </a:r>
           </a:p>
         </p:txBody>
@@ -13868,20 +12847,22 @@
       <p:grpSpPr/>
       <p:sp>
         <p:nvSpPr>
-          <p:cNvPr id="2" name="Rectangle 1"/>
+          <p:cNvPr id="2" name="Rounded Rectangle 1"/>
           <p:cNvSpPr/>
           <p:nvPr/>
         </p:nvSpPr>
         <p:spPr>
           <a:xfrm>
             <a:off x="0" y="0"/>
-            <a:ext cx="12192000" cy="1150000"/>
-          </a:xfrm>
-          <a:prstGeom prst="rect">
-            <a:avLst/>
+            <a:ext cx="12191695" cy="64008"/>
+          </a:xfrm>
+          <a:prstGeom prst="roundRect">
+            <a:avLst>
+              <a:gd name="adj" fmla="val 50000"/>
+            </a:avLst>
           </a:prstGeom>
           <a:solidFill>
-            <a:srgbClr val="010328"/>
+            <a:srgbClr val="0B5E54"/>
           </a:solidFill>
           <a:ln>
             <a:noFill/>
@@ -13912,20 +12893,60 @@
       </p:sp>
       <p:sp>
         <p:nvSpPr>
-          <p:cNvPr id="3" name="Rectangle 2"/>
+          <p:cNvPr id="3" name="TextBox 2"/>
+          <p:cNvSpPr txBox="1"/>
+          <p:nvPr/>
+        </p:nvSpPr>
+        <p:spPr>
+          <a:xfrm>
+            <a:off x="475488" y="146304"/>
+            <a:ext cx="8229600" cy="292608"/>
+          </a:xfrm>
+          <a:prstGeom prst="rect">
+            <a:avLst/>
+          </a:prstGeom>
+          <a:noFill/>
+        </p:spPr>
+        <p:txBody>
+          <a:bodyPr wrap="square" anchor="t" lIns="0" rIns="0" tIns="0" bIns="0">
+            <a:spAutoFit/>
+          </a:bodyPr>
+          <a:lstStyle/>
+          <a:p>
+            <a:pPr algn="l">
+              <a:lnSpc>
+                <a:spcPct val="114000"/>
+              </a:lnSpc>
+            </a:pPr>
+            <a:r>
+              <a:rPr sz="1100" b="1">
+                <a:solidFill>
+                  <a:srgbClr val="0B5E54"/>
+                </a:solidFill>
+              </a:rPr>
+              <a:t>工单实战 · 本次实跑结果</a:t>
+            </a:r>
+          </a:p>
+        </p:txBody>
+      </p:sp>
+      <p:sp>
+        <p:nvSpPr>
+          <p:cNvPr id="4" name="Rounded Rectangle 3"/>
           <p:cNvSpPr/>
           <p:nvPr/>
         </p:nvSpPr>
         <p:spPr>
           <a:xfrm>
-            <a:off x="0" y="1150000"/>
-            <a:ext cx="2600000" cy="70000"/>
-          </a:xfrm>
-          <a:prstGeom prst="rect">
-            <a:avLst/>
+            <a:off x="475488" y="475488"/>
+            <a:ext cx="1881187" cy="310896"/>
+          </a:xfrm>
+          <a:prstGeom prst="roundRect">
+            <a:avLst>
+              <a:gd name="adj" fmla="val 50000"/>
+            </a:avLst>
           </a:prstGeom>
           <a:solidFill>
-            <a:srgbClr val="F5670F"/>
+            <a:srgbClr val="C9A227"/>
           </a:solidFill>
           <a:ln>
             <a:noFill/>
@@ -13956,14 +12977,14 @@
       </p:sp>
       <p:sp>
         <p:nvSpPr>
-          <p:cNvPr id="4" name="TextBox 3"/>
+          <p:cNvPr id="5" name="TextBox 4"/>
           <p:cNvSpPr txBox="1"/>
           <p:nvPr/>
         </p:nvSpPr>
         <p:spPr>
           <a:xfrm>
-            <a:off x="700000" y="300000"/>
-            <a:ext cx="10792000" cy="700000"/>
+            <a:off x="475488" y="475488"/>
+            <a:ext cx="1881187" cy="310896"/>
           </a:xfrm>
           <a:prstGeom prst="rect">
             <a:avLst/>
@@ -13971,47 +12992,83 @@
           <a:noFill/>
         </p:spPr>
         <p:txBody>
-          <a:bodyPr wrap="square" anchor="t">
+          <a:bodyPr wrap="square" anchor="ctr" lIns="0" rIns="0" tIns="0" bIns="0">
             <a:spAutoFit/>
           </a:bodyPr>
           <a:lstStyle/>
           <a:p>
+            <a:pPr algn="ctr">
+              <a:lnSpc>
+                <a:spcPct val="114000"/>
+              </a:lnSpc>
+            </a:pPr>
+            <a:r>
+              <a:rPr sz="1050" b="1">
+                <a:solidFill>
+                  <a:srgbClr val="FFFFFF"/>
+                </a:solidFill>
+              </a:rPr>
+              <a:t>REAL RUN · 四档逐字实测</a:t>
+            </a:r>
+          </a:p>
+        </p:txBody>
+      </p:sp>
+      <p:sp>
+        <p:nvSpPr>
+          <p:cNvPr id="6" name="TextBox 5"/>
+          <p:cNvSpPr txBox="1"/>
+          <p:nvPr/>
+        </p:nvSpPr>
+        <p:spPr>
+          <a:xfrm>
+            <a:off x="475488" y="859536"/>
+            <a:ext cx="11237976" cy="502920"/>
+          </a:xfrm>
+          <a:prstGeom prst="rect">
+            <a:avLst/>
+          </a:prstGeom>
+          <a:noFill/>
+        </p:spPr>
+        <p:txBody>
+          <a:bodyPr wrap="square" anchor="t" lIns="0" rIns="0" tIns="0" bIns="0">
+            <a:spAutoFit/>
+          </a:bodyPr>
+          <a:lstStyle/>
+          <a:p>
             <a:pPr algn="l">
               <a:lnSpc>
-                <a:spcPct val="110000"/>
+                <a:spcPct val="114000"/>
               </a:lnSpc>
-              <a:spcAft>
-                <a:spcPts val="600"/>
-              </a:spcAft>
             </a:pPr>
             <a:r>
-              <a:rPr sz="2400" b="1">
-                <a:solidFill>
-                  <a:srgbClr val="FFFFFF"/>
-                </a:solidFill>
-                <a:latin typeface="微软雅黑"/>
-              </a:rPr>
-              <a:t>总结评价与课后任务</a:t>
-            </a:r>
-          </a:p>
-        </p:txBody>
-      </p:sp>
-      <p:sp>
-        <p:nvSpPr>
-          <p:cNvPr id="5" name="Rectangle 4"/>
+              <a:rPr sz="2200" b="1">
+                <a:solidFill>
+                  <a:srgbClr val="1B2B28"/>
+                </a:solidFill>
+              </a:rPr>
+              <a:t>P4.1 p41_collector_hub：本次 D/C/B/A 四档实测</a:t>
+            </a:r>
+          </a:p>
+        </p:txBody>
+      </p:sp>
+      <p:sp>
+        <p:nvSpPr>
+          <p:cNvPr id="7" name="Rounded Rectangle 6"/>
           <p:cNvSpPr/>
           <p:nvPr/>
         </p:nvSpPr>
         <p:spPr>
           <a:xfrm>
-            <a:off x="800000" y="1950000"/>
-            <a:ext cx="10600000" cy="1500000"/>
-          </a:xfrm>
-          <a:prstGeom prst="rect">
-            <a:avLst/>
+            <a:off x="475488" y="1389888"/>
+            <a:ext cx="1234440" cy="27432"/>
+          </a:xfrm>
+          <a:prstGeom prst="roundRect">
+            <a:avLst>
+              <a:gd name="adj" fmla="val 50000"/>
+            </a:avLst>
           </a:prstGeom>
           <a:solidFill>
-            <a:srgbClr val="F3F6FD"/>
+            <a:srgbClr val="C9A227"/>
           </a:solidFill>
           <a:ln>
             <a:noFill/>
@@ -14042,285 +13099,22 @@
       </p:sp>
       <p:sp>
         <p:nvSpPr>
-          <p:cNvPr id="6" name="TextBox 5"/>
-          <p:cNvSpPr txBox="1"/>
-          <p:nvPr/>
-        </p:nvSpPr>
-        <p:spPr>
-          <a:xfrm>
-            <a:off x="1000000" y="2050000"/>
-            <a:ext cx="10300000" cy="1400000"/>
-          </a:xfrm>
-          <a:prstGeom prst="rect">
-            <a:avLst/>
-          </a:prstGeom>
-          <a:noFill/>
-        </p:spPr>
-        <p:txBody>
-          <a:bodyPr wrap="square" anchor="t">
-            <a:spAutoFit/>
-          </a:bodyPr>
-          <a:lstStyle/>
-          <a:p>
-            <a:pPr algn="l">
-              <a:lnSpc>
-                <a:spcPct val="110000"/>
-              </a:lnSpc>
-              <a:spcAft>
-                <a:spcPts val="600"/>
-              </a:spcAft>
-            </a:pPr>
-            <a:r>
-              <a:rPr sz="1500" b="1">
-                <a:solidFill>
-                  <a:srgbClr val="0545E8"/>
-                </a:solidFill>
-                <a:latin typeface="微软雅黑"/>
-              </a:rPr>
-              <a:t>评价（10分钟）：</a:t>
-            </a:r>
-          </a:p>
-          <a:p>
-            <a:pPr algn="l">
-              <a:lnSpc>
-                <a:spcPct val="110000"/>
-              </a:lnSpc>
-              <a:spcAft>
-                <a:spcPts val="600"/>
-              </a:spcAft>
-            </a:pPr>
-            <a:r>
-              <a:rPr sz="1400" b="0">
-                <a:solidFill>
-                  <a:srgbClr val="010328"/>
-                </a:solidFill>
-                <a:latin typeface="微软雅黑"/>
-              </a:rPr>
-              <a:t>按D/C/B/A量表当堂评分；工单24小时内反馈评语与改进建议。</a:t>
-            </a:r>
-          </a:p>
-        </p:txBody>
-      </p:sp>
-      <p:sp>
-        <p:nvSpPr>
-          <p:cNvPr id="7" name="TextBox 6"/>
-          <p:cNvSpPr txBox="1"/>
-          <p:nvPr/>
-        </p:nvSpPr>
-        <p:spPr>
-          <a:xfrm>
-            <a:off x="850000" y="3700000"/>
-            <a:ext cx="10600000" cy="700000"/>
-          </a:xfrm>
-          <a:prstGeom prst="rect">
-            <a:avLst/>
-          </a:prstGeom>
-          <a:noFill/>
-        </p:spPr>
-        <p:txBody>
-          <a:bodyPr wrap="square" anchor="t">
-            <a:spAutoFit/>
-          </a:bodyPr>
-          <a:lstStyle/>
-          <a:p>
-            <a:pPr algn="l">
-              <a:lnSpc>
-                <a:spcPct val="120000"/>
-              </a:lnSpc>
-              <a:spcAft>
-                <a:spcPts val="600"/>
-              </a:spcAft>
-            </a:pPr>
-            <a:r>
-              <a:rPr sz="1400" b="1">
-                <a:solidFill>
-                  <a:srgbClr val="F5670F"/>
-                </a:solidFill>
-                <a:latin typeface="微软雅黑"/>
-              </a:rPr>
-              <a:t>1. </a:t>
-            </a:r>
-            <a:r>
-              <a:rPr sz="1400" b="0">
-                <a:solidFill>
-                  <a:srgbClr val="010328"/>
-                </a:solidFill>
-                <a:latin typeface="微软雅黑"/>
-              </a:rPr>
-              <a:t>1. 完成工单P4.1《多源工业数据采集系统》：及格标准采集率&gt;95%+无数据丢失；优秀标准≥99.5%+延迟&lt;100ms+告警完善；</a:t>
-            </a:r>
-          </a:p>
-        </p:txBody>
-      </p:sp>
-      <p:sp>
-        <p:nvSpPr>
-          <p:cNvPr id="8" name="TextBox 7"/>
-          <p:cNvSpPr txBox="1"/>
-          <p:nvPr/>
-        </p:nvSpPr>
-        <p:spPr>
-          <a:xfrm>
-            <a:off x="850000" y="4420000"/>
-            <a:ext cx="10600000" cy="700000"/>
-          </a:xfrm>
-          <a:prstGeom prst="rect">
-            <a:avLst/>
-          </a:prstGeom>
-          <a:noFill/>
-        </p:spPr>
-        <p:txBody>
-          <a:bodyPr wrap="square" anchor="t">
-            <a:spAutoFit/>
-          </a:bodyPr>
-          <a:lstStyle/>
-          <a:p>
-            <a:pPr algn="l">
-              <a:lnSpc>
-                <a:spcPct val="120000"/>
-              </a:lnSpc>
-              <a:spcAft>
-                <a:spcPts val="600"/>
-              </a:spcAft>
-            </a:pPr>
-            <a:r>
-              <a:rPr sz="1400" b="1">
-                <a:solidFill>
-                  <a:srgbClr val="F5670F"/>
-                </a:solidFill>
-                <a:latin typeface="微软雅黑"/>
-              </a:rPr>
-              <a:t>2. </a:t>
-            </a:r>
-            <a:r>
-              <a:rPr sz="1400" b="0">
-                <a:solidFill>
-                  <a:srgbClr val="010328"/>
-                </a:solidFill>
-                <a:latin typeface="微软雅黑"/>
-              </a:rPr>
-              <a:t>2. 撰写系统架构文档（模块图+数据流图）；</a:t>
-            </a:r>
-          </a:p>
-        </p:txBody>
-      </p:sp>
-      <p:sp>
-        <p:nvSpPr>
-          <p:cNvPr id="9" name="TextBox 8"/>
-          <p:cNvSpPr txBox="1"/>
-          <p:nvPr/>
-        </p:nvSpPr>
-        <p:spPr>
-          <a:xfrm>
-            <a:off x="850000" y="5140000"/>
-            <a:ext cx="10600000" cy="700000"/>
-          </a:xfrm>
-          <a:prstGeom prst="rect">
-            <a:avLst/>
-          </a:prstGeom>
-          <a:noFill/>
-        </p:spPr>
-        <p:txBody>
-          <a:bodyPr wrap="square" anchor="t">
-            <a:spAutoFit/>
-          </a:bodyPr>
-          <a:lstStyle/>
-          <a:p>
-            <a:pPr algn="l">
-              <a:lnSpc>
-                <a:spcPct val="120000"/>
-              </a:lnSpc>
-              <a:spcAft>
-                <a:spcPts val="600"/>
-              </a:spcAft>
-            </a:pPr>
-            <a:r>
-              <a:rPr sz="1400" b="1">
-                <a:solidFill>
-                  <a:srgbClr val="F5670F"/>
-                </a:solidFill>
-                <a:latin typeface="微软雅黑"/>
-              </a:rPr>
-              <a:t>3. </a:t>
-            </a:r>
-            <a:r>
-              <a:rPr sz="1400" b="0">
-                <a:solidFill>
-                  <a:srgbClr val="010328"/>
-                </a:solidFill>
-                <a:latin typeface="微软雅黑"/>
-              </a:rPr>
-              <a:t>3. 预习SQL基础与数据库设计方法。</a:t>
-            </a:r>
-          </a:p>
-        </p:txBody>
-      </p:sp>
-      <p:sp>
-        <p:nvSpPr>
-          <p:cNvPr id="10" name="TextBox 9"/>
-          <p:cNvSpPr txBox="1"/>
-          <p:nvPr/>
-        </p:nvSpPr>
-        <p:spPr>
-          <a:xfrm>
-            <a:off x="850000" y="5960000"/>
-            <a:ext cx="10600000" cy="500000"/>
-          </a:xfrm>
-          <a:prstGeom prst="rect">
-            <a:avLst/>
-          </a:prstGeom>
-          <a:noFill/>
-        </p:spPr>
-        <p:txBody>
-          <a:bodyPr wrap="square" anchor="t">
-            <a:spAutoFit/>
-          </a:bodyPr>
-          <a:lstStyle/>
-          <a:p>
-            <a:pPr algn="l">
-              <a:lnSpc>
-                <a:spcPct val="110000"/>
-              </a:lnSpc>
-              <a:spcAft>
-                <a:spcPts val="600"/>
-              </a:spcAft>
-            </a:pPr>
-            <a:r>
-              <a:rPr sz="1300" b="1">
-                <a:solidFill>
-                  <a:srgbClr val="0475B6"/>
-                </a:solidFill>
-                <a:latin typeface="微软雅黑"/>
-              </a:rPr>
-              <a:t>下次课预告：</a:t>
-            </a:r>
-            <a:r>
-              <a:rPr sz="1300" b="0">
-                <a:solidFill>
-                  <a:srgbClr val="44546A"/>
-                </a:solidFill>
-                <a:latin typeface="微软雅黑"/>
-              </a:rPr>
-              <a:t>见下次课工单任务书</a:t>
-            </a:r>
-          </a:p>
-        </p:txBody>
-      </p:sp>
-      <p:sp>
-        <p:nvSpPr>
-          <p:cNvPr id="11" name="Rectangle 10"/>
+          <p:cNvPr id="8" name="Rounded Rectangle 7"/>
           <p:cNvSpPr/>
           <p:nvPr/>
         </p:nvSpPr>
         <p:spPr>
           <a:xfrm>
-            <a:off x="500000" y="6500000"/>
-            <a:ext cx="11100000" cy="20000"/>
-          </a:xfrm>
-          <a:prstGeom prst="rect">
-            <a:avLst/>
+            <a:off x="475488" y="6419088"/>
+            <a:ext cx="11237976" cy="10972"/>
+          </a:xfrm>
+          <a:prstGeom prst="roundRect">
+            <a:avLst>
+              <a:gd name="adj" fmla="val 50000"/>
+            </a:avLst>
           </a:prstGeom>
           <a:solidFill>
-            <a:srgbClr val="C9D4EE"/>
+            <a:srgbClr val="E4F1EE"/>
           </a:solidFill>
           <a:ln>
             <a:noFill/>
@@ -14351,14 +13145,14 @@
       </p:sp>
       <p:sp>
         <p:nvSpPr>
-          <p:cNvPr id="12" name="TextBox 11"/>
+          <p:cNvPr id="9" name="TextBox 8"/>
           <p:cNvSpPr txBox="1"/>
           <p:nvPr/>
         </p:nvSpPr>
         <p:spPr>
           <a:xfrm>
-            <a:off x="500000" y="6540000"/>
-            <a:ext cx="7000000" cy="300000"/>
+            <a:off x="475488" y="6455664"/>
+            <a:ext cx="7315200" cy="292608"/>
           </a:xfrm>
           <a:prstGeom prst="rect">
             <a:avLst/>
@@ -14366,25 +13160,21 @@
           <a:noFill/>
         </p:spPr>
         <p:txBody>
-          <a:bodyPr wrap="square" anchor="t">
+          <a:bodyPr wrap="square" anchor="t" lIns="0" rIns="0" tIns="0" bIns="0">
             <a:spAutoFit/>
           </a:bodyPr>
           <a:lstStyle/>
           <a:p>
             <a:pPr algn="l">
               <a:lnSpc>
-                <a:spcPct val="110000"/>
+                <a:spcPct val="114000"/>
               </a:lnSpc>
-              <a:spcAft>
-                <a:spcPts val="600"/>
-              </a:spcAft>
             </a:pPr>
             <a:r>
-              <a:rPr sz="1000" b="0">
-                <a:solidFill>
-                  <a:srgbClr val="8A97B5"/>
-                </a:solidFill>
-                <a:latin typeface="微软雅黑"/>
+              <a:rPr sz="900" b="0">
+                <a:solidFill>
+                  <a:srgbClr val="5C6E6A"/>
+                </a:solidFill>
               </a:rPr>
               <a:t>两江智造集团 · Python程序设计（项目实战）</a:t>
             </a:r>
@@ -14393,14 +13183,14 @@
       </p:sp>
       <p:sp>
         <p:nvSpPr>
-          <p:cNvPr id="13" name="TextBox 12"/>
+          <p:cNvPr id="10" name="TextBox 9"/>
           <p:cNvSpPr txBox="1"/>
           <p:nvPr/>
         </p:nvSpPr>
         <p:spPr>
           <a:xfrm>
-            <a:off x="10600000" y="6540000"/>
-            <a:ext cx="1000000" cy="300000"/>
+            <a:off x="10597896" y="6537960"/>
+            <a:ext cx="996696" cy="301752"/>
           </a:xfrm>
           <a:prstGeom prst="rect">
             <a:avLst/>
@@ -14408,27 +13198,1599 @@
           <a:noFill/>
         </p:spPr>
         <p:txBody>
-          <a:bodyPr wrap="square" anchor="t">
+          <a:bodyPr wrap="square" anchor="t" lIns="0" rIns="0" tIns="0" bIns="0">
             <a:spAutoFit/>
           </a:bodyPr>
           <a:lstStyle/>
           <a:p>
             <a:pPr algn="r">
               <a:lnSpc>
-                <a:spcPct val="110000"/>
+                <a:spcPct val="114000"/>
               </a:lnSpc>
-              <a:spcAft>
-                <a:spcPts val="600"/>
-              </a:spcAft>
             </a:pPr>
             <a:r>
               <a:rPr sz="1000" b="0">
                 <a:solidFill>
                   <a:srgbClr val="8A97B5"/>
                 </a:solidFill>
-                <a:latin typeface="微软雅黑"/>
-              </a:rPr>
-              <a:t>12 / 14</a:t>
+              </a:rPr>
+              <a:t>9 / 14</a:t>
+            </a:r>
+          </a:p>
+        </p:txBody>
+      </p:sp>
+      <p:sp>
+        <p:nvSpPr>
+          <p:cNvPr id="11" name="Rounded Rectangle 10"/>
+          <p:cNvSpPr/>
+          <p:nvPr/>
+        </p:nvSpPr>
+        <p:spPr>
+          <a:xfrm>
+            <a:off x="475488" y="1554480"/>
+            <a:ext cx="11237976" cy="916686"/>
+          </a:xfrm>
+          <a:prstGeom prst="roundRect">
+            <a:avLst>
+              <a:gd name="adj" fmla="val 6000"/>
+            </a:avLst>
+          </a:prstGeom>
+          <a:solidFill>
+            <a:srgbClr val="FFFFFF"/>
+          </a:solidFill>
+          <a:ln w="9525">
+            <a:solidFill>
+              <a:srgbClr val="E4F1EE"/>
+            </a:solidFill>
+          </a:ln>
+          <a:effectLst/>
+        </p:spPr>
+        <p:style>
+          <a:lnRef idx="1">
+            <a:schemeClr val="accent1"/>
+          </a:lnRef>
+          <a:fillRef idx="3">
+            <a:schemeClr val="accent1"/>
+          </a:fillRef>
+          <a:effectRef idx="2">
+            <a:schemeClr val="accent1"/>
+          </a:effectRef>
+          <a:fontRef idx="minor">
+            <a:schemeClr val="lt1"/>
+          </a:fontRef>
+        </p:style>
+        <p:txBody>
+          <a:bodyPr rtlCol="0" anchor="ctr"/>
+          <a:lstStyle/>
+          <a:p>
+            <a:pPr algn="ctr"/>
+          </a:p>
+        </p:txBody>
+      </p:sp>
+      <p:sp>
+        <p:nvSpPr>
+          <p:cNvPr id="12" name="Rounded Rectangle 11"/>
+          <p:cNvSpPr/>
+          <p:nvPr/>
+        </p:nvSpPr>
+        <p:spPr>
+          <a:xfrm>
+            <a:off x="475488" y="1554480"/>
+            <a:ext cx="54864" cy="916686"/>
+          </a:xfrm>
+          <a:prstGeom prst="roundRect">
+            <a:avLst>
+              <a:gd name="adj" fmla="val 50000"/>
+            </a:avLst>
+          </a:prstGeom>
+          <a:solidFill>
+            <a:srgbClr val="5C6E6A"/>
+          </a:solidFill>
+          <a:ln>
+            <a:noFill/>
+          </a:ln>
+          <a:effectLst/>
+        </p:spPr>
+        <p:style>
+          <a:lnRef idx="1">
+            <a:schemeClr val="accent1"/>
+          </a:lnRef>
+          <a:fillRef idx="3">
+            <a:schemeClr val="accent1"/>
+          </a:fillRef>
+          <a:effectRef idx="2">
+            <a:schemeClr val="accent1"/>
+          </a:effectRef>
+          <a:fontRef idx="minor">
+            <a:schemeClr val="lt1"/>
+          </a:fontRef>
+        </p:style>
+        <p:txBody>
+          <a:bodyPr rtlCol="0" anchor="ctr"/>
+          <a:lstStyle/>
+          <a:p>
+            <a:pPr algn="ctr"/>
+          </a:p>
+        </p:txBody>
+      </p:sp>
+      <p:sp>
+        <p:nvSpPr>
+          <p:cNvPr id="13" name="Rounded Rectangle 12"/>
+          <p:cNvSpPr/>
+          <p:nvPr/>
+        </p:nvSpPr>
+        <p:spPr>
+          <a:xfrm>
+            <a:off x="621792" y="1636776"/>
+            <a:ext cx="237744" cy="237744"/>
+          </a:xfrm>
+          <a:prstGeom prst="roundRect">
+            <a:avLst>
+              <a:gd name="adj" fmla="val 28000"/>
+            </a:avLst>
+          </a:prstGeom>
+          <a:solidFill>
+            <a:srgbClr val="5C6E6A"/>
+          </a:solidFill>
+          <a:ln>
+            <a:noFill/>
+          </a:ln>
+          <a:effectLst/>
+        </p:spPr>
+        <p:style>
+          <a:lnRef idx="1">
+            <a:schemeClr val="accent1"/>
+          </a:lnRef>
+          <a:fillRef idx="3">
+            <a:schemeClr val="accent1"/>
+          </a:fillRef>
+          <a:effectRef idx="2">
+            <a:schemeClr val="accent1"/>
+          </a:effectRef>
+          <a:fontRef idx="minor">
+            <a:schemeClr val="lt1"/>
+          </a:fontRef>
+        </p:style>
+        <p:txBody>
+          <a:bodyPr rtlCol="0" anchor="ctr"/>
+          <a:lstStyle/>
+          <a:p>
+            <a:pPr algn="ctr"/>
+          </a:p>
+        </p:txBody>
+      </p:sp>
+      <p:sp>
+        <p:nvSpPr>
+          <p:cNvPr id="14" name="TextBox 13"/>
+          <p:cNvSpPr txBox="1"/>
+          <p:nvPr/>
+        </p:nvSpPr>
+        <p:spPr>
+          <a:xfrm>
+            <a:off x="621792" y="1636776"/>
+            <a:ext cx="237744" cy="237744"/>
+          </a:xfrm>
+          <a:prstGeom prst="rect">
+            <a:avLst/>
+          </a:prstGeom>
+          <a:noFill/>
+        </p:spPr>
+        <p:txBody>
+          <a:bodyPr wrap="square" anchor="ctr" lIns="0" rIns="0" tIns="0" bIns="0">
+            <a:spAutoFit/>
+          </a:bodyPr>
+          <a:lstStyle/>
+          <a:p>
+            <a:pPr algn="ctr">
+              <a:lnSpc>
+                <a:spcPct val="114000"/>
+              </a:lnSpc>
+            </a:pPr>
+            <a:r>
+              <a:rPr sz="1000" b="1">
+                <a:solidFill>
+                  <a:srgbClr val="FFFFFF"/>
+                </a:solidFill>
+              </a:rPr>
+              <a:t>D</a:t>
+            </a:r>
+          </a:p>
+        </p:txBody>
+      </p:sp>
+      <p:sp>
+        <p:nvSpPr>
+          <p:cNvPr id="15" name="TextBox 14"/>
+          <p:cNvSpPr txBox="1"/>
+          <p:nvPr/>
+        </p:nvSpPr>
+        <p:spPr>
+          <a:xfrm>
+            <a:off x="932688" y="1618488"/>
+            <a:ext cx="8778240" cy="274320"/>
+          </a:xfrm>
+          <a:prstGeom prst="rect">
+            <a:avLst/>
+          </a:prstGeom>
+          <a:noFill/>
+        </p:spPr>
+        <p:txBody>
+          <a:bodyPr wrap="square" anchor="ctr" lIns="0" rIns="0" tIns="0" bIns="0">
+            <a:spAutoFit/>
+          </a:bodyPr>
+          <a:lstStyle/>
+          <a:p>
+            <a:pPr algn="l">
+              <a:lnSpc>
+                <a:spcPct val="114000"/>
+              </a:lnSpc>
+            </a:pPr>
+            <a:r>
+              <a:rPr sz="1050" b="1">
+                <a:solidFill>
+                  <a:srgbClr val="1B2B28"/>
+                </a:solidFill>
+              </a:rPr>
+              <a:t>及格</a:t>
+            </a:r>
+            <a:r>
+              <a:rPr sz="850" b="0">
+                <a:solidFill>
+                  <a:srgbClr val="5C6E6A"/>
+                </a:solidFill>
+              </a:rPr>
+              <a:t>   验收口径：</a:t>
+            </a:r>
+            <a:r>
+              <a:rPr sz="850" b="0">
+                <a:solidFill>
+                  <a:srgbClr val="5C6E6A"/>
+                </a:solidFill>
+              </a:rPr>
+              <a:t>三源数据贯通；采集率&gt;95%；无数据丢失；系统文档</a:t>
+            </a:r>
+          </a:p>
+        </p:txBody>
+      </p:sp>
+      <p:sp>
+        <p:nvSpPr>
+          <p:cNvPr id="16" name="Rounded Rectangle 15"/>
+          <p:cNvSpPr/>
+          <p:nvPr/>
+        </p:nvSpPr>
+        <p:spPr>
+          <a:xfrm>
+            <a:off x="11131803" y="1645920"/>
+            <a:ext cx="453644" cy="237744"/>
+          </a:xfrm>
+          <a:prstGeom prst="roundRect">
+            <a:avLst>
+              <a:gd name="adj" fmla="val 50000"/>
+            </a:avLst>
+          </a:prstGeom>
+          <a:solidFill>
+            <a:srgbClr val="0B5E54"/>
+          </a:solidFill>
+          <a:ln>
+            <a:noFill/>
+          </a:ln>
+          <a:effectLst/>
+        </p:spPr>
+        <p:style>
+          <a:lnRef idx="1">
+            <a:schemeClr val="accent1"/>
+          </a:lnRef>
+          <a:fillRef idx="3">
+            <a:schemeClr val="accent1"/>
+          </a:fillRef>
+          <a:effectRef idx="2">
+            <a:schemeClr val="accent1"/>
+          </a:effectRef>
+          <a:fontRef idx="minor">
+            <a:schemeClr val="lt1"/>
+          </a:fontRef>
+        </p:style>
+        <p:txBody>
+          <a:bodyPr rtlCol="0" anchor="ctr"/>
+          <a:lstStyle/>
+          <a:p>
+            <a:pPr algn="ctr"/>
+          </a:p>
+        </p:txBody>
+      </p:sp>
+      <p:sp>
+        <p:nvSpPr>
+          <p:cNvPr id="17" name="TextBox 16"/>
+          <p:cNvSpPr txBox="1"/>
+          <p:nvPr/>
+        </p:nvSpPr>
+        <p:spPr>
+          <a:xfrm>
+            <a:off x="11131803" y="1645920"/>
+            <a:ext cx="453644" cy="237744"/>
+          </a:xfrm>
+          <a:prstGeom prst="rect">
+            <a:avLst/>
+          </a:prstGeom>
+          <a:noFill/>
+        </p:spPr>
+        <p:txBody>
+          <a:bodyPr wrap="square" anchor="ctr" lIns="0" rIns="0" tIns="0" bIns="0">
+            <a:spAutoFit/>
+          </a:bodyPr>
+          <a:lstStyle/>
+          <a:p>
+            <a:pPr algn="ctr">
+              <a:lnSpc>
+                <a:spcPct val="114000"/>
+              </a:lnSpc>
+            </a:pPr>
+            <a:r>
+              <a:rPr sz="850" b="1">
+                <a:solidFill>
+                  <a:srgbClr val="FFFFFF"/>
+                </a:solidFill>
+              </a:rPr>
+              <a:t>达标</a:t>
+            </a:r>
+          </a:p>
+        </p:txBody>
+      </p:sp>
+      <p:sp>
+        <p:nvSpPr>
+          <p:cNvPr id="18" name="TextBox 17"/>
+          <p:cNvSpPr txBox="1"/>
+          <p:nvPr/>
+        </p:nvSpPr>
+        <p:spPr>
+          <a:xfrm>
+            <a:off x="932688" y="1901952"/>
+            <a:ext cx="10671047" cy="514350"/>
+          </a:xfrm>
+          <a:prstGeom prst="rect">
+            <a:avLst/>
+          </a:prstGeom>
+          <a:noFill/>
+        </p:spPr>
+        <p:txBody>
+          <a:bodyPr wrap="square" anchor="t" lIns="0" rIns="0" tIns="0" bIns="0">
+            <a:spAutoFit/>
+          </a:bodyPr>
+          <a:lstStyle/>
+          <a:p>
+            <a:pPr algn="l">
+              <a:lnSpc>
+                <a:spcPct val="114000"/>
+              </a:lnSpc>
+            </a:pPr>
+            <a:r>
+              <a:rPr sz="950" b="0">
+                <a:solidFill>
+                  <a:srgbClr val="1B2B28"/>
+                </a:solidFill>
+              </a:rPr>
+              <a:t>3/3 源各有成功读数｜默认链路采集率 97.22%（工单线 &gt;95.00%）｜重连上限抬到 4 次的零丢弃链路: 成功 36 丢弃 0｜成功+丢弃=计划恒等 通过｜docs/ 有效过程文档 8 篇（≥8 且每篇 &gt;200B）</a:t>
+            </a:r>
+          </a:p>
+        </p:txBody>
+      </p:sp>
+      <p:sp>
+        <p:nvSpPr>
+          <p:cNvPr id="19" name="Rounded Rectangle 18"/>
+          <p:cNvSpPr/>
+          <p:nvPr/>
+        </p:nvSpPr>
+        <p:spPr>
+          <a:xfrm>
+            <a:off x="475488" y="2535174"/>
+            <a:ext cx="11237976" cy="916686"/>
+          </a:xfrm>
+          <a:prstGeom prst="roundRect">
+            <a:avLst>
+              <a:gd name="adj" fmla="val 6000"/>
+            </a:avLst>
+          </a:prstGeom>
+          <a:solidFill>
+            <a:srgbClr val="FFFFFF"/>
+          </a:solidFill>
+          <a:ln w="9525">
+            <a:solidFill>
+              <a:srgbClr val="E4F1EE"/>
+            </a:solidFill>
+          </a:ln>
+          <a:effectLst/>
+        </p:spPr>
+        <p:style>
+          <a:lnRef idx="1">
+            <a:schemeClr val="accent1"/>
+          </a:lnRef>
+          <a:fillRef idx="3">
+            <a:schemeClr val="accent1"/>
+          </a:fillRef>
+          <a:effectRef idx="2">
+            <a:schemeClr val="accent1"/>
+          </a:effectRef>
+          <a:fontRef idx="minor">
+            <a:schemeClr val="lt1"/>
+          </a:fontRef>
+        </p:style>
+        <p:txBody>
+          <a:bodyPr rtlCol="0" anchor="ctr"/>
+          <a:lstStyle/>
+          <a:p>
+            <a:pPr algn="ctr"/>
+          </a:p>
+        </p:txBody>
+      </p:sp>
+      <p:sp>
+        <p:nvSpPr>
+          <p:cNvPr id="20" name="Rounded Rectangle 19"/>
+          <p:cNvSpPr/>
+          <p:nvPr/>
+        </p:nvSpPr>
+        <p:spPr>
+          <a:xfrm>
+            <a:off x="475488" y="2535174"/>
+            <a:ext cx="54864" cy="916686"/>
+          </a:xfrm>
+          <a:prstGeom prst="roundRect">
+            <a:avLst>
+              <a:gd name="adj" fmla="val 50000"/>
+            </a:avLst>
+          </a:prstGeom>
+          <a:solidFill>
+            <a:srgbClr val="157A6D"/>
+          </a:solidFill>
+          <a:ln>
+            <a:noFill/>
+          </a:ln>
+          <a:effectLst/>
+        </p:spPr>
+        <p:style>
+          <a:lnRef idx="1">
+            <a:schemeClr val="accent1"/>
+          </a:lnRef>
+          <a:fillRef idx="3">
+            <a:schemeClr val="accent1"/>
+          </a:fillRef>
+          <a:effectRef idx="2">
+            <a:schemeClr val="accent1"/>
+          </a:effectRef>
+          <a:fontRef idx="minor">
+            <a:schemeClr val="lt1"/>
+          </a:fontRef>
+        </p:style>
+        <p:txBody>
+          <a:bodyPr rtlCol="0" anchor="ctr"/>
+          <a:lstStyle/>
+          <a:p>
+            <a:pPr algn="ctr"/>
+          </a:p>
+        </p:txBody>
+      </p:sp>
+      <p:sp>
+        <p:nvSpPr>
+          <p:cNvPr id="21" name="Rounded Rectangle 20"/>
+          <p:cNvSpPr/>
+          <p:nvPr/>
+        </p:nvSpPr>
+        <p:spPr>
+          <a:xfrm>
+            <a:off x="621792" y="2617470"/>
+            <a:ext cx="237744" cy="237744"/>
+          </a:xfrm>
+          <a:prstGeom prst="roundRect">
+            <a:avLst>
+              <a:gd name="adj" fmla="val 28000"/>
+            </a:avLst>
+          </a:prstGeom>
+          <a:solidFill>
+            <a:srgbClr val="157A6D"/>
+          </a:solidFill>
+          <a:ln>
+            <a:noFill/>
+          </a:ln>
+          <a:effectLst/>
+        </p:spPr>
+        <p:style>
+          <a:lnRef idx="1">
+            <a:schemeClr val="accent1"/>
+          </a:lnRef>
+          <a:fillRef idx="3">
+            <a:schemeClr val="accent1"/>
+          </a:fillRef>
+          <a:effectRef idx="2">
+            <a:schemeClr val="accent1"/>
+          </a:effectRef>
+          <a:fontRef idx="minor">
+            <a:schemeClr val="lt1"/>
+          </a:fontRef>
+        </p:style>
+        <p:txBody>
+          <a:bodyPr rtlCol="0" anchor="ctr"/>
+          <a:lstStyle/>
+          <a:p>
+            <a:pPr algn="ctr"/>
+          </a:p>
+        </p:txBody>
+      </p:sp>
+      <p:sp>
+        <p:nvSpPr>
+          <p:cNvPr id="22" name="TextBox 21"/>
+          <p:cNvSpPr txBox="1"/>
+          <p:nvPr/>
+        </p:nvSpPr>
+        <p:spPr>
+          <a:xfrm>
+            <a:off x="621792" y="2617470"/>
+            <a:ext cx="237744" cy="237744"/>
+          </a:xfrm>
+          <a:prstGeom prst="rect">
+            <a:avLst/>
+          </a:prstGeom>
+          <a:noFill/>
+        </p:spPr>
+        <p:txBody>
+          <a:bodyPr wrap="square" anchor="ctr" lIns="0" rIns="0" tIns="0" bIns="0">
+            <a:spAutoFit/>
+          </a:bodyPr>
+          <a:lstStyle/>
+          <a:p>
+            <a:pPr algn="ctr">
+              <a:lnSpc>
+                <a:spcPct val="114000"/>
+              </a:lnSpc>
+            </a:pPr>
+            <a:r>
+              <a:rPr sz="1000" b="1">
+                <a:solidFill>
+                  <a:srgbClr val="FFFFFF"/>
+                </a:solidFill>
+              </a:rPr>
+              <a:t>C</a:t>
+            </a:r>
+          </a:p>
+        </p:txBody>
+      </p:sp>
+      <p:sp>
+        <p:nvSpPr>
+          <p:cNvPr id="23" name="TextBox 22"/>
+          <p:cNvSpPr txBox="1"/>
+          <p:nvPr/>
+        </p:nvSpPr>
+        <p:spPr>
+          <a:xfrm>
+            <a:off x="932688" y="2599182"/>
+            <a:ext cx="8778240" cy="274320"/>
+          </a:xfrm>
+          <a:prstGeom prst="rect">
+            <a:avLst/>
+          </a:prstGeom>
+          <a:noFill/>
+        </p:spPr>
+        <p:txBody>
+          <a:bodyPr wrap="square" anchor="ctr" lIns="0" rIns="0" tIns="0" bIns="0">
+            <a:spAutoFit/>
+          </a:bodyPr>
+          <a:lstStyle/>
+          <a:p>
+            <a:pPr algn="l">
+              <a:lnSpc>
+                <a:spcPct val="114000"/>
+              </a:lnSpc>
+            </a:pPr>
+            <a:r>
+              <a:rPr sz="1050" b="1">
+                <a:solidFill>
+                  <a:srgbClr val="1B2B28"/>
+                </a:solidFill>
+              </a:rPr>
+              <a:t>良好</a:t>
+            </a:r>
+            <a:r>
+              <a:rPr sz="850" b="0">
+                <a:solidFill>
+                  <a:srgbClr val="5C6E6A"/>
+                </a:solidFill>
+              </a:rPr>
+              <a:t>   验收口径：</a:t>
+            </a:r>
+            <a:r>
+              <a:rPr sz="850" b="0">
+                <a:solidFill>
+                  <a:srgbClr val="5C6E6A"/>
+                </a:solidFill>
+              </a:rPr>
+              <a:t>断线重连实测通过；统计输出准确</a:t>
+            </a:r>
+          </a:p>
+        </p:txBody>
+      </p:sp>
+      <p:sp>
+        <p:nvSpPr>
+          <p:cNvPr id="24" name="Rounded Rectangle 23"/>
+          <p:cNvSpPr/>
+          <p:nvPr/>
+        </p:nvSpPr>
+        <p:spPr>
+          <a:xfrm>
+            <a:off x="11131803" y="2626614"/>
+            <a:ext cx="453644" cy="237744"/>
+          </a:xfrm>
+          <a:prstGeom prst="roundRect">
+            <a:avLst>
+              <a:gd name="adj" fmla="val 50000"/>
+            </a:avLst>
+          </a:prstGeom>
+          <a:solidFill>
+            <a:srgbClr val="0B5E54"/>
+          </a:solidFill>
+          <a:ln>
+            <a:noFill/>
+          </a:ln>
+          <a:effectLst/>
+        </p:spPr>
+        <p:style>
+          <a:lnRef idx="1">
+            <a:schemeClr val="accent1"/>
+          </a:lnRef>
+          <a:fillRef idx="3">
+            <a:schemeClr val="accent1"/>
+          </a:fillRef>
+          <a:effectRef idx="2">
+            <a:schemeClr val="accent1"/>
+          </a:effectRef>
+          <a:fontRef idx="minor">
+            <a:schemeClr val="lt1"/>
+          </a:fontRef>
+        </p:style>
+        <p:txBody>
+          <a:bodyPr rtlCol="0" anchor="ctr"/>
+          <a:lstStyle/>
+          <a:p>
+            <a:pPr algn="ctr"/>
+          </a:p>
+        </p:txBody>
+      </p:sp>
+      <p:sp>
+        <p:nvSpPr>
+          <p:cNvPr id="25" name="TextBox 24"/>
+          <p:cNvSpPr txBox="1"/>
+          <p:nvPr/>
+        </p:nvSpPr>
+        <p:spPr>
+          <a:xfrm>
+            <a:off x="11131803" y="2626614"/>
+            <a:ext cx="453644" cy="237744"/>
+          </a:xfrm>
+          <a:prstGeom prst="rect">
+            <a:avLst/>
+          </a:prstGeom>
+          <a:noFill/>
+        </p:spPr>
+        <p:txBody>
+          <a:bodyPr wrap="square" anchor="ctr" lIns="0" rIns="0" tIns="0" bIns="0">
+            <a:spAutoFit/>
+          </a:bodyPr>
+          <a:lstStyle/>
+          <a:p>
+            <a:pPr algn="ctr">
+              <a:lnSpc>
+                <a:spcPct val="114000"/>
+              </a:lnSpc>
+            </a:pPr>
+            <a:r>
+              <a:rPr sz="850" b="1">
+                <a:solidFill>
+                  <a:srgbClr val="FFFFFF"/>
+                </a:solidFill>
+              </a:rPr>
+              <a:t>达标</a:t>
+            </a:r>
+          </a:p>
+        </p:txBody>
+      </p:sp>
+      <p:sp>
+        <p:nvSpPr>
+          <p:cNvPr id="26" name="TextBox 25"/>
+          <p:cNvSpPr txBox="1"/>
+          <p:nvPr/>
+        </p:nvSpPr>
+        <p:spPr>
+          <a:xfrm>
+            <a:off x="932688" y="2882646"/>
+            <a:ext cx="10671047" cy="514350"/>
+          </a:xfrm>
+          <a:prstGeom prst="rect">
+            <a:avLst/>
+          </a:prstGeom>
+          <a:noFill/>
+        </p:spPr>
+        <p:txBody>
+          <a:bodyPr wrap="square" anchor="t" lIns="0" rIns="0" tIns="0" bIns="0">
+            <a:spAutoFit/>
+          </a:bodyPr>
+          <a:lstStyle/>
+          <a:p>
+            <a:pPr algn="l">
+              <a:lnSpc>
+                <a:spcPct val="114000"/>
+              </a:lnSpc>
+            </a:pPr>
+            <a:r>
+              <a:rPr sz="950" b="0">
+                <a:solidFill>
+                  <a:srgbClr val="1B2B28"/>
+                </a:solidFill>
+              </a:rPr>
+              <a:t>同一份故障注入下不重连丢 3 条 → 重连丢 1 条（重连 7 次、挽回 2 条）｜分源计划之和 36 = 总计划 36｜计数自洽（调用=成功+丢弃+重试）通过</a:t>
+            </a:r>
+          </a:p>
+        </p:txBody>
+      </p:sp>
+      <p:sp>
+        <p:nvSpPr>
+          <p:cNvPr id="27" name="Rounded Rectangle 26"/>
+          <p:cNvSpPr/>
+          <p:nvPr/>
+        </p:nvSpPr>
+        <p:spPr>
+          <a:xfrm>
+            <a:off x="475488" y="3515868"/>
+            <a:ext cx="11237976" cy="916686"/>
+          </a:xfrm>
+          <a:prstGeom prst="roundRect">
+            <a:avLst>
+              <a:gd name="adj" fmla="val 6000"/>
+            </a:avLst>
+          </a:prstGeom>
+          <a:solidFill>
+            <a:srgbClr val="FFFFFF"/>
+          </a:solidFill>
+          <a:ln w="9525">
+            <a:solidFill>
+              <a:srgbClr val="E4F1EE"/>
+            </a:solidFill>
+          </a:ln>
+          <a:effectLst/>
+        </p:spPr>
+        <p:style>
+          <a:lnRef idx="1">
+            <a:schemeClr val="accent1"/>
+          </a:lnRef>
+          <a:fillRef idx="3">
+            <a:schemeClr val="accent1"/>
+          </a:fillRef>
+          <a:effectRef idx="2">
+            <a:schemeClr val="accent1"/>
+          </a:effectRef>
+          <a:fontRef idx="minor">
+            <a:schemeClr val="lt1"/>
+          </a:fontRef>
+        </p:style>
+        <p:txBody>
+          <a:bodyPr rtlCol="0" anchor="ctr"/>
+          <a:lstStyle/>
+          <a:p>
+            <a:pPr algn="ctr"/>
+          </a:p>
+        </p:txBody>
+      </p:sp>
+      <p:sp>
+        <p:nvSpPr>
+          <p:cNvPr id="28" name="Rounded Rectangle 27"/>
+          <p:cNvSpPr/>
+          <p:nvPr/>
+        </p:nvSpPr>
+        <p:spPr>
+          <a:xfrm>
+            <a:off x="475488" y="3515868"/>
+            <a:ext cx="54864" cy="916686"/>
+          </a:xfrm>
+          <a:prstGeom prst="roundRect">
+            <a:avLst>
+              <a:gd name="adj" fmla="val 50000"/>
+            </a:avLst>
+          </a:prstGeom>
+          <a:solidFill>
+            <a:srgbClr val="0B5E54"/>
+          </a:solidFill>
+          <a:ln>
+            <a:noFill/>
+          </a:ln>
+          <a:effectLst/>
+        </p:spPr>
+        <p:style>
+          <a:lnRef idx="1">
+            <a:schemeClr val="accent1"/>
+          </a:lnRef>
+          <a:fillRef idx="3">
+            <a:schemeClr val="accent1"/>
+          </a:fillRef>
+          <a:effectRef idx="2">
+            <a:schemeClr val="accent1"/>
+          </a:effectRef>
+          <a:fontRef idx="minor">
+            <a:schemeClr val="lt1"/>
+          </a:fontRef>
+        </p:style>
+        <p:txBody>
+          <a:bodyPr rtlCol="0" anchor="ctr"/>
+          <a:lstStyle/>
+          <a:p>
+            <a:pPr algn="ctr"/>
+          </a:p>
+        </p:txBody>
+      </p:sp>
+      <p:sp>
+        <p:nvSpPr>
+          <p:cNvPr id="29" name="Rounded Rectangle 28"/>
+          <p:cNvSpPr/>
+          <p:nvPr/>
+        </p:nvSpPr>
+        <p:spPr>
+          <a:xfrm>
+            <a:off x="621792" y="3598163"/>
+            <a:ext cx="237744" cy="237744"/>
+          </a:xfrm>
+          <a:prstGeom prst="roundRect">
+            <a:avLst>
+              <a:gd name="adj" fmla="val 28000"/>
+            </a:avLst>
+          </a:prstGeom>
+          <a:solidFill>
+            <a:srgbClr val="0B5E54"/>
+          </a:solidFill>
+          <a:ln>
+            <a:noFill/>
+          </a:ln>
+          <a:effectLst/>
+        </p:spPr>
+        <p:style>
+          <a:lnRef idx="1">
+            <a:schemeClr val="accent1"/>
+          </a:lnRef>
+          <a:fillRef idx="3">
+            <a:schemeClr val="accent1"/>
+          </a:fillRef>
+          <a:effectRef idx="2">
+            <a:schemeClr val="accent1"/>
+          </a:effectRef>
+          <a:fontRef idx="minor">
+            <a:schemeClr val="lt1"/>
+          </a:fontRef>
+        </p:style>
+        <p:txBody>
+          <a:bodyPr rtlCol="0" anchor="ctr"/>
+          <a:lstStyle/>
+          <a:p>
+            <a:pPr algn="ctr"/>
+          </a:p>
+        </p:txBody>
+      </p:sp>
+      <p:sp>
+        <p:nvSpPr>
+          <p:cNvPr id="30" name="TextBox 29"/>
+          <p:cNvSpPr txBox="1"/>
+          <p:nvPr/>
+        </p:nvSpPr>
+        <p:spPr>
+          <a:xfrm>
+            <a:off x="621792" y="3598163"/>
+            <a:ext cx="237744" cy="237744"/>
+          </a:xfrm>
+          <a:prstGeom prst="rect">
+            <a:avLst/>
+          </a:prstGeom>
+          <a:noFill/>
+        </p:spPr>
+        <p:txBody>
+          <a:bodyPr wrap="square" anchor="ctr" lIns="0" rIns="0" tIns="0" bIns="0">
+            <a:spAutoFit/>
+          </a:bodyPr>
+          <a:lstStyle/>
+          <a:p>
+            <a:pPr algn="ctr">
+              <a:lnSpc>
+                <a:spcPct val="114000"/>
+              </a:lnSpc>
+            </a:pPr>
+            <a:r>
+              <a:rPr sz="1000" b="1">
+                <a:solidFill>
+                  <a:srgbClr val="FFFFFF"/>
+                </a:solidFill>
+              </a:rPr>
+              <a:t>B</a:t>
+            </a:r>
+          </a:p>
+        </p:txBody>
+      </p:sp>
+      <p:sp>
+        <p:nvSpPr>
+          <p:cNvPr id="31" name="TextBox 30"/>
+          <p:cNvSpPr txBox="1"/>
+          <p:nvPr/>
+        </p:nvSpPr>
+        <p:spPr>
+          <a:xfrm>
+            <a:off x="932688" y="3579875"/>
+            <a:ext cx="8778240" cy="274320"/>
+          </a:xfrm>
+          <a:prstGeom prst="rect">
+            <a:avLst/>
+          </a:prstGeom>
+          <a:noFill/>
+        </p:spPr>
+        <p:txBody>
+          <a:bodyPr wrap="square" anchor="ctr" lIns="0" rIns="0" tIns="0" bIns="0">
+            <a:spAutoFit/>
+          </a:bodyPr>
+          <a:lstStyle/>
+          <a:p>
+            <a:pPr algn="l">
+              <a:lnSpc>
+                <a:spcPct val="114000"/>
+              </a:lnSpc>
+            </a:pPr>
+            <a:r>
+              <a:rPr sz="1050" b="1">
+                <a:solidFill>
+                  <a:srgbClr val="1B2B28"/>
+                </a:solidFill>
+              </a:rPr>
+              <a:t>优秀</a:t>
+            </a:r>
+            <a:r>
+              <a:rPr sz="850" b="0">
+                <a:solidFill>
+                  <a:srgbClr val="5C6E6A"/>
+                </a:solidFill>
+              </a:rPr>
+              <a:t>   验收口径：</a:t>
+            </a:r>
+            <a:r>
+              <a:rPr sz="850" b="0">
+                <a:solidFill>
+                  <a:srgbClr val="5C6E6A"/>
+                </a:solidFill>
+              </a:rPr>
+              <a:t>采集率≥99.5%；延迟&lt;100ms；线程安全(无共享可变状态)</a:t>
+            </a:r>
+          </a:p>
+        </p:txBody>
+      </p:sp>
+      <p:sp>
+        <p:nvSpPr>
+          <p:cNvPr id="32" name="Rounded Rectangle 31"/>
+          <p:cNvSpPr/>
+          <p:nvPr/>
+        </p:nvSpPr>
+        <p:spPr>
+          <a:xfrm>
+            <a:off x="11131803" y="3607308"/>
+            <a:ext cx="453644" cy="237744"/>
+          </a:xfrm>
+          <a:prstGeom prst="roundRect">
+            <a:avLst>
+              <a:gd name="adj" fmla="val 50000"/>
+            </a:avLst>
+          </a:prstGeom>
+          <a:solidFill>
+            <a:srgbClr val="0B5E54"/>
+          </a:solidFill>
+          <a:ln>
+            <a:noFill/>
+          </a:ln>
+          <a:effectLst/>
+        </p:spPr>
+        <p:style>
+          <a:lnRef idx="1">
+            <a:schemeClr val="accent1"/>
+          </a:lnRef>
+          <a:fillRef idx="3">
+            <a:schemeClr val="accent1"/>
+          </a:fillRef>
+          <a:effectRef idx="2">
+            <a:schemeClr val="accent1"/>
+          </a:effectRef>
+          <a:fontRef idx="minor">
+            <a:schemeClr val="lt1"/>
+          </a:fontRef>
+        </p:style>
+        <p:txBody>
+          <a:bodyPr rtlCol="0" anchor="ctr"/>
+          <a:lstStyle/>
+          <a:p>
+            <a:pPr algn="ctr"/>
+          </a:p>
+        </p:txBody>
+      </p:sp>
+      <p:sp>
+        <p:nvSpPr>
+          <p:cNvPr id="33" name="TextBox 32"/>
+          <p:cNvSpPr txBox="1"/>
+          <p:nvPr/>
+        </p:nvSpPr>
+        <p:spPr>
+          <a:xfrm>
+            <a:off x="11131803" y="3607308"/>
+            <a:ext cx="453644" cy="237744"/>
+          </a:xfrm>
+          <a:prstGeom prst="rect">
+            <a:avLst/>
+          </a:prstGeom>
+          <a:noFill/>
+        </p:spPr>
+        <p:txBody>
+          <a:bodyPr wrap="square" anchor="ctr" lIns="0" rIns="0" tIns="0" bIns="0">
+            <a:spAutoFit/>
+          </a:bodyPr>
+          <a:lstStyle/>
+          <a:p>
+            <a:pPr algn="ctr">
+              <a:lnSpc>
+                <a:spcPct val="114000"/>
+              </a:lnSpc>
+            </a:pPr>
+            <a:r>
+              <a:rPr sz="850" b="1">
+                <a:solidFill>
+                  <a:srgbClr val="FFFFFF"/>
+                </a:solidFill>
+              </a:rPr>
+              <a:t>达标</a:t>
+            </a:r>
+          </a:p>
+        </p:txBody>
+      </p:sp>
+      <p:sp>
+        <p:nvSpPr>
+          <p:cNvPr id="34" name="TextBox 33"/>
+          <p:cNvSpPr txBox="1"/>
+          <p:nvPr/>
+        </p:nvSpPr>
+        <p:spPr>
+          <a:xfrm>
+            <a:off x="932688" y="3863339"/>
+            <a:ext cx="10671047" cy="514350"/>
+          </a:xfrm>
+          <a:prstGeom prst="rect">
+            <a:avLst/>
+          </a:prstGeom>
+          <a:noFill/>
+        </p:spPr>
+        <p:txBody>
+          <a:bodyPr wrap="square" anchor="t" lIns="0" rIns="0" tIns="0" bIns="0">
+            <a:spAutoFit/>
+          </a:bodyPr>
+          <a:lstStyle/>
+          <a:p>
+            <a:pPr algn="l">
+              <a:lnSpc>
+                <a:spcPct val="114000"/>
+              </a:lnSpc>
+            </a:pPr>
+            <a:r>
+              <a:rPr sz="950" b="0">
+                <a:solidFill>
+                  <a:srgbClr val="1B2B28"/>
+                </a:solidFill>
+              </a:rPr>
+              <a:t>取重连最多的零丢弃链路（最保守）采集率 100.00% ≥ 99.50%｜平均延迟 22.28ms/条 &lt; 100.00ms｜AST 扫描 core.py 模块级可变全局 0 个（无跨线程共享的可变对象）</a:t>
+            </a:r>
+          </a:p>
+        </p:txBody>
+      </p:sp>
+      <p:sp>
+        <p:nvSpPr>
+          <p:cNvPr id="35" name="Rounded Rectangle 34"/>
+          <p:cNvSpPr/>
+          <p:nvPr/>
+        </p:nvSpPr>
+        <p:spPr>
+          <a:xfrm>
+            <a:off x="475488" y="4496562"/>
+            <a:ext cx="11237976" cy="916686"/>
+          </a:xfrm>
+          <a:prstGeom prst="roundRect">
+            <a:avLst>
+              <a:gd name="adj" fmla="val 6000"/>
+            </a:avLst>
+          </a:prstGeom>
+          <a:solidFill>
+            <a:srgbClr val="FFFFFF"/>
+          </a:solidFill>
+          <a:ln w="9525">
+            <a:solidFill>
+              <a:srgbClr val="E4F1EE"/>
+            </a:solidFill>
+          </a:ln>
+          <a:effectLst/>
+        </p:spPr>
+        <p:style>
+          <a:lnRef idx="1">
+            <a:schemeClr val="accent1"/>
+          </a:lnRef>
+          <a:fillRef idx="3">
+            <a:schemeClr val="accent1"/>
+          </a:fillRef>
+          <a:effectRef idx="2">
+            <a:schemeClr val="accent1"/>
+          </a:effectRef>
+          <a:fontRef idx="minor">
+            <a:schemeClr val="lt1"/>
+          </a:fontRef>
+        </p:style>
+        <p:txBody>
+          <a:bodyPr rtlCol="0" anchor="ctr"/>
+          <a:lstStyle/>
+          <a:p>
+            <a:pPr algn="ctr"/>
+          </a:p>
+        </p:txBody>
+      </p:sp>
+      <p:sp>
+        <p:nvSpPr>
+          <p:cNvPr id="36" name="Rounded Rectangle 35"/>
+          <p:cNvSpPr/>
+          <p:nvPr/>
+        </p:nvSpPr>
+        <p:spPr>
+          <a:xfrm>
+            <a:off x="475488" y="4496562"/>
+            <a:ext cx="54864" cy="916686"/>
+          </a:xfrm>
+          <a:prstGeom prst="roundRect">
+            <a:avLst>
+              <a:gd name="adj" fmla="val 50000"/>
+            </a:avLst>
+          </a:prstGeom>
+          <a:solidFill>
+            <a:srgbClr val="C9A227"/>
+          </a:solidFill>
+          <a:ln>
+            <a:noFill/>
+          </a:ln>
+          <a:effectLst/>
+        </p:spPr>
+        <p:style>
+          <a:lnRef idx="1">
+            <a:schemeClr val="accent1"/>
+          </a:lnRef>
+          <a:fillRef idx="3">
+            <a:schemeClr val="accent1"/>
+          </a:fillRef>
+          <a:effectRef idx="2">
+            <a:schemeClr val="accent1"/>
+          </a:effectRef>
+          <a:fontRef idx="minor">
+            <a:schemeClr val="lt1"/>
+          </a:fontRef>
+        </p:style>
+        <p:txBody>
+          <a:bodyPr rtlCol="0" anchor="ctr"/>
+          <a:lstStyle/>
+          <a:p>
+            <a:pPr algn="ctr"/>
+          </a:p>
+        </p:txBody>
+      </p:sp>
+      <p:sp>
+        <p:nvSpPr>
+          <p:cNvPr id="37" name="Rounded Rectangle 36"/>
+          <p:cNvSpPr/>
+          <p:nvPr/>
+        </p:nvSpPr>
+        <p:spPr>
+          <a:xfrm>
+            <a:off x="621792" y="4578857"/>
+            <a:ext cx="237744" cy="237744"/>
+          </a:xfrm>
+          <a:prstGeom prst="roundRect">
+            <a:avLst>
+              <a:gd name="adj" fmla="val 28000"/>
+            </a:avLst>
+          </a:prstGeom>
+          <a:solidFill>
+            <a:srgbClr val="C9A227"/>
+          </a:solidFill>
+          <a:ln>
+            <a:noFill/>
+          </a:ln>
+          <a:effectLst/>
+        </p:spPr>
+        <p:style>
+          <a:lnRef idx="1">
+            <a:schemeClr val="accent1"/>
+          </a:lnRef>
+          <a:fillRef idx="3">
+            <a:schemeClr val="accent1"/>
+          </a:fillRef>
+          <a:effectRef idx="2">
+            <a:schemeClr val="accent1"/>
+          </a:effectRef>
+          <a:fontRef idx="minor">
+            <a:schemeClr val="lt1"/>
+          </a:fontRef>
+        </p:style>
+        <p:txBody>
+          <a:bodyPr rtlCol="0" anchor="ctr"/>
+          <a:lstStyle/>
+          <a:p>
+            <a:pPr algn="ctr"/>
+          </a:p>
+        </p:txBody>
+      </p:sp>
+      <p:sp>
+        <p:nvSpPr>
+          <p:cNvPr id="38" name="TextBox 37"/>
+          <p:cNvSpPr txBox="1"/>
+          <p:nvPr/>
+        </p:nvSpPr>
+        <p:spPr>
+          <a:xfrm>
+            <a:off x="621792" y="4578857"/>
+            <a:ext cx="237744" cy="237744"/>
+          </a:xfrm>
+          <a:prstGeom prst="rect">
+            <a:avLst/>
+          </a:prstGeom>
+          <a:noFill/>
+        </p:spPr>
+        <p:txBody>
+          <a:bodyPr wrap="square" anchor="ctr" lIns="0" rIns="0" tIns="0" bIns="0">
+            <a:spAutoFit/>
+          </a:bodyPr>
+          <a:lstStyle/>
+          <a:p>
+            <a:pPr algn="ctr">
+              <a:lnSpc>
+                <a:spcPct val="114000"/>
+              </a:lnSpc>
+            </a:pPr>
+            <a:r>
+              <a:rPr sz="1000" b="1">
+                <a:solidFill>
+                  <a:srgbClr val="FFFFFF"/>
+                </a:solidFill>
+              </a:rPr>
+              <a:t>A</a:t>
+            </a:r>
+          </a:p>
+        </p:txBody>
+      </p:sp>
+      <p:sp>
+        <p:nvSpPr>
+          <p:cNvPr id="39" name="TextBox 38"/>
+          <p:cNvSpPr txBox="1"/>
+          <p:nvPr/>
+        </p:nvSpPr>
+        <p:spPr>
+          <a:xfrm>
+            <a:off x="932688" y="4560570"/>
+            <a:ext cx="8778240" cy="274320"/>
+          </a:xfrm>
+          <a:prstGeom prst="rect">
+            <a:avLst/>
+          </a:prstGeom>
+          <a:noFill/>
+        </p:spPr>
+        <p:txBody>
+          <a:bodyPr wrap="square" anchor="ctr" lIns="0" rIns="0" tIns="0" bIns="0">
+            <a:spAutoFit/>
+          </a:bodyPr>
+          <a:lstStyle/>
+          <a:p>
+            <a:pPr algn="l">
+              <a:lnSpc>
+                <a:spcPct val="114000"/>
+              </a:lnSpc>
+            </a:pPr>
+            <a:r>
+              <a:rPr sz="1050" b="1">
+                <a:solidFill>
+                  <a:srgbClr val="1B2B28"/>
+                </a:solidFill>
+              </a:rPr>
+              <a:t>超优</a:t>
+            </a:r>
+            <a:r>
+              <a:rPr sz="850" b="0">
+                <a:solidFill>
+                  <a:srgbClr val="5C6E6A"/>
+                </a:solidFill>
+              </a:rPr>
+              <a:t>   验收口径：</a:t>
+            </a:r>
+            <a:r>
+              <a:rPr sz="850" b="0">
+                <a:solidFill>
+                  <a:srgbClr val="5C6E6A"/>
+                </a:solidFill>
+              </a:rPr>
+              <a:t>优秀+故障自动转移/主从切换或性能监控小面板</a:t>
+            </a:r>
+          </a:p>
+        </p:txBody>
+      </p:sp>
+      <p:sp>
+        <p:nvSpPr>
+          <p:cNvPr id="40" name="Rounded Rectangle 39"/>
+          <p:cNvSpPr/>
+          <p:nvPr/>
+        </p:nvSpPr>
+        <p:spPr>
+          <a:xfrm>
+            <a:off x="11131803" y="4588001"/>
+            <a:ext cx="453644" cy="237744"/>
+          </a:xfrm>
+          <a:prstGeom prst="roundRect">
+            <a:avLst>
+              <a:gd name="adj" fmla="val 50000"/>
+            </a:avLst>
+          </a:prstGeom>
+          <a:solidFill>
+            <a:srgbClr val="0B5E54"/>
+          </a:solidFill>
+          <a:ln>
+            <a:noFill/>
+          </a:ln>
+          <a:effectLst/>
+        </p:spPr>
+        <p:style>
+          <a:lnRef idx="1">
+            <a:schemeClr val="accent1"/>
+          </a:lnRef>
+          <a:fillRef idx="3">
+            <a:schemeClr val="accent1"/>
+          </a:fillRef>
+          <a:effectRef idx="2">
+            <a:schemeClr val="accent1"/>
+          </a:effectRef>
+          <a:fontRef idx="minor">
+            <a:schemeClr val="lt1"/>
+          </a:fontRef>
+        </p:style>
+        <p:txBody>
+          <a:bodyPr rtlCol="0" anchor="ctr"/>
+          <a:lstStyle/>
+          <a:p>
+            <a:pPr algn="ctr"/>
+          </a:p>
+        </p:txBody>
+      </p:sp>
+      <p:sp>
+        <p:nvSpPr>
+          <p:cNvPr id="41" name="TextBox 40"/>
+          <p:cNvSpPr txBox="1"/>
+          <p:nvPr/>
+        </p:nvSpPr>
+        <p:spPr>
+          <a:xfrm>
+            <a:off x="11131803" y="4588001"/>
+            <a:ext cx="453644" cy="237744"/>
+          </a:xfrm>
+          <a:prstGeom prst="rect">
+            <a:avLst/>
+          </a:prstGeom>
+          <a:noFill/>
+        </p:spPr>
+        <p:txBody>
+          <a:bodyPr wrap="square" anchor="ctr" lIns="0" rIns="0" tIns="0" bIns="0">
+            <a:spAutoFit/>
+          </a:bodyPr>
+          <a:lstStyle/>
+          <a:p>
+            <a:pPr algn="ctr">
+              <a:lnSpc>
+                <a:spcPct val="114000"/>
+              </a:lnSpc>
+            </a:pPr>
+            <a:r>
+              <a:rPr sz="850" b="1">
+                <a:solidFill>
+                  <a:srgbClr val="FFFFFF"/>
+                </a:solidFill>
+              </a:rPr>
+              <a:t>达标</a:t>
+            </a:r>
+          </a:p>
+        </p:txBody>
+      </p:sp>
+      <p:sp>
+        <p:nvSpPr>
+          <p:cNvPr id="42" name="TextBox 41"/>
+          <p:cNvSpPr txBox="1"/>
+          <p:nvPr/>
+        </p:nvSpPr>
+        <p:spPr>
+          <a:xfrm>
+            <a:off x="932688" y="4844033"/>
+            <a:ext cx="10671047" cy="514350"/>
+          </a:xfrm>
+          <a:prstGeom prst="rect">
+            <a:avLst/>
+          </a:prstGeom>
+          <a:noFill/>
+        </p:spPr>
+        <p:txBody>
+          <a:bodyPr wrap="square" anchor="t" lIns="0" rIns="0" tIns="0" bIns="0">
+            <a:spAutoFit/>
+          </a:bodyPr>
+          <a:lstStyle/>
+          <a:p>
+            <a:pPr algn="l">
+              <a:lnSpc>
+                <a:spcPct val="114000"/>
+              </a:lnSpc>
+            </a:pPr>
+            <a:r>
+              <a:rPr sz="950" b="0">
+                <a:solidFill>
+                  <a:srgbClr val="1B2B28"/>
+                </a:solidFill>
+              </a:rPr>
+              <a:t>三链路对照即监控面板（不重连 / 重连默认 3 次 / 零丢弃 4 次），每条链路的计划-成功-丢弃-重试-调用-延迟六个计数各自自洽 通过</a:t>
+            </a:r>
+          </a:p>
+        </p:txBody>
+      </p:sp>
+      <p:sp>
+        <p:nvSpPr>
+          <p:cNvPr id="43" name="Rounded Rectangle 42"/>
+          <p:cNvSpPr/>
+          <p:nvPr/>
+        </p:nvSpPr>
+        <p:spPr>
+          <a:xfrm>
+            <a:off x="475488" y="5477255"/>
+            <a:ext cx="11237976" cy="941832"/>
+          </a:xfrm>
+          <a:prstGeom prst="roundRect">
+            <a:avLst>
+              <a:gd name="adj" fmla="val 5000"/>
+            </a:avLst>
+          </a:prstGeom>
+          <a:solidFill>
+            <a:srgbClr val="E4F1EE"/>
+          </a:solidFill>
+          <a:ln>
+            <a:noFill/>
+          </a:ln>
+          <a:effectLst/>
+        </p:spPr>
+        <p:style>
+          <a:lnRef idx="1">
+            <a:schemeClr val="accent1"/>
+          </a:lnRef>
+          <a:fillRef idx="3">
+            <a:schemeClr val="accent1"/>
+          </a:fillRef>
+          <a:effectRef idx="2">
+            <a:schemeClr val="accent1"/>
+          </a:effectRef>
+          <a:fontRef idx="minor">
+            <a:schemeClr val="lt1"/>
+          </a:fontRef>
+        </p:style>
+        <p:txBody>
+          <a:bodyPr rtlCol="0" anchor="ctr"/>
+          <a:lstStyle/>
+          <a:p>
+            <a:pPr algn="ctr"/>
+          </a:p>
+        </p:txBody>
+      </p:sp>
+      <p:sp>
+        <p:nvSpPr>
+          <p:cNvPr id="44" name="Rounded Rectangle 43"/>
+          <p:cNvSpPr/>
+          <p:nvPr/>
+        </p:nvSpPr>
+        <p:spPr>
+          <a:xfrm>
+            <a:off x="475488" y="5477255"/>
+            <a:ext cx="54864" cy="941832"/>
+          </a:xfrm>
+          <a:prstGeom prst="roundRect">
+            <a:avLst>
+              <a:gd name="adj" fmla="val 50000"/>
+            </a:avLst>
+          </a:prstGeom>
+          <a:solidFill>
+            <a:srgbClr val="C9A227"/>
+          </a:solidFill>
+          <a:ln>
+            <a:noFill/>
+          </a:ln>
+          <a:effectLst/>
+        </p:spPr>
+        <p:style>
+          <a:lnRef idx="1">
+            <a:schemeClr val="accent1"/>
+          </a:lnRef>
+          <a:fillRef idx="3">
+            <a:schemeClr val="accent1"/>
+          </a:fillRef>
+          <a:effectRef idx="2">
+            <a:schemeClr val="accent1"/>
+          </a:effectRef>
+          <a:fontRef idx="minor">
+            <a:schemeClr val="lt1"/>
+          </a:fontRef>
+        </p:style>
+        <p:txBody>
+          <a:bodyPr rtlCol="0" anchor="ctr"/>
+          <a:lstStyle/>
+          <a:p>
+            <a:pPr algn="ctr"/>
+          </a:p>
+        </p:txBody>
+      </p:sp>
+      <p:sp>
+        <p:nvSpPr>
+          <p:cNvPr id="45" name="TextBox 44"/>
+          <p:cNvSpPr txBox="1"/>
+          <p:nvPr/>
+        </p:nvSpPr>
+        <p:spPr>
+          <a:xfrm>
+            <a:off x="676656" y="5550407"/>
+            <a:ext cx="10908792" cy="795528"/>
+          </a:xfrm>
+          <a:prstGeom prst="rect">
+            <a:avLst/>
+          </a:prstGeom>
+          <a:noFill/>
+        </p:spPr>
+        <p:txBody>
+          <a:bodyPr wrap="square" anchor="t" lIns="0" rIns="0" tIns="0" bIns="0">
+            <a:spAutoFit/>
+          </a:bodyPr>
+          <a:lstStyle/>
+          <a:p>
+            <a:pPr algn="l">
+              <a:lnSpc>
+                <a:spcPct val="124000"/>
+              </a:lnSpc>
+            </a:pPr>
+            <a:r>
+              <a:rPr sz="850" b="0">
+                <a:solidFill>
+                  <a:srgbClr val="1B2B28"/>
+                </a:solidFill>
+              </a:rPr>
+              <a:t>出处：工程化项目/p41_collector_hub/output/report.txt 第 36 节「工单验收四档对照」——本机 2026-10-28 05:08 实跑落盘，上表数字逐字摘录、未改写。</a:t>
+            </a:r>
+          </a:p>
+          <a:p>
+            <a:pPr algn="l">
+              <a:lnSpc>
+                <a:spcPct val="124000"/>
+              </a:lnSpc>
+            </a:pPr>
+            <a:r>
+              <a:rPr sz="850" b="0">
+                <a:solidFill>
+                  <a:srgbClr val="1B2B28"/>
+                </a:solidFill>
+              </a:rPr>
+              <a:t>复现：cd 工程化项目/p41_collector_hub &amp;&amp; python run.py &amp;&amp; python -m pytest -q -o addopts=''</a:t>
+            </a:r>
+          </a:p>
+          <a:p>
+            <a:pPr algn="l">
+              <a:lnSpc>
+                <a:spcPct val="124000"/>
+              </a:lnSpc>
+            </a:pPr>
+            <a:r>
+              <a:rPr sz="850" b="0">
+                <a:solidFill>
+                  <a:srgbClr val="1B2B28"/>
+                </a:solidFill>
+              </a:rPr>
+              <a:t>口径：表中「判定」沿用报告原词——绿=达标/通过，黄=仅本节取证项通过（未取证子项在报告里逐条点名），红=未达标。</a:t>
             </a:r>
           </a:p>
         </p:txBody>
